--- a/submission/prezentaciya-finalnaya.pptx
+++ b/submission/prezentaciya-finalnaya.pptx
@@ -5258,7 +5258,7 @@
                 <a:ea typeface="Calibri" pitchFamily="34" charset="-122"/>
                 <a:cs typeface="Calibri" pitchFamily="34" charset="-120"/>
               </a:rPr>
-              <a:t>Правило срабатывает на 99-м процентиле квартального диапазона — когда валюта получателя дорога и клиент получает меньше. Формулировка «выгоднее, чем в N % дней» превращается там в «хуже, чем в 99 % дней». Единственный найденный допустимый кандидат — рамка «перестань ждать» — прочиталась как приманка, а честная версия «курс ниже обычного» отменяет сама себя: заголовок уже всё сказал, открывать нечего. Разница между сигналом и обычным днём у нас в размере (+63 против +3 б. п.), а не в частоте (65 против 51 случая из ста) — одной фразой это не передаётся.</a:t>
+              <a:t>Правило срабатывает на 99-м перцентиле квартального диапазона — когда валюта получателя дорога и клиент получает меньше. Формулировка «выгоднее, чем в N % дней» превращается там в «хуже, чем в 99 % дней». Единственный найденный допустимый кандидат — рамка «перестань ждать» — прочиталась как приманка, а честная версия «курс ниже обычного» отменяет сама себя: заголовок уже всё сказал, открывать нечего. Разница между сигналом и обычным днём у нас в размере (+63 против +3 б. п.), а не в частоте (65 против 51 случая из ста) — одной фразой это не передаётся.</a:t>
             </a:r>
             <a:endParaRPr lang="en-US" sz="1250" dirty="0"/>
           </a:p>
@@ -8887,7 +8887,7 @@
                 <a:ea typeface="Calibri" pitchFamily="34" charset="-122"/>
                 <a:cs typeface="Calibri" pitchFamily="34" charset="-120"/>
               </a:rPr>
-              <a:t>Порог процентиля — чтобы не хвастаться подбрасыванием монеты. Cooldown против серий: 89 % промежутков между сигналами короче четырёх публикаций, а максимальная пауза — 406 дней. Блэкауты по коридорам: 24 апреля в Армению, Рамадан вечером. Частота правила 0,60 в неделю — ниже рамки 1–2, и мы это не прячем: в рамку попадает более широкий порог pct ≥ 85 при lift 1,26.</a:t>
+              <a:t>Порог перцентиля — чтобы не хвастаться подбрасыванием монеты. Cooldown против серий: 89 % промежутков между сигналами короче четырёх публикаций, а максимальная пауза — 406 дней. Блэкауты по коридорам: 24 апреля в Армению, Рамадан вечером. Частота правила 0,60 в неделю — ниже рамки 1–2, и мы это не прячем: в рамку попадает более широкий порог pct ≥ 85 при lift 1,26.</a:t>
             </a:r>
             <a:endParaRPr lang="en-US" sz="1250" dirty="0"/>
           </a:p>
@@ -9308,7 +9308,7 @@
                 <a:ea typeface="Cambria" pitchFamily="34" charset="-122"/>
                 <a:cs typeface="Cambria" pitchFamily="34" charset="-120"/>
               </a:rPr>
-              <a:t>Пилот: что меряем, чего не знаем, чего просим</a:t>
+              <a:t>Пилот: что измеряем, чего не знаем, чего просим</a:t>
             </a:r>
             <a:endParaRPr lang="en-US" sz="2700" dirty="0"/>
           </a:p>

--- a/submission/prezentaciya-finalnaya.pptx
+++ b/submission/prezentaciya-finalnaya.pptx
@@ -3227,24 +3227,27 @@
         </p:nvSpPr>
         <p:spPr>
           <a:xfrm>
-            <a:off x="640080" y="5779008"/>
-            <a:ext cx="10881360" cy="347472"/>
-          </a:xfrm>
-          <a:prstGeom prst="rect">
-            <a:avLst/>
-          </a:prstGeom>
-          <a:noFill/>
-          <a:ln/>
-        </p:spPr>
-        <p:txBody>
-          <a:bodyPr wrap="square" lIns="0" tIns="0" rIns="0" bIns="0" rtlCol="0" anchor="ctr"/>
+            <a:off x="640080" y="5742432"/>
+            <a:ext cx="10881360" cy="512064"/>
+          </a:xfrm>
+          <a:prstGeom prst="rect">
+            <a:avLst/>
+          </a:prstGeom>
+          <a:noFill/>
+          <a:ln/>
+        </p:spPr>
+        <p:txBody>
+          <a:bodyPr wrap="square" lIns="0" tIns="0" rIns="0" bIns="0" rtlCol="0" anchor="t"/>
           <a:lstStyle/>
           <a:p>
             <a:pPr indent="0" marL="0">
-              <a:buNone/>
-            </a:pPr>
-            <a:r>
-              <a:rPr lang="en-US" sz="1300" dirty="0">
+              <a:lnSpc>
+                <a:spcPts val="1700"/>
+              </a:lnSpc>
+              <a:buNone/>
+            </a:pPr>
+            <a:r>
+              <a:rPr lang="en-US" sz="1250" dirty="0">
                 <a:solidFill>
                   <a:srgbClr val="4E5966"/>
                 </a:solidFill>
@@ -3252,9 +3255,9 @@
                 <a:ea typeface="Calibri" pitchFamily="34" charset="-122"/>
                 <a:cs typeface="Calibri" pitchFamily="34" charset="-120"/>
               </a:rPr>
-              <a:t>Раньше 15:30 повода написать не существует, позже 21:00 по местному писать нельзя. Всё окно продукта – эти несколько часов.</a:t>
-            </a:r>
-            <a:endParaRPr lang="en-US" sz="1300" dirty="0"/>
+              <a:t>В 15:30 окно сделок закрывается и курс следующего дня уже определён рынком; ЦБ публикует его обычно до 18:00. Мы ждём публикацию, а не считаем сами, — хотя по данным ветки Ивана среднее биржевое окно воспроизводит будущий курс с медианной ошибкой 2,6 б. п.</a:t>
+            </a:r>
+            <a:endParaRPr lang="en-US" sz="1250" dirty="0"/>
           </a:p>
         </p:txBody>
       </p:sp>
@@ -3961,12 +3964,12 @@
         </p:nvSpPr>
         <p:spPr>
           <a:xfrm>
-            <a:off x="640080" y="1463040"/>
-            <a:ext cx="3520440" cy="1426464"/>
+            <a:off x="640080" y="1426464"/>
+            <a:ext cx="3520440" cy="1481328"/>
           </a:xfrm>
           <a:prstGeom prst="roundRect">
             <a:avLst>
-              <a:gd name="adj" fmla="val 3846"/>
+              <a:gd name="adj" fmla="val 3704"/>
             </a:avLst>
           </a:prstGeom>
           <a:solidFill>
@@ -3983,7 +3986,7 @@
         </p:nvSpPr>
         <p:spPr>
           <a:xfrm>
-            <a:off x="896112" y="1645920"/>
+            <a:off x="896112" y="1609344"/>
             <a:ext cx="3008376" cy="475488"/>
           </a:xfrm>
           <a:prstGeom prst="rect">
@@ -4022,8 +4025,8 @@
         </p:nvSpPr>
         <p:spPr>
           <a:xfrm>
-            <a:off x="896112" y="2176272"/>
-            <a:ext cx="3008376" cy="530352"/>
+            <a:off x="896112" y="2139696"/>
+            <a:ext cx="3008376" cy="585216"/>
           </a:xfrm>
           <a:prstGeom prst="rect">
             <a:avLst/>
@@ -4050,7 +4053,7 @@
                 <a:ea typeface="Calibri" pitchFamily="34" charset="-122"/>
                 <a:cs typeface="Calibri" pitchFamily="34" charset="-120"/>
               </a:rPr>
-              <a:t>Сумма получателя в первой строке. Курс и проценты – не та единица, в которой клиент думает.</a:t>
+              <a:t>Сумма получателя в первой строке. Дни вместо процентов: «всего 8 дней из девяноста».</a:t>
             </a:r>
             <a:endParaRPr lang="en-US" sz="1250" dirty="0"/>
           </a:p>
@@ -4064,12 +4067,12 @@
         </p:nvSpPr>
         <p:spPr>
           <a:xfrm>
-            <a:off x="4325112" y="1463040"/>
-            <a:ext cx="3520440" cy="1426464"/>
+            <a:off x="4325112" y="1426464"/>
+            <a:ext cx="3520440" cy="1481328"/>
           </a:xfrm>
           <a:prstGeom prst="roundRect">
             <a:avLst>
-              <a:gd name="adj" fmla="val 3846"/>
+              <a:gd name="adj" fmla="val 3704"/>
             </a:avLst>
           </a:prstGeom>
           <a:solidFill>
@@ -4086,7 +4089,7 @@
         </p:nvSpPr>
         <p:spPr>
           <a:xfrm>
-            <a:off x="4581144" y="1645920"/>
+            <a:off x="4581144" y="1609344"/>
             <a:ext cx="3008376" cy="475488"/>
           </a:xfrm>
           <a:prstGeom prst="rect">
@@ -4125,8 +4128,8 @@
         </p:nvSpPr>
         <p:spPr>
           <a:xfrm>
-            <a:off x="4581144" y="2176272"/>
-            <a:ext cx="3008376" cy="530352"/>
+            <a:off x="4581144" y="2139696"/>
+            <a:ext cx="3008376" cy="585216"/>
           </a:xfrm>
           <a:prstGeom prst="rect">
             <a:avLst/>
@@ -4167,12 +4170,12 @@
         </p:nvSpPr>
         <p:spPr>
           <a:xfrm>
-            <a:off x="8001000" y="1463040"/>
-            <a:ext cx="3520440" cy="1426464"/>
+            <a:off x="8001000" y="1426464"/>
+            <a:ext cx="3520440" cy="1481328"/>
           </a:xfrm>
           <a:prstGeom prst="roundRect">
             <a:avLst>
-              <a:gd name="adj" fmla="val 3846"/>
+              <a:gd name="adj" fmla="val 3704"/>
             </a:avLst>
           </a:prstGeom>
           <a:solidFill>
@@ -4189,7 +4192,7 @@
         </p:nvSpPr>
         <p:spPr>
           <a:xfrm>
-            <a:off x="8257032" y="1645920"/>
+            <a:off x="8257032" y="1609344"/>
             <a:ext cx="3008376" cy="475488"/>
           </a:xfrm>
           <a:prstGeom prst="rect">
@@ -4214,7 +4217,7 @@
                 <a:ea typeface="Cambria" pitchFamily="34" charset="-122"/>
                 <a:cs typeface="Cambria" pitchFamily="34" charset="-120"/>
               </a:rPr>
-              <a:t>Дни, а не проценты</a:t>
+              <a:t>Сумма в каждом сообщении</a:t>
             </a:r>
             <a:endParaRPr lang="en-US" sz="1550" dirty="0"/>
           </a:p>
@@ -4228,8 +4231,8 @@
         </p:nvSpPr>
         <p:spPr>
           <a:xfrm>
-            <a:off x="8257032" y="2176272"/>
-            <a:ext cx="3008376" cy="530352"/>
+            <a:off x="8257032" y="2139696"/>
+            <a:ext cx="3008376" cy="585216"/>
           </a:xfrm>
           <a:prstGeom prst="rect">
             <a:avLst/>
@@ -4256,7 +4259,7 @@
                 <a:ea typeface="Calibri" pitchFamily="34" charset="-122"/>
                 <a:cs typeface="Calibri" pitchFamily="34" charset="-120"/>
               </a:rPr>
-              <a:t>«8 дней из девяноста» понятнее, чем «лучше 91 % дней», и не требует от клиента статистики.</a:t>
+              <a:t>Сумма стоит в любом поводе, даже в праздничном: это то, ради чего пуш открывают.</a:t>
             </a:r>
             <a:endParaRPr lang="en-US" sz="1250" dirty="0"/>
           </a:p>
@@ -4277,7 +4280,7 @@
           </p:nvPr>
         </p:nvGraphicFramePr>
         <p:xfrm>
-          <a:off x="640080" y="3017520"/>
+          <a:off x="640080" y="3035808"/>
           <a:ext cx="10881360" cy="914400"/>
         </p:xfrm>
         <a:graphic>
@@ -4285,9 +4288,9 @@
             <a:tbl>
               <a:tblPr/>
               <a:tblGrid>
-                <a:gridCol w="1920240"/>
-                <a:gridCol w="3017520"/>
-                <a:gridCol w="5943600"/>
+                <a:gridCol w="2103120"/>
+                <a:gridCol w="2926080"/>
+                <a:gridCol w="5852160"/>
               </a:tblGrid>
               <a:tr h="310896">
                 <a:tc>
@@ -4569,7 +4572,7 @@
                           <a:ea typeface="Calibri" pitchFamily="34" charset="-122"/>
                           <a:cs typeface="Calibri" pitchFamily="34" charset="-120"/>
                         </a:rPr>
-                        <a:t>Курс дошёл до вашего уровня</a:t>
+                        <a:t>🎯 Дошло до вашего уровня</a:t>
                       </a:r>
                       <a:endParaRPr lang="en-US" sz="1150" dirty="0">
                         <a:latin typeface="Calibri" charset="0"/>
@@ -4634,7 +4637,7 @@
                           <a:ea typeface="Calibri" pitchFamily="34" charset="-122"/>
                           <a:cs typeface="Calibri" pitchFamily="34" charset="-120"/>
                         </a:rPr>
-                        <a:t>Вы просили при 4 400 000 – дошло. За 30 000 ₽ – 4 402 000 сум. Курс ЦБ на 4 сентября</a:t>
+                        <a:t>За 30 000 ₽ — 4 402 000 сум. Вы просили при 4 400 000 — дошло. Курс ЦБ на 4 сентября</a:t>
                       </a:r>
                       <a:endParaRPr lang="en-US" sz="1150" dirty="0">
                         <a:latin typeface="Calibri" charset="0"/>
@@ -4766,7 +4769,7 @@
                           <a:ea typeface="Calibri" pitchFamily="34" charset="-122"/>
                           <a:cs typeface="Calibri" pitchFamily="34" charset="-120"/>
                         </a:rPr>
-                        <a:t>Такой курс бывает редко</a:t>
+                        <a:t>✨ Такой курс бывает нечасто</a:t>
                       </a:r>
                       <a:endParaRPr lang="en-US" sz="1150" dirty="0">
                         <a:latin typeface="Calibri" charset="0"/>
@@ -4831,7 +4834,401 @@
                           <a:ea typeface="Calibri" pitchFamily="34" charset="-122"/>
                           <a:cs typeface="Calibri" pitchFamily="34" charset="-120"/>
                         </a:rPr>
-                        <a:t>За 30 000 ₽ – 3 198 сомони. Лучше за три месяца было 8 дней из девяноста. Курс ЦБ на 4 сентября</a:t>
+                        <a:t>За 30 000 ₽ — 3 198 сомони. Лучше было всего 8 дней из последних девяноста. Курс ЦБ на 4 сентября</a:t>
+                      </a:r>
+                      <a:endParaRPr lang="en-US" sz="1150" dirty="0">
+                        <a:latin typeface="Calibri" charset="0"/>
+                        <a:ea typeface="Calibri" charset="0"/>
+                        <a:cs typeface="Calibri" charset="0"/>
+                      </a:endParaRPr>
+                    </a:p>
+                  </a:txBody>
+                  <a:tcPr marL="91440" marR="91440" marT="45720" marB="45720" anchor="ctr">
+                    <a:lnL w="6350" cap="flat" cmpd="sng" algn="ctr">
+                      <a:solidFill>
+                        <a:srgbClr val="DCE2E8"/>
+                      </a:solidFill>
+                      <a:prstDash val="solid"/>
+                      <a:round/>
+                      <a:headEnd type="none" w="med" len="med"/>
+                      <a:tailEnd type="none" w="med" len="med"/>
+                    </a:lnL>
+                    <a:lnR w="6350" cap="flat" cmpd="sng" algn="ctr">
+                      <a:solidFill>
+                        <a:srgbClr val="DCE2E8"/>
+                      </a:solidFill>
+                      <a:prstDash val="solid"/>
+                      <a:round/>
+                      <a:headEnd type="none" w="med" len="med"/>
+                      <a:tailEnd type="none" w="med" len="med"/>
+                    </a:lnR>
+                    <a:lnT w="6350" cap="flat" cmpd="sng" algn="ctr">
+                      <a:solidFill>
+                        <a:srgbClr val="DCE2E8"/>
+                      </a:solidFill>
+                      <a:prstDash val="solid"/>
+                      <a:round/>
+                      <a:headEnd type="none" w="med" len="med"/>
+                      <a:tailEnd type="none" w="med" len="med"/>
+                    </a:lnT>
+                    <a:lnB w="6350" cap="flat" cmpd="sng" algn="ctr">
+                      <a:solidFill>
+                        <a:srgbClr val="DCE2E8"/>
+                      </a:solidFill>
+                      <a:prstDash val="solid"/>
+                      <a:round/>
+                      <a:headEnd type="none" w="med" len="med"/>
+                      <a:tailEnd type="none" w="med" len="med"/>
+                    </a:lnB>
+                  </a:tcPr>
+                </a:tc>
+              </a:tr>
+              <a:tr h="310896">
+                <a:tc>
+                  <a:txBody>
+                    <a:bodyPr/>
+                    <a:lstStyle/>
+                    <a:p>
+                      <a:pPr indent="0" marL="0">
+                        <a:buNone/>
+                      </a:pPr>
+                      <a:r>
+                        <a:rPr lang="en-US" sz="1150" dirty="0">
+                          <a:solidFill>
+                            <a:srgbClr val="4E5966"/>
+                          </a:solidFill>
+                          <a:latin typeface="Calibri" pitchFamily="34" charset="0"/>
+                          <a:ea typeface="Calibri" pitchFamily="34" charset="-122"/>
+                          <a:cs typeface="Calibri" pitchFamily="34" charset="-120"/>
+                        </a:rPr>
+                        <a:t>Школа</a:t>
+                      </a:r>
+                      <a:endParaRPr lang="en-US" sz="1150" dirty="0">
+                        <a:latin typeface="Calibri" charset="0"/>
+                        <a:ea typeface="Calibri" charset="0"/>
+                        <a:cs typeface="Calibri" charset="0"/>
+                      </a:endParaRPr>
+                    </a:p>
+                  </a:txBody>
+                  <a:tcPr marL="91440" marR="91440" marT="45720" marB="45720" anchor="ctr">
+                    <a:lnL w="6350" cap="flat" cmpd="sng" algn="ctr">
+                      <a:solidFill>
+                        <a:srgbClr val="DCE2E8"/>
+                      </a:solidFill>
+                      <a:prstDash val="solid"/>
+                      <a:round/>
+                      <a:headEnd type="none" w="med" len="med"/>
+                      <a:tailEnd type="none" w="med" len="med"/>
+                    </a:lnL>
+                    <a:lnR w="6350" cap="flat" cmpd="sng" algn="ctr">
+                      <a:solidFill>
+                        <a:srgbClr val="DCE2E8"/>
+                      </a:solidFill>
+                      <a:prstDash val="solid"/>
+                      <a:round/>
+                      <a:headEnd type="none" w="med" len="med"/>
+                      <a:tailEnd type="none" w="med" len="med"/>
+                    </a:lnR>
+                    <a:lnT w="6350" cap="flat" cmpd="sng" algn="ctr">
+                      <a:solidFill>
+                        <a:srgbClr val="DCE2E8"/>
+                      </a:solidFill>
+                      <a:prstDash val="solid"/>
+                      <a:round/>
+                      <a:headEnd type="none" w="med" len="med"/>
+                      <a:tailEnd type="none" w="med" len="med"/>
+                    </a:lnT>
+                    <a:lnB w="6350" cap="flat" cmpd="sng" algn="ctr">
+                      <a:solidFill>
+                        <a:srgbClr val="DCE2E8"/>
+                      </a:solidFill>
+                      <a:prstDash val="solid"/>
+                      <a:round/>
+                      <a:headEnd type="none" w="med" len="med"/>
+                      <a:tailEnd type="none" w="med" len="med"/>
+                    </a:lnB>
+                  </a:tcPr>
+                </a:tc>
+                <a:tc>
+                  <a:txBody>
+                    <a:bodyPr/>
+                    <a:lstStyle/>
+                    <a:p>
+                      <a:pPr indent="0" marL="0">
+                        <a:buNone/>
+                      </a:pPr>
+                      <a:r>
+                        <a:rPr lang="en-US" sz="1150" dirty="0">
+                          <a:solidFill>
+                            <a:srgbClr val="4E5966"/>
+                          </a:solidFill>
+                          <a:latin typeface="Calibri" pitchFamily="34" charset="0"/>
+                          <a:ea typeface="Calibri" pitchFamily="34" charset="-122"/>
+                          <a:cs typeface="Calibri" pitchFamily="34" charset="-120"/>
+                        </a:rPr>
+                        <a:t>🎒 Скоро первое сентября</a:t>
+                      </a:r>
+                      <a:endParaRPr lang="en-US" sz="1150" dirty="0">
+                        <a:latin typeface="Calibri" charset="0"/>
+                        <a:ea typeface="Calibri" charset="0"/>
+                        <a:cs typeface="Calibri" charset="0"/>
+                      </a:endParaRPr>
+                    </a:p>
+                  </a:txBody>
+                  <a:tcPr marL="91440" marR="91440" marT="45720" marB="45720" anchor="ctr">
+                    <a:lnL w="6350" cap="flat" cmpd="sng" algn="ctr">
+                      <a:solidFill>
+                        <a:srgbClr val="DCE2E8"/>
+                      </a:solidFill>
+                      <a:prstDash val="solid"/>
+                      <a:round/>
+                      <a:headEnd type="none" w="med" len="med"/>
+                      <a:tailEnd type="none" w="med" len="med"/>
+                    </a:lnL>
+                    <a:lnR w="6350" cap="flat" cmpd="sng" algn="ctr">
+                      <a:solidFill>
+                        <a:srgbClr val="DCE2E8"/>
+                      </a:solidFill>
+                      <a:prstDash val="solid"/>
+                      <a:round/>
+                      <a:headEnd type="none" w="med" len="med"/>
+                      <a:tailEnd type="none" w="med" len="med"/>
+                    </a:lnR>
+                    <a:lnT w="6350" cap="flat" cmpd="sng" algn="ctr">
+                      <a:solidFill>
+                        <a:srgbClr val="DCE2E8"/>
+                      </a:solidFill>
+                      <a:prstDash val="solid"/>
+                      <a:round/>
+                      <a:headEnd type="none" w="med" len="med"/>
+                      <a:tailEnd type="none" w="med" len="med"/>
+                    </a:lnT>
+                    <a:lnB w="6350" cap="flat" cmpd="sng" algn="ctr">
+                      <a:solidFill>
+                        <a:srgbClr val="DCE2E8"/>
+                      </a:solidFill>
+                      <a:prstDash val="solid"/>
+                      <a:round/>
+                      <a:headEnd type="none" w="med" len="med"/>
+                      <a:tailEnd type="none" w="med" len="med"/>
+                    </a:lnB>
+                  </a:tcPr>
+                </a:tc>
+                <a:tc>
+                  <a:txBody>
+                    <a:bodyPr/>
+                    <a:lstStyle/>
+                    <a:p>
+                      <a:pPr indent="0" marL="0">
+                        <a:buNone/>
+                      </a:pPr>
+                      <a:r>
+                        <a:rPr lang="en-US" sz="1150" dirty="0">
+                          <a:solidFill>
+                            <a:srgbClr val="4E5966"/>
+                          </a:solidFill>
+                          <a:latin typeface="Calibri" pitchFamily="34" charset="0"/>
+                          <a:ea typeface="Calibri" pitchFamily="34" charset="-122"/>
+                          <a:cs typeface="Calibri" pitchFamily="34" charset="-120"/>
+                        </a:rPr>
+                        <a:t>За 30 000 ₽ — 4 402 000 сум, дойдёт за час. Успеете к школе. Курс ЦБ на 25 августа</a:t>
+                      </a:r>
+                      <a:endParaRPr lang="en-US" sz="1150" dirty="0">
+                        <a:latin typeface="Calibri" charset="0"/>
+                        <a:ea typeface="Calibri" charset="0"/>
+                        <a:cs typeface="Calibri" charset="0"/>
+                      </a:endParaRPr>
+                    </a:p>
+                  </a:txBody>
+                  <a:tcPr marL="91440" marR="91440" marT="45720" marB="45720" anchor="ctr">
+                    <a:lnL w="6350" cap="flat" cmpd="sng" algn="ctr">
+                      <a:solidFill>
+                        <a:srgbClr val="DCE2E8"/>
+                      </a:solidFill>
+                      <a:prstDash val="solid"/>
+                      <a:round/>
+                      <a:headEnd type="none" w="med" len="med"/>
+                      <a:tailEnd type="none" w="med" len="med"/>
+                    </a:lnL>
+                    <a:lnR w="6350" cap="flat" cmpd="sng" algn="ctr">
+                      <a:solidFill>
+                        <a:srgbClr val="DCE2E8"/>
+                      </a:solidFill>
+                      <a:prstDash val="solid"/>
+                      <a:round/>
+                      <a:headEnd type="none" w="med" len="med"/>
+                      <a:tailEnd type="none" w="med" len="med"/>
+                    </a:lnR>
+                    <a:lnT w="6350" cap="flat" cmpd="sng" algn="ctr">
+                      <a:solidFill>
+                        <a:srgbClr val="DCE2E8"/>
+                      </a:solidFill>
+                      <a:prstDash val="solid"/>
+                      <a:round/>
+                      <a:headEnd type="none" w="med" len="med"/>
+                      <a:tailEnd type="none" w="med" len="med"/>
+                    </a:lnT>
+                    <a:lnB w="6350" cap="flat" cmpd="sng" algn="ctr">
+                      <a:solidFill>
+                        <a:srgbClr val="DCE2E8"/>
+                      </a:solidFill>
+                      <a:prstDash val="solid"/>
+                      <a:round/>
+                      <a:headEnd type="none" w="med" len="med"/>
+                      <a:tailEnd type="none" w="med" len="med"/>
+                    </a:lnB>
+                  </a:tcPr>
+                </a:tc>
+              </a:tr>
+              <a:tr h="310896">
+                <a:tc>
+                  <a:txBody>
+                    <a:bodyPr/>
+                    <a:lstStyle/>
+                    <a:p>
+                      <a:pPr indent="0" marL="0">
+                        <a:buNone/>
+                      </a:pPr>
+                      <a:r>
+                        <a:rPr lang="en-US" sz="1150" dirty="0">
+                          <a:solidFill>
+                            <a:srgbClr val="4E5966"/>
+                          </a:solidFill>
+                          <a:latin typeface="Calibri" pitchFamily="34" charset="0"/>
+                          <a:ea typeface="Calibri" pitchFamily="34" charset="-122"/>
+                          <a:cs typeface="Calibri" pitchFamily="34" charset="-120"/>
+                        </a:rPr>
+                        <a:t>Национальный праздник</a:t>
+                      </a:r>
+                      <a:endParaRPr lang="en-US" sz="1150" dirty="0">
+                        <a:latin typeface="Calibri" charset="0"/>
+                        <a:ea typeface="Calibri" charset="0"/>
+                        <a:cs typeface="Calibri" charset="0"/>
+                      </a:endParaRPr>
+                    </a:p>
+                  </a:txBody>
+                  <a:tcPr marL="91440" marR="91440" marT="45720" marB="45720" anchor="ctr">
+                    <a:lnL w="6350" cap="flat" cmpd="sng" algn="ctr">
+                      <a:solidFill>
+                        <a:srgbClr val="DCE2E8"/>
+                      </a:solidFill>
+                      <a:prstDash val="solid"/>
+                      <a:round/>
+                      <a:headEnd type="none" w="med" len="med"/>
+                      <a:tailEnd type="none" w="med" len="med"/>
+                    </a:lnL>
+                    <a:lnR w="6350" cap="flat" cmpd="sng" algn="ctr">
+                      <a:solidFill>
+                        <a:srgbClr val="DCE2E8"/>
+                      </a:solidFill>
+                      <a:prstDash val="solid"/>
+                      <a:round/>
+                      <a:headEnd type="none" w="med" len="med"/>
+                      <a:tailEnd type="none" w="med" len="med"/>
+                    </a:lnR>
+                    <a:lnT w="6350" cap="flat" cmpd="sng" algn="ctr">
+                      <a:solidFill>
+                        <a:srgbClr val="DCE2E8"/>
+                      </a:solidFill>
+                      <a:prstDash val="solid"/>
+                      <a:round/>
+                      <a:headEnd type="none" w="med" len="med"/>
+                      <a:tailEnd type="none" w="med" len="med"/>
+                    </a:lnT>
+                    <a:lnB w="6350" cap="flat" cmpd="sng" algn="ctr">
+                      <a:solidFill>
+                        <a:srgbClr val="DCE2E8"/>
+                      </a:solidFill>
+                      <a:prstDash val="solid"/>
+                      <a:round/>
+                      <a:headEnd type="none" w="med" len="med"/>
+                      <a:tailEnd type="none" w="med" len="med"/>
+                    </a:lnB>
+                  </a:tcPr>
+                </a:tc>
+                <a:tc>
+                  <a:txBody>
+                    <a:bodyPr/>
+                    <a:lstStyle/>
+                    <a:p>
+                      <a:pPr indent="0" marL="0">
+                        <a:buNone/>
+                      </a:pPr>
+                      <a:r>
+                        <a:rPr lang="en-US" sz="1150" dirty="0">
+                          <a:solidFill>
+                            <a:srgbClr val="4E5966"/>
+                          </a:solidFill>
+                          <a:latin typeface="Calibri" pitchFamily="34" charset="0"/>
+                          <a:ea typeface="Calibri" pitchFamily="34" charset="-122"/>
+                          <a:cs typeface="Calibri" pitchFamily="34" charset="-120"/>
+                        </a:rPr>
+                        <a:t>🌷 Навруз муборак!</a:t>
+                      </a:r>
+                      <a:endParaRPr lang="en-US" sz="1150" dirty="0">
+                        <a:latin typeface="Calibri" charset="0"/>
+                        <a:ea typeface="Calibri" charset="0"/>
+                        <a:cs typeface="Calibri" charset="0"/>
+                      </a:endParaRPr>
+                    </a:p>
+                  </a:txBody>
+                  <a:tcPr marL="91440" marR="91440" marT="45720" marB="45720" anchor="ctr">
+                    <a:lnL w="6350" cap="flat" cmpd="sng" algn="ctr">
+                      <a:solidFill>
+                        <a:srgbClr val="DCE2E8"/>
+                      </a:solidFill>
+                      <a:prstDash val="solid"/>
+                      <a:round/>
+                      <a:headEnd type="none" w="med" len="med"/>
+                      <a:tailEnd type="none" w="med" len="med"/>
+                    </a:lnL>
+                    <a:lnR w="6350" cap="flat" cmpd="sng" algn="ctr">
+                      <a:solidFill>
+                        <a:srgbClr val="DCE2E8"/>
+                      </a:solidFill>
+                      <a:prstDash val="solid"/>
+                      <a:round/>
+                      <a:headEnd type="none" w="med" len="med"/>
+                      <a:tailEnd type="none" w="med" len="med"/>
+                    </a:lnR>
+                    <a:lnT w="6350" cap="flat" cmpd="sng" algn="ctr">
+                      <a:solidFill>
+                        <a:srgbClr val="DCE2E8"/>
+                      </a:solidFill>
+                      <a:prstDash val="solid"/>
+                      <a:round/>
+                      <a:headEnd type="none" w="med" len="med"/>
+                      <a:tailEnd type="none" w="med" len="med"/>
+                    </a:lnT>
+                    <a:lnB w="6350" cap="flat" cmpd="sng" algn="ctr">
+                      <a:solidFill>
+                        <a:srgbClr val="DCE2E8"/>
+                      </a:solidFill>
+                      <a:prstDash val="solid"/>
+                      <a:round/>
+                      <a:headEnd type="none" w="med" len="med"/>
+                      <a:tailEnd type="none" w="med" len="med"/>
+                    </a:lnB>
+                  </a:tcPr>
+                </a:tc>
+                <a:tc>
+                  <a:txBody>
+                    <a:bodyPr/>
+                    <a:lstStyle/>
+                    <a:p>
+                      <a:pPr indent="0" marL="0">
+                        <a:buNone/>
+                      </a:pPr>
+                      <a:r>
+                        <a:rPr lang="en-US" sz="1150" dirty="0">
+                          <a:solidFill>
+                            <a:srgbClr val="4E5966"/>
+                          </a:solidFill>
+                          <a:latin typeface="Calibri" pitchFamily="34" charset="0"/>
+                          <a:ea typeface="Calibri" pitchFamily="34" charset="-122"/>
+                          <a:cs typeface="Calibri" pitchFamily="34" charset="-120"/>
+                        </a:rPr>
+                        <a:t>За 30 000 ₽ — 4 402 000 сум. Пусть дойдёт к празднику. Курс ЦБ на 20 марта</a:t>
                       </a:r>
                       <a:endParaRPr lang="en-US" sz="1150" dirty="0">
                         <a:latin typeface="Calibri" charset="0"/>
@@ -4963,7 +5360,7 @@
                           <a:ea typeface="Calibri" pitchFamily="34" charset="-122"/>
                           <a:cs typeface="Calibri" pitchFamily="34" charset="-120"/>
                         </a:rPr>
-                        <a:t>Скажите, сколько должно дойти домой</a:t>
+                        <a:t>💬 Сколько должно дойти домой?</a:t>
                       </a:r>
                       <a:endParaRPr lang="en-US" sz="1150" dirty="0">
                         <a:latin typeface="Calibri" charset="0"/>
@@ -5028,7 +5425,7 @@
                           <a:ea typeface="Calibri" pitchFamily="34" charset="-122"/>
                           <a:cs typeface="Calibri" pitchFamily="34" charset="-120"/>
                         </a:rPr>
-                        <a:t>Назовите сумму. Напишем, если курс до неё дойдёт</a:t>
+                        <a:t>Сейчас за 30 000 ₽ — 4 402 000 сум. Назовите свою сумму, и мы напишем, когда курс до неё дойдёт</a:t>
                       </a:r>
                       <a:endParaRPr lang="en-US" sz="1150" dirty="0">
                         <a:latin typeface="Calibri" charset="0"/>
@@ -5077,400 +5474,6 @@
                   </a:tcPr>
                 </a:tc>
               </a:tr>
-              <a:tr h="310896">
-                <a:tc>
-                  <a:txBody>
-                    <a:bodyPr/>
-                    <a:lstStyle/>
-                    <a:p>
-                      <a:pPr indent="0" marL="0">
-                        <a:buNone/>
-                      </a:pPr>
-                      <a:r>
-                        <a:rPr lang="en-US" sz="1150" dirty="0">
-                          <a:solidFill>
-                            <a:srgbClr val="4E5966"/>
-                          </a:solidFill>
-                          <a:latin typeface="Calibri" pitchFamily="34" charset="0"/>
-                          <a:ea typeface="Calibri" pitchFamily="34" charset="-122"/>
-                          <a:cs typeface="Calibri" pitchFamily="34" charset="-120"/>
-                        </a:rPr>
-                        <a:t>Школа</a:t>
-                      </a:r>
-                      <a:endParaRPr lang="en-US" sz="1150" dirty="0">
-                        <a:latin typeface="Calibri" charset="0"/>
-                        <a:ea typeface="Calibri" charset="0"/>
-                        <a:cs typeface="Calibri" charset="0"/>
-                      </a:endParaRPr>
-                    </a:p>
-                  </a:txBody>
-                  <a:tcPr marL="91440" marR="91440" marT="45720" marB="45720" anchor="ctr">
-                    <a:lnL w="6350" cap="flat" cmpd="sng" algn="ctr">
-                      <a:solidFill>
-                        <a:srgbClr val="DCE2E8"/>
-                      </a:solidFill>
-                      <a:prstDash val="solid"/>
-                      <a:round/>
-                      <a:headEnd type="none" w="med" len="med"/>
-                      <a:tailEnd type="none" w="med" len="med"/>
-                    </a:lnL>
-                    <a:lnR w="6350" cap="flat" cmpd="sng" algn="ctr">
-                      <a:solidFill>
-                        <a:srgbClr val="DCE2E8"/>
-                      </a:solidFill>
-                      <a:prstDash val="solid"/>
-                      <a:round/>
-                      <a:headEnd type="none" w="med" len="med"/>
-                      <a:tailEnd type="none" w="med" len="med"/>
-                    </a:lnR>
-                    <a:lnT w="6350" cap="flat" cmpd="sng" algn="ctr">
-                      <a:solidFill>
-                        <a:srgbClr val="DCE2E8"/>
-                      </a:solidFill>
-                      <a:prstDash val="solid"/>
-                      <a:round/>
-                      <a:headEnd type="none" w="med" len="med"/>
-                      <a:tailEnd type="none" w="med" len="med"/>
-                    </a:lnT>
-                    <a:lnB w="6350" cap="flat" cmpd="sng" algn="ctr">
-                      <a:solidFill>
-                        <a:srgbClr val="DCE2E8"/>
-                      </a:solidFill>
-                      <a:prstDash val="solid"/>
-                      <a:round/>
-                      <a:headEnd type="none" w="med" len="med"/>
-                      <a:tailEnd type="none" w="med" len="med"/>
-                    </a:lnB>
-                  </a:tcPr>
-                </a:tc>
-                <a:tc>
-                  <a:txBody>
-                    <a:bodyPr/>
-                    <a:lstStyle/>
-                    <a:p>
-                      <a:pPr indent="0" marL="0">
-                        <a:buNone/>
-                      </a:pPr>
-                      <a:r>
-                        <a:rPr lang="en-US" sz="1150" dirty="0">
-                          <a:solidFill>
-                            <a:srgbClr val="4E5966"/>
-                          </a:solidFill>
-                          <a:latin typeface="Calibri" pitchFamily="34" charset="0"/>
-                          <a:ea typeface="Calibri" pitchFamily="34" charset="-122"/>
-                          <a:cs typeface="Calibri" pitchFamily="34" charset="-120"/>
-                        </a:rPr>
-                        <a:t>Чтобы дошло к первому сентября</a:t>
-                      </a:r>
-                      <a:endParaRPr lang="en-US" sz="1150" dirty="0">
-                        <a:latin typeface="Calibri" charset="0"/>
-                        <a:ea typeface="Calibri" charset="0"/>
-                        <a:cs typeface="Calibri" charset="0"/>
-                      </a:endParaRPr>
-                    </a:p>
-                  </a:txBody>
-                  <a:tcPr marL="91440" marR="91440" marT="45720" marB="45720" anchor="ctr">
-                    <a:lnL w="6350" cap="flat" cmpd="sng" algn="ctr">
-                      <a:solidFill>
-                        <a:srgbClr val="DCE2E8"/>
-                      </a:solidFill>
-                      <a:prstDash val="solid"/>
-                      <a:round/>
-                      <a:headEnd type="none" w="med" len="med"/>
-                      <a:tailEnd type="none" w="med" len="med"/>
-                    </a:lnL>
-                    <a:lnR w="6350" cap="flat" cmpd="sng" algn="ctr">
-                      <a:solidFill>
-                        <a:srgbClr val="DCE2E8"/>
-                      </a:solidFill>
-                      <a:prstDash val="solid"/>
-                      <a:round/>
-                      <a:headEnd type="none" w="med" len="med"/>
-                      <a:tailEnd type="none" w="med" len="med"/>
-                    </a:lnR>
-                    <a:lnT w="6350" cap="flat" cmpd="sng" algn="ctr">
-                      <a:solidFill>
-                        <a:srgbClr val="DCE2E8"/>
-                      </a:solidFill>
-                      <a:prstDash val="solid"/>
-                      <a:round/>
-                      <a:headEnd type="none" w="med" len="med"/>
-                      <a:tailEnd type="none" w="med" len="med"/>
-                    </a:lnT>
-                    <a:lnB w="6350" cap="flat" cmpd="sng" algn="ctr">
-                      <a:solidFill>
-                        <a:srgbClr val="DCE2E8"/>
-                      </a:solidFill>
-                      <a:prstDash val="solid"/>
-                      <a:round/>
-                      <a:headEnd type="none" w="med" len="med"/>
-                      <a:tailEnd type="none" w="med" len="med"/>
-                    </a:lnB>
-                  </a:tcPr>
-                </a:tc>
-                <a:tc>
-                  <a:txBody>
-                    <a:bodyPr/>
-                    <a:lstStyle/>
-                    <a:p>
-                      <a:pPr indent="0" marL="0">
-                        <a:buNone/>
-                      </a:pPr>
-                      <a:r>
-                        <a:rPr lang="en-US" sz="1150" dirty="0">
-                          <a:solidFill>
-                            <a:srgbClr val="4E5966"/>
-                          </a:solidFill>
-                          <a:latin typeface="Calibri" pitchFamily="34" charset="0"/>
-                          <a:ea typeface="Calibri" pitchFamily="34" charset="-122"/>
-                          <a:cs typeface="Calibri" pitchFamily="34" charset="-120"/>
-                        </a:rPr>
-                        <a:t>За 30 000 ₽ – 4 402 000 сум, зачисление за час. Курс ЦБ на 25 августа</a:t>
-                      </a:r>
-                      <a:endParaRPr lang="en-US" sz="1150" dirty="0">
-                        <a:latin typeface="Calibri" charset="0"/>
-                        <a:ea typeface="Calibri" charset="0"/>
-                        <a:cs typeface="Calibri" charset="0"/>
-                      </a:endParaRPr>
-                    </a:p>
-                  </a:txBody>
-                  <a:tcPr marL="91440" marR="91440" marT="45720" marB="45720" anchor="ctr">
-                    <a:lnL w="6350" cap="flat" cmpd="sng" algn="ctr">
-                      <a:solidFill>
-                        <a:srgbClr val="DCE2E8"/>
-                      </a:solidFill>
-                      <a:prstDash val="solid"/>
-                      <a:round/>
-                      <a:headEnd type="none" w="med" len="med"/>
-                      <a:tailEnd type="none" w="med" len="med"/>
-                    </a:lnL>
-                    <a:lnR w="6350" cap="flat" cmpd="sng" algn="ctr">
-                      <a:solidFill>
-                        <a:srgbClr val="DCE2E8"/>
-                      </a:solidFill>
-                      <a:prstDash val="solid"/>
-                      <a:round/>
-                      <a:headEnd type="none" w="med" len="med"/>
-                      <a:tailEnd type="none" w="med" len="med"/>
-                    </a:lnR>
-                    <a:lnT w="6350" cap="flat" cmpd="sng" algn="ctr">
-                      <a:solidFill>
-                        <a:srgbClr val="DCE2E8"/>
-                      </a:solidFill>
-                      <a:prstDash val="solid"/>
-                      <a:round/>
-                      <a:headEnd type="none" w="med" len="med"/>
-                      <a:tailEnd type="none" w="med" len="med"/>
-                    </a:lnT>
-                    <a:lnB w="6350" cap="flat" cmpd="sng" algn="ctr">
-                      <a:solidFill>
-                        <a:srgbClr val="DCE2E8"/>
-                      </a:solidFill>
-                      <a:prstDash val="solid"/>
-                      <a:round/>
-                      <a:headEnd type="none" w="med" len="med"/>
-                      <a:tailEnd type="none" w="med" len="med"/>
-                    </a:lnB>
-                  </a:tcPr>
-                </a:tc>
-              </a:tr>
-              <a:tr h="310896">
-                <a:tc>
-                  <a:txBody>
-                    <a:bodyPr/>
-                    <a:lstStyle/>
-                    <a:p>
-                      <a:pPr indent="0" marL="0">
-                        <a:buNone/>
-                      </a:pPr>
-                      <a:r>
-                        <a:rPr lang="en-US" sz="1150" dirty="0">
-                          <a:solidFill>
-                            <a:srgbClr val="4E5966"/>
-                          </a:solidFill>
-                          <a:latin typeface="Calibri" pitchFamily="34" charset="0"/>
-                          <a:ea typeface="Calibri" pitchFamily="34" charset="-122"/>
-                          <a:cs typeface="Calibri" pitchFamily="34" charset="-120"/>
-                        </a:rPr>
-                        <a:t>После зарплаты</a:t>
-                      </a:r>
-                      <a:endParaRPr lang="en-US" sz="1150" dirty="0">
-                        <a:latin typeface="Calibri" charset="0"/>
-                        <a:ea typeface="Calibri" charset="0"/>
-                        <a:cs typeface="Calibri" charset="0"/>
-                      </a:endParaRPr>
-                    </a:p>
-                  </a:txBody>
-                  <a:tcPr marL="91440" marR="91440" marT="45720" marB="45720" anchor="ctr">
-                    <a:lnL w="6350" cap="flat" cmpd="sng" algn="ctr">
-                      <a:solidFill>
-                        <a:srgbClr val="DCE2E8"/>
-                      </a:solidFill>
-                      <a:prstDash val="solid"/>
-                      <a:round/>
-                      <a:headEnd type="none" w="med" len="med"/>
-                      <a:tailEnd type="none" w="med" len="med"/>
-                    </a:lnL>
-                    <a:lnR w="6350" cap="flat" cmpd="sng" algn="ctr">
-                      <a:solidFill>
-                        <a:srgbClr val="DCE2E8"/>
-                      </a:solidFill>
-                      <a:prstDash val="solid"/>
-                      <a:round/>
-                      <a:headEnd type="none" w="med" len="med"/>
-                      <a:tailEnd type="none" w="med" len="med"/>
-                    </a:lnR>
-                    <a:lnT w="6350" cap="flat" cmpd="sng" algn="ctr">
-                      <a:solidFill>
-                        <a:srgbClr val="DCE2E8"/>
-                      </a:solidFill>
-                      <a:prstDash val="solid"/>
-                      <a:round/>
-                      <a:headEnd type="none" w="med" len="med"/>
-                      <a:tailEnd type="none" w="med" len="med"/>
-                    </a:lnT>
-                    <a:lnB w="6350" cap="flat" cmpd="sng" algn="ctr">
-                      <a:solidFill>
-                        <a:srgbClr val="DCE2E8"/>
-                      </a:solidFill>
-                      <a:prstDash val="solid"/>
-                      <a:round/>
-                      <a:headEnd type="none" w="med" len="med"/>
-                      <a:tailEnd type="none" w="med" len="med"/>
-                    </a:lnB>
-                  </a:tcPr>
-                </a:tc>
-                <a:tc>
-                  <a:txBody>
-                    <a:bodyPr/>
-                    <a:lstStyle/>
-                    <a:p>
-                      <a:pPr indent="0" marL="0">
-                        <a:buNone/>
-                      </a:pPr>
-                      <a:r>
-                        <a:rPr lang="en-US" sz="1150" dirty="0">
-                          <a:solidFill>
-                            <a:srgbClr val="4E5966"/>
-                          </a:solidFill>
-                          <a:latin typeface="Calibri" pitchFamily="34" charset="0"/>
-                          <a:ea typeface="Calibri" pitchFamily="34" charset="-122"/>
-                          <a:cs typeface="Calibri" pitchFamily="34" charset="-120"/>
-                        </a:rPr>
-                        <a:t>Можно перевести домой</a:t>
-                      </a:r>
-                      <a:endParaRPr lang="en-US" sz="1150" dirty="0">
-                        <a:latin typeface="Calibri" charset="0"/>
-                        <a:ea typeface="Calibri" charset="0"/>
-                        <a:cs typeface="Calibri" charset="0"/>
-                      </a:endParaRPr>
-                    </a:p>
-                  </a:txBody>
-                  <a:tcPr marL="91440" marR="91440" marT="45720" marB="45720" anchor="ctr">
-                    <a:lnL w="6350" cap="flat" cmpd="sng" algn="ctr">
-                      <a:solidFill>
-                        <a:srgbClr val="DCE2E8"/>
-                      </a:solidFill>
-                      <a:prstDash val="solid"/>
-                      <a:round/>
-                      <a:headEnd type="none" w="med" len="med"/>
-                      <a:tailEnd type="none" w="med" len="med"/>
-                    </a:lnL>
-                    <a:lnR w="6350" cap="flat" cmpd="sng" algn="ctr">
-                      <a:solidFill>
-                        <a:srgbClr val="DCE2E8"/>
-                      </a:solidFill>
-                      <a:prstDash val="solid"/>
-                      <a:round/>
-                      <a:headEnd type="none" w="med" len="med"/>
-                      <a:tailEnd type="none" w="med" len="med"/>
-                    </a:lnR>
-                    <a:lnT w="6350" cap="flat" cmpd="sng" algn="ctr">
-                      <a:solidFill>
-                        <a:srgbClr val="DCE2E8"/>
-                      </a:solidFill>
-                      <a:prstDash val="solid"/>
-                      <a:round/>
-                      <a:headEnd type="none" w="med" len="med"/>
-                      <a:tailEnd type="none" w="med" len="med"/>
-                    </a:lnT>
-                    <a:lnB w="6350" cap="flat" cmpd="sng" algn="ctr">
-                      <a:solidFill>
-                        <a:srgbClr val="DCE2E8"/>
-                      </a:solidFill>
-                      <a:prstDash val="solid"/>
-                      <a:round/>
-                      <a:headEnd type="none" w="med" len="med"/>
-                      <a:tailEnd type="none" w="med" len="med"/>
-                    </a:lnB>
-                  </a:tcPr>
-                </a:tc>
-                <a:tc>
-                  <a:txBody>
-                    <a:bodyPr/>
-                    <a:lstStyle/>
-                    <a:p>
-                      <a:pPr indent="0" marL="0">
-                        <a:buNone/>
-                      </a:pPr>
-                      <a:r>
-                        <a:rPr lang="en-US" sz="1150" dirty="0">
-                          <a:solidFill>
-                            <a:srgbClr val="4E5966"/>
-                          </a:solidFill>
-                          <a:latin typeface="Calibri" pitchFamily="34" charset="0"/>
-                          <a:ea typeface="Calibri" pitchFamily="34" charset="-122"/>
-                          <a:cs typeface="Calibri" pitchFamily="34" charset="-120"/>
-                        </a:rPr>
-                        <a:t>За 30 000 ₽ – 4 402 000 сум. Курс ЦБ на 4 сентября</a:t>
-                      </a:r>
-                      <a:endParaRPr lang="en-US" sz="1150" dirty="0">
-                        <a:latin typeface="Calibri" charset="0"/>
-                        <a:ea typeface="Calibri" charset="0"/>
-                        <a:cs typeface="Calibri" charset="0"/>
-                      </a:endParaRPr>
-                    </a:p>
-                  </a:txBody>
-                  <a:tcPr marL="91440" marR="91440" marT="45720" marB="45720" anchor="ctr">
-                    <a:lnL w="6350" cap="flat" cmpd="sng" algn="ctr">
-                      <a:solidFill>
-                        <a:srgbClr val="DCE2E8"/>
-                      </a:solidFill>
-                      <a:prstDash val="solid"/>
-                      <a:round/>
-                      <a:headEnd type="none" w="med" len="med"/>
-                      <a:tailEnd type="none" w="med" len="med"/>
-                    </a:lnL>
-                    <a:lnR w="6350" cap="flat" cmpd="sng" algn="ctr">
-                      <a:solidFill>
-                        <a:srgbClr val="DCE2E8"/>
-                      </a:solidFill>
-                      <a:prstDash val="solid"/>
-                      <a:round/>
-                      <a:headEnd type="none" w="med" len="med"/>
-                      <a:tailEnd type="none" w="med" len="med"/>
-                    </a:lnR>
-                    <a:lnT w="6350" cap="flat" cmpd="sng" algn="ctr">
-                      <a:solidFill>
-                        <a:srgbClr val="DCE2E8"/>
-                      </a:solidFill>
-                      <a:prstDash val="solid"/>
-                      <a:round/>
-                      <a:headEnd type="none" w="med" len="med"/>
-                      <a:tailEnd type="none" w="med" len="med"/>
-                    </a:lnT>
-                    <a:lnB w="6350" cap="flat" cmpd="sng" algn="ctr">
-                      <a:solidFill>
-                        <a:srgbClr val="DCE2E8"/>
-                      </a:solidFill>
-                      <a:prstDash val="solid"/>
-                      <a:round/>
-                      <a:headEnd type="none" w="med" len="med"/>
-                      <a:tailEnd type="none" w="med" len="med"/>
-                    </a:lnB>
-                  </a:tcPr>
-                </a:tc>
-              </a:tr>
             </a:tbl>
           </a:graphicData>
         </a:graphic>
@@ -5483,12 +5486,12 @@
         </p:nvSpPr>
         <p:spPr>
           <a:xfrm>
-            <a:off x="640080" y="5065776"/>
-            <a:ext cx="10881360" cy="1133856"/>
+            <a:off x="640080" y="5230368"/>
+            <a:ext cx="10881360" cy="1188720"/>
           </a:xfrm>
           <a:prstGeom prst="roundRect">
             <a:avLst>
-              <a:gd name="adj" fmla="val 4839"/>
+              <a:gd name="adj" fmla="val 4615"/>
             </a:avLst>
           </a:prstGeom>
           <a:solidFill>
@@ -5505,7 +5508,7 @@
         </p:nvSpPr>
         <p:spPr>
           <a:xfrm>
-            <a:off x="914400" y="5221224"/>
+            <a:off x="914400" y="5385816"/>
             <a:ext cx="10332720" cy="329184"/>
           </a:xfrm>
           <a:prstGeom prst="rect">
@@ -5544,8 +5547,8 @@
         </p:nvSpPr>
         <p:spPr>
           <a:xfrm>
-            <a:off x="914400" y="5596128"/>
-            <a:ext cx="10332720" cy="438912"/>
+            <a:off x="914400" y="5760720"/>
+            <a:ext cx="10332720" cy="493776"/>
           </a:xfrm>
           <a:prstGeom prst="rect">
             <a:avLst/>
@@ -5572,7 +5575,7 @@
                 <a:ea typeface="Calibri" pitchFamily="34" charset="-122"/>
                 <a:cs typeface="Calibri" pitchFamily="34" charset="-120"/>
               </a:rPr>
-              <a:t>Ни одного обещания о будущем: «курс вырастет», «успейте», «не упустите». Ни одного поздравления с национальным праздником от российского банка там, где это читается неуместно. И ни одного текста для просроченного пуша: если сообщение привязано к дате, устаревать в нём нечему.</a:t>
+              <a:t>Ни одного обещания о будущем: «курс вырастет», «успейте», «не упустите». Ни одного поздравления там, где оно от российского банка неуместно: 24 апреля в Армению мы молчим.</a:t>
             </a:r>
             <a:endParaRPr lang="en-US" sz="1250" dirty="0"/>
           </a:p>
@@ -5717,11 +5720,11 @@
         <p:spPr>
           <a:xfrm>
             <a:off x="640080" y="1115568"/>
-            <a:ext cx="5367528" cy="2523744"/>
+            <a:ext cx="5367528" cy="3127248"/>
           </a:xfrm>
           <a:prstGeom prst="roundRect">
             <a:avLst>
-              <a:gd name="adj" fmla="val 2174"/>
+              <a:gd name="adj" fmla="val 1754"/>
             </a:avLst>
           </a:prstGeom>
           <a:solidFill>
@@ -5763,7 +5766,7 @@
                 <a:ea typeface="Cambria" pitchFamily="34" charset="-122"/>
                 <a:cs typeface="Cambria" pitchFamily="34" charset="-120"/>
               </a:rPr>
-              <a:t>Основной продукт · оповещение об уровне</a:t>
+              <a:t>Основное · оповещение об уровне</a:t>
             </a:r>
             <a:endParaRPr lang="en-US" sz="1550" dirty="0"/>
           </a:p>
@@ -5778,7 +5781,7 @@
         <p:spPr>
           <a:xfrm>
             <a:off x="896112" y="1828800"/>
-            <a:ext cx="4855464" cy="1627632"/>
+            <a:ext cx="4855464" cy="2231136"/>
           </a:xfrm>
           <a:prstGeom prst="rect">
             <a:avLst/>
@@ -5863,7 +5866,7 @@
                 <a:ea typeface="Calibri" pitchFamily="34" charset="-122"/>
                 <a:cs typeface="Calibri" pitchFamily="34" charset="-120"/>
               </a:rPr>
-              <a:t>Событий набирается быстро: их создаёт клиент, а не рынок.</a:t>
+              <a:t>Событий набирается быстро: их создаёт клиент, а не рынок. Поэтому пилот по этой ветке даёт ответ за недели, а не за год.</a:t>
             </a:r>
             <a:endParaRPr lang="en-US" sz="1250" dirty="0"/>
           </a:p>
@@ -5878,11 +5881,11 @@
         <p:spPr>
           <a:xfrm>
             <a:off x="6153912" y="1115568"/>
-            <a:ext cx="5367528" cy="2523744"/>
+            <a:ext cx="5367528" cy="3127248"/>
           </a:xfrm>
           <a:prstGeom prst="roundRect">
             <a:avLst>
-              <a:gd name="adj" fmla="val 2174"/>
+              <a:gd name="adj" fmla="val 1754"/>
             </a:avLst>
           </a:prstGeom>
           <a:solidFill>
@@ -5924,7 +5927,7 @@
                 <a:ea typeface="Cambria" pitchFamily="34" charset="-122"/>
                 <a:cs typeface="Cambria" pitchFamily="34" charset="-120"/>
               </a:rPr>
-              <a:t>Отдельной рукой · сигнал правила</a:t>
+              <a:t>Дополнительно · поводы без прогноза</a:t>
             </a:r>
             <a:endParaRPr lang="en-US" sz="1550" dirty="0"/>
           </a:p>
@@ -5939,7 +5942,7 @@
         <p:spPr>
           <a:xfrm>
             <a:off x="6409944" y="1828800"/>
-            <a:ext cx="4855464" cy="1627632"/>
+            <a:ext cx="4855464" cy="2231136"/>
           </a:xfrm>
           <a:prstGeom prst="rect">
             <a:avLst/>
@@ -5966,7 +5969,7 @@
                 <a:ea typeface="Calibri" pitchFamily="34" charset="-122"/>
                 <a:cs typeface="Calibri" pitchFamily="34" charset="-120"/>
               </a:rPr>
-              <a:t>Идёт в пилот против холдаута, а не основным продуктом, и вот почему: оптимум метрики кейса приходится на день, когда валюта получателя дорога, – а допустимого текста для такого дня мы не нашли.</a:t>
+              <a:t>Сигнал правила. Идёт против холдаута отдельной веткой, а не основным продуктом: оптимум метрики кейса приходится на день, когда валюта получателя дорога, а допустимого текста для такого дня мы не нашли.</a:t>
             </a:r>
             <a:endParaRPr lang="en-US" sz="1250" dirty="0"/>
           </a:p>
@@ -5995,10 +5998,39 @@
                 <a:ea typeface="Calibri" pitchFamily="34" charset="-122"/>
                 <a:cs typeface="Calibri" pitchFamily="34" charset="-120"/>
               </a:rPr>
-              <a:t>Набирается медленно: выгода – свойство сигнала, а не клиента. Десять тысяч человек в одном коридоре дают одно наблюдение курса, а не десять тысяч.</a:t>
+              <a:t>Национальные праздники и школа. Навруз, Курбан и Рамазан, первое сентября, Новый год – повод напомнить о переводе, к курсу вообще не привязанный. Отбираем по остатку на счёте: пишем тем, кому есть чем перевести.</a:t>
             </a:r>
             <a:endParaRPr lang="en-US" sz="1250" dirty="0"/>
           </a:p>
+          <a:p>
+            <a:pPr indent="0" marL="0">
+              <a:lnSpc>
+                <a:spcPts val="1700"/>
+              </a:lnSpc>
+              <a:buNone/>
+            </a:pPr>
+            <a:endParaRPr lang="en-US" sz="1250" dirty="0"/>
+          </a:p>
+          <a:p>
+            <a:pPr indent="0" marL="0">
+              <a:lnSpc>
+                <a:spcPts val="1700"/>
+              </a:lnSpc>
+              <a:buNone/>
+            </a:pPr>
+            <a:r>
+              <a:rPr lang="en-US" sz="1250" dirty="0">
+                <a:solidFill>
+                  <a:srgbClr val="4E5966"/>
+                </a:solidFill>
+                <a:latin typeface="Calibri" pitchFamily="34" charset="0"/>
+                <a:ea typeface="Calibri" pitchFamily="34" charset="-122"/>
+                <a:cs typeface="Calibri" pitchFamily="34" charset="-120"/>
+              </a:rPr>
+              <a:t>Оба повода дешевле сигнального слоя и не требуют ни одной модели.</a:t>
+            </a:r>
+            <a:endParaRPr lang="en-US" sz="1250" dirty="0"/>
+          </a:p>
         </p:txBody>
       </p:sp>
       <p:sp>
@@ -6009,8 +6041,8 @@
         </p:nvSpPr>
         <p:spPr>
           <a:xfrm>
-            <a:off x="640080" y="3803904"/>
-            <a:ext cx="10881360" cy="310896"/>
+            <a:off x="640080" y="4407408"/>
+            <a:ext cx="10881360" cy="292608"/>
           </a:xfrm>
           <a:prstGeom prst="rect">
             <a:avLst/>
@@ -6026,7 +6058,7 @@
               <a:buNone/>
             </a:pPr>
             <a:r>
-              <a:rPr lang="en-US" sz="1600" b="1" dirty="0">
+              <a:rPr lang="en-US" sz="1450" b="1" dirty="0">
                 <a:solidFill>
                   <a:srgbClr val="1A2530"/>
                 </a:solidFill>
@@ -6036,7 +6068,7 @@
               </a:rPr>
               <a:t>Допущения, на которых всё держится</a:t>
             </a:r>
-            <a:endParaRPr lang="en-US" sz="1600" dirty="0"/>
+            <a:endParaRPr lang="en-US" sz="1450" dirty="0"/>
           </a:p>
         </p:txBody>
       </p:sp>
@@ -6055,7 +6087,7 @@
           </p:nvPr>
         </p:nvGraphicFramePr>
         <p:xfrm>
-          <a:off x="640080" y="4187952"/>
+          <a:off x="640080" y="4754880"/>
           <a:ext cx="10881360" cy="914400"/>
         </p:xfrm>
         <a:graphic>
@@ -6063,10 +6095,10 @@
             <a:tbl>
               <a:tblPr/>
               <a:tblGrid>
-                <a:gridCol w="5120640"/>
-                <a:gridCol w="5760720"/>
+                <a:gridCol w="5669280"/>
+                <a:gridCol w="5212080"/>
               </a:tblGrid>
-              <a:tr h="365760">
+              <a:tr h="274320">
                 <a:tc>
                   <a:txBody>
                     <a:bodyPr/>
@@ -6076,7 +6108,7 @@
                         <a:buNone/>
                       </a:pPr>
                       <a:r>
-                        <a:rPr lang="en-US" sz="1150" b="1" dirty="0">
+                        <a:rPr lang="en-US" sz="1100" dirty="0">
                           <a:solidFill>
                             <a:srgbClr val="4E5966"/>
                           </a:solidFill>
@@ -6084,9 +6116,9 @@
                           <a:ea typeface="Calibri" pitchFamily="34" charset="-122"/>
                           <a:cs typeface="Calibri" pitchFamily="34" charset="-120"/>
                         </a:rPr>
-                        <a:t>Допущение</a:t>
+                        <a:t>Сигнал считается по курсу ЦБ, перевод идёт по курсу поставщика</a:t>
                       </a:r>
-                      <a:endParaRPr lang="en-US" sz="1150" dirty="0">
+                      <a:endParaRPr lang="en-US" sz="1100" dirty="0">
                         <a:latin typeface="Calibri" charset="0"/>
                         <a:ea typeface="Calibri" charset="0"/>
                         <a:cs typeface="Calibri" charset="0"/>
@@ -6141,7 +6173,7 @@
                         <a:buNone/>
                       </a:pPr>
                       <a:r>
-                        <a:rPr lang="en-US" sz="1150" b="1" dirty="0">
+                        <a:rPr lang="en-US" sz="1100" dirty="0">
                           <a:solidFill>
                             <a:srgbClr val="4E5966"/>
                           </a:solidFill>
@@ -6149,9 +6181,9 @@
                           <a:ea typeface="Calibri" pitchFamily="34" charset="-122"/>
                           <a:cs typeface="Calibri" pitchFamily="34" charset="-120"/>
                         </a:rPr>
-                        <a:t>Чем рискуем</a:t>
+                        <a:t>часть выгоды съедается спредом, величину не знаем</a:t>
                       </a:r>
-                      <a:endParaRPr lang="en-US" sz="1150" dirty="0">
+                      <a:endParaRPr lang="en-US" sz="1100" dirty="0">
                         <a:latin typeface="Calibri" charset="0"/>
                         <a:ea typeface="Calibri" charset="0"/>
                         <a:cs typeface="Calibri" charset="0"/>
@@ -6198,7 +6230,7 @@
                   </a:tcPr>
                 </a:tc>
               </a:tr>
-              <a:tr h="365760">
+              <a:tr h="274320">
                 <a:tc>
                   <a:txBody>
                     <a:bodyPr/>
@@ -6208,7 +6240,7 @@
                         <a:buNone/>
                       </a:pPr>
                       <a:r>
-                        <a:rPr lang="en-US" sz="1150" dirty="0">
+                        <a:rPr lang="en-US" sz="1100" dirty="0">
                           <a:solidFill>
                             <a:srgbClr val="4E5966"/>
                           </a:solidFill>
@@ -6216,9 +6248,9 @@
                           <a:ea typeface="Calibri" pitchFamily="34" charset="-122"/>
                           <a:cs typeface="Calibri" pitchFamily="34" charset="-120"/>
                         </a:rPr>
-                        <a:t>Сигнал считается по курсу ЦБ, перевод идёт по курсу поставщика</a:t>
+                        <a:t>Историческая связь «верх диапазона → выгодно» сохранится</a:t>
                       </a:r>
-                      <a:endParaRPr lang="en-US" sz="1150" dirty="0">
+                      <a:endParaRPr lang="en-US" sz="1100" dirty="0">
                         <a:latin typeface="Calibri" charset="0"/>
                         <a:ea typeface="Calibri" charset="0"/>
                         <a:cs typeface="Calibri" charset="0"/>
@@ -6273,7 +6305,7 @@
                         <a:buNone/>
                       </a:pPr>
                       <a:r>
-                        <a:rPr lang="en-US" sz="1150" dirty="0">
+                        <a:rPr lang="en-US" sz="1100" dirty="0">
                           <a:solidFill>
                             <a:srgbClr val="4E5966"/>
                           </a:solidFill>
@@ -6281,9 +6313,9 @@
                           <a:ea typeface="Calibri" pitchFamily="34" charset="-122"/>
                           <a:cs typeface="Calibri" pitchFamily="34" charset="-120"/>
                         </a:rPr>
-                        <a:t>Часть выгоды съедается спредом. Величину не знаем: данных поставщика у нас нет</a:t>
+                        <a:t>это ставка на устойчивость связи, а не прогноз курса</a:t>
                       </a:r>
-                      <a:endParaRPr lang="en-US" sz="1150" dirty="0">
+                      <a:endParaRPr lang="en-US" sz="1100" dirty="0">
                         <a:latin typeface="Calibri" charset="0"/>
                         <a:ea typeface="Calibri" charset="0"/>
                         <a:cs typeface="Calibri" charset="0"/>
@@ -6330,7 +6362,7 @@
                   </a:tcPr>
                 </a:tc>
               </a:tr>
-              <a:tr h="365760">
+              <a:tr h="274320">
                 <a:tc>
                   <a:txBody>
                     <a:bodyPr/>
@@ -6340,7 +6372,7 @@
                         <a:buNone/>
                       </a:pPr>
                       <a:r>
-                        <a:rPr lang="en-US" sz="1150" dirty="0">
+                        <a:rPr lang="en-US" sz="1100" dirty="0">
                           <a:solidFill>
                             <a:srgbClr val="4E5966"/>
                           </a:solidFill>
@@ -6348,9 +6380,9 @@
                           <a:ea typeface="Calibri" pitchFamily="34" charset="-122"/>
                           <a:cs typeface="Calibri" pitchFamily="34" charset="-120"/>
                         </a:rPr>
-                        <a:t>Историческая связь «верх диапазона → выгодно» сохранится</a:t>
+                        <a:t>Клиент фиксирует сумму отправки, а не получения</a:t>
                       </a:r>
-                      <a:endParaRPr lang="en-US" sz="1150" dirty="0">
+                      <a:endParaRPr lang="en-US" sz="1100" dirty="0">
                         <a:latin typeface="Calibri" charset="0"/>
                         <a:ea typeface="Calibri" charset="0"/>
                         <a:cs typeface="Calibri" charset="0"/>
@@ -6405,7 +6437,7 @@
                         <a:buNone/>
                       </a:pPr>
                       <a:r>
-                        <a:rPr lang="en-US" sz="1150" dirty="0">
+                        <a:rPr lang="en-US" sz="1100" dirty="0">
                           <a:solidFill>
                             <a:srgbClr val="4E5966"/>
                           </a:solidFill>
@@ -6413,141 +6445,9 @@
                           <a:ea typeface="Calibri" pitchFamily="34" charset="-122"/>
                           <a:cs typeface="Calibri" pitchFamily="34" charset="-120"/>
                         </a:rPr>
-                        <a:t>Это не прогноз курса, но это ставка на устойчивость связи. Разброс по годам больше самой величины</a:t>
+                        <a:t>иначе лучший курс уменьшает выручку с перевода</a:t>
                       </a:r>
-                      <a:endParaRPr lang="en-US" sz="1150" dirty="0">
-                        <a:latin typeface="Calibri" charset="0"/>
-                        <a:ea typeface="Calibri" charset="0"/>
-                        <a:cs typeface="Calibri" charset="0"/>
-                      </a:endParaRPr>
-                    </a:p>
-                  </a:txBody>
-                  <a:tcPr marL="91440" marR="91440" marT="45720" marB="45720" anchor="ctr">
-                    <a:lnL w="6350" cap="flat" cmpd="sng" algn="ctr">
-                      <a:solidFill>
-                        <a:srgbClr val="DCE2E8"/>
-                      </a:solidFill>
-                      <a:prstDash val="solid"/>
-                      <a:round/>
-                      <a:headEnd type="none" w="med" len="med"/>
-                      <a:tailEnd type="none" w="med" len="med"/>
-                    </a:lnL>
-                    <a:lnR w="6350" cap="flat" cmpd="sng" algn="ctr">
-                      <a:solidFill>
-                        <a:srgbClr val="DCE2E8"/>
-                      </a:solidFill>
-                      <a:prstDash val="solid"/>
-                      <a:round/>
-                      <a:headEnd type="none" w="med" len="med"/>
-                      <a:tailEnd type="none" w="med" len="med"/>
-                    </a:lnR>
-                    <a:lnT w="6350" cap="flat" cmpd="sng" algn="ctr">
-                      <a:solidFill>
-                        <a:srgbClr val="DCE2E8"/>
-                      </a:solidFill>
-                      <a:prstDash val="solid"/>
-                      <a:round/>
-                      <a:headEnd type="none" w="med" len="med"/>
-                      <a:tailEnd type="none" w="med" len="med"/>
-                    </a:lnT>
-                    <a:lnB w="6350" cap="flat" cmpd="sng" algn="ctr">
-                      <a:solidFill>
-                        <a:srgbClr val="DCE2E8"/>
-                      </a:solidFill>
-                      <a:prstDash val="solid"/>
-                      <a:round/>
-                      <a:headEnd type="none" w="med" len="med"/>
-                      <a:tailEnd type="none" w="med" len="med"/>
-                    </a:lnB>
-                  </a:tcPr>
-                </a:tc>
-              </a:tr>
-              <a:tr h="365760">
-                <a:tc>
-                  <a:txBody>
-                    <a:bodyPr/>
-                    <a:lstStyle/>
-                    <a:p>
-                      <a:pPr indent="0" marL="0">
-                        <a:buNone/>
-                      </a:pPr>
-                      <a:r>
-                        <a:rPr lang="en-US" sz="1150" dirty="0">
-                          <a:solidFill>
-                            <a:srgbClr val="4E5966"/>
-                          </a:solidFill>
-                          <a:latin typeface="Calibri" pitchFamily="34" charset="0"/>
-                          <a:ea typeface="Calibri" pitchFamily="34" charset="-122"/>
-                          <a:cs typeface="Calibri" pitchFamily="34" charset="-120"/>
-                        </a:rPr>
-                        <a:t>Клиент фиксирует сумму отправки, а не получения</a:t>
-                      </a:r>
-                      <a:endParaRPr lang="en-US" sz="1150" dirty="0">
-                        <a:latin typeface="Calibri" charset="0"/>
-                        <a:ea typeface="Calibri" charset="0"/>
-                        <a:cs typeface="Calibri" charset="0"/>
-                      </a:endParaRPr>
-                    </a:p>
-                  </a:txBody>
-                  <a:tcPr marL="91440" marR="91440" marT="45720" marB="45720" anchor="ctr">
-                    <a:lnL w="6350" cap="flat" cmpd="sng" algn="ctr">
-                      <a:solidFill>
-                        <a:srgbClr val="DCE2E8"/>
-                      </a:solidFill>
-                      <a:prstDash val="solid"/>
-                      <a:round/>
-                      <a:headEnd type="none" w="med" len="med"/>
-                      <a:tailEnd type="none" w="med" len="med"/>
-                    </a:lnL>
-                    <a:lnR w="6350" cap="flat" cmpd="sng" algn="ctr">
-                      <a:solidFill>
-                        <a:srgbClr val="DCE2E8"/>
-                      </a:solidFill>
-                      <a:prstDash val="solid"/>
-                      <a:round/>
-                      <a:headEnd type="none" w="med" len="med"/>
-                      <a:tailEnd type="none" w="med" len="med"/>
-                    </a:lnR>
-                    <a:lnT w="6350" cap="flat" cmpd="sng" algn="ctr">
-                      <a:solidFill>
-                        <a:srgbClr val="DCE2E8"/>
-                      </a:solidFill>
-                      <a:prstDash val="solid"/>
-                      <a:round/>
-                      <a:headEnd type="none" w="med" len="med"/>
-                      <a:tailEnd type="none" w="med" len="med"/>
-                    </a:lnT>
-                    <a:lnB w="6350" cap="flat" cmpd="sng" algn="ctr">
-                      <a:solidFill>
-                        <a:srgbClr val="DCE2E8"/>
-                      </a:solidFill>
-                      <a:prstDash val="solid"/>
-                      <a:round/>
-                      <a:headEnd type="none" w="med" len="med"/>
-                      <a:tailEnd type="none" w="med" len="med"/>
-                    </a:lnB>
-                  </a:tcPr>
-                </a:tc>
-                <a:tc>
-                  <a:txBody>
-                    <a:bodyPr/>
-                    <a:lstStyle/>
-                    <a:p>
-                      <a:pPr indent="0" marL="0">
-                        <a:buNone/>
-                      </a:pPr>
-                      <a:r>
-                        <a:rPr lang="en-US" sz="1150" dirty="0">
-                          <a:solidFill>
-                            <a:srgbClr val="4E5966"/>
-                          </a:solidFill>
-                          <a:latin typeface="Calibri" pitchFamily="34" charset="0"/>
-                          <a:ea typeface="Calibri" pitchFamily="34" charset="-122"/>
-                          <a:cs typeface="Calibri" pitchFamily="34" charset="-120"/>
-                        </a:rPr>
-                        <a:t>Если наоборот, лучший курс означает меньше отправленных рублей и меньшую выручку с перевода</a:t>
-                      </a:r>
-                      <a:endParaRPr lang="en-US" sz="1150" dirty="0">
+                      <a:endParaRPr lang="en-US" sz="1100" dirty="0">
                         <a:latin typeface="Calibri" charset="0"/>
                         <a:ea typeface="Calibri" charset="0"/>
                         <a:cs typeface="Calibri" charset="0"/>
@@ -13762,14 +13662,36 @@
       </p:sp>
       <p:sp>
         <p:nvSpPr>
-          <p:cNvPr id="5" name="Text 3"/>
-          <p:cNvSpPr txBox="1"/>
-          <p:nvPr/>
-        </p:nvSpPr>
-        <p:spPr>
-          <a:xfrm>
-            <a:off x="1188720" y="969264"/>
-            <a:ext cx="10332720" cy="237744"/>
+          <p:cNvPr id="5" name="Shape 3"/>
+          <p:cNvSpPr/>
+          <p:nvPr/>
+        </p:nvSpPr>
+        <p:spPr>
+          <a:xfrm>
+            <a:off x="1188720" y="987552"/>
+            <a:ext cx="1600200" cy="292608"/>
+          </a:xfrm>
+          <a:prstGeom prst="roundRect">
+            <a:avLst>
+              <a:gd name="adj" fmla="val 31250"/>
+            </a:avLst>
+          </a:prstGeom>
+          <a:solidFill>
+            <a:srgbClr val="9C5B12"/>
+          </a:solidFill>
+          <a:ln/>
+        </p:spPr>
+      </p:sp>
+      <p:sp>
+        <p:nvSpPr>
+          <p:cNvPr id="6" name="Text 4"/>
+          <p:cNvSpPr txBox="1"/>
+          <p:nvPr/>
+        </p:nvSpPr>
+        <p:spPr>
+          <a:xfrm>
+            <a:off x="1188720" y="987552"/>
+            <a:ext cx="1600200" cy="292608"/>
           </a:xfrm>
           <a:prstGeom prst="rect">
             <a:avLst/>
@@ -13781,19 +13703,19 @@
           <a:bodyPr wrap="square" lIns="0" tIns="0" rIns="0" bIns="0" rtlCol="0" anchor="ctr"/>
           <a:lstStyle/>
           <a:p>
-            <a:pPr indent="0" marL="0">
-              <a:buNone/>
-            </a:pPr>
-            <a:r>
-              <a:rPr lang="en-US" sz="1050" b="1" spc="140" kern="0" dirty="0">
-                <a:solidFill>
-                  <a:srgbClr val="6E7A88"/>
+            <a:pPr algn="ctr" indent="0" marL="0">
+              <a:buNone/>
+            </a:pPr>
+            <a:r>
+              <a:rPr lang="en-US" sz="1050" b="1" dirty="0">
+                <a:solidFill>
+                  <a:srgbClr val="FFFFFF"/>
                 </a:solidFill>
                 <a:latin typeface="Calibri" pitchFamily="34" charset="0"/>
                 <a:ea typeface="Calibri" pitchFamily="34" charset="-122"/>
                 <a:cs typeface="Calibri" pitchFamily="34" charset="-120"/>
               </a:rPr>
-              <a:t>ШАГ 1 ИЗ 6 · КЛИЕНТСКИЙ ПУТЬ</a:t>
+              <a:t>1 · Триггер</a:t>
             </a:r>
             <a:endParaRPr lang="en-US" sz="1050" dirty="0"/>
           </a:p>
@@ -13801,13 +13723,513 @@
       </p:sp>
       <p:sp>
         <p:nvSpPr>
-          <p:cNvPr id="6" name="Text 4"/>
-          <p:cNvSpPr txBox="1"/>
-          <p:nvPr/>
-        </p:nvSpPr>
-        <p:spPr>
-          <a:xfrm>
-            <a:off x="640080" y="1316736"/>
+          <p:cNvPr id="7" name="Text 5"/>
+          <p:cNvSpPr txBox="1"/>
+          <p:nvPr/>
+        </p:nvSpPr>
+        <p:spPr>
+          <a:xfrm>
+            <a:off x="2788920" y="987552"/>
+            <a:ext cx="146304" cy="292608"/>
+          </a:xfrm>
+          <a:prstGeom prst="rect">
+            <a:avLst/>
+          </a:prstGeom>
+          <a:noFill/>
+          <a:ln/>
+        </p:spPr>
+        <p:txBody>
+          <a:bodyPr wrap="square" lIns="0" tIns="0" rIns="0" bIns="0" rtlCol="0" anchor="ctr"/>
+          <a:lstStyle/>
+          <a:p>
+            <a:pPr algn="ctr" indent="0" marL="0">
+              <a:buNone/>
+            </a:pPr>
+            <a:r>
+              <a:rPr lang="en-US" sz="1200" dirty="0">
+                <a:solidFill>
+                  <a:srgbClr val="B6BEC7"/>
+                </a:solidFill>
+                <a:latin typeface="Calibri" pitchFamily="34" charset="0"/>
+                <a:ea typeface="Calibri" pitchFamily="34" charset="-122"/>
+                <a:cs typeface="Calibri" pitchFamily="34" charset="-120"/>
+              </a:rPr>
+              <a:t>›</a:t>
+            </a:r>
+            <a:endParaRPr lang="en-US" sz="1200" dirty="0"/>
+          </a:p>
+        </p:txBody>
+      </p:sp>
+      <p:sp>
+        <p:nvSpPr>
+          <p:cNvPr id="8" name="Shape 6"/>
+          <p:cNvSpPr/>
+          <p:nvPr/>
+        </p:nvSpPr>
+        <p:spPr>
+          <a:xfrm>
+            <a:off x="2935224" y="987552"/>
+            <a:ext cx="1600200" cy="292608"/>
+          </a:xfrm>
+          <a:prstGeom prst="roundRect">
+            <a:avLst>
+              <a:gd name="adj" fmla="val 31250"/>
+            </a:avLst>
+          </a:prstGeom>
+          <a:solidFill>
+            <a:srgbClr val="F4F6F8"/>
+          </a:solidFill>
+          <a:ln/>
+        </p:spPr>
+      </p:sp>
+      <p:sp>
+        <p:nvSpPr>
+          <p:cNvPr id="9" name="Text 7"/>
+          <p:cNvSpPr txBox="1"/>
+          <p:nvPr/>
+        </p:nvSpPr>
+        <p:spPr>
+          <a:xfrm>
+            <a:off x="2935224" y="987552"/>
+            <a:ext cx="1600200" cy="292608"/>
+          </a:xfrm>
+          <a:prstGeom prst="rect">
+            <a:avLst/>
+          </a:prstGeom>
+          <a:noFill/>
+          <a:ln/>
+        </p:spPr>
+        <p:txBody>
+          <a:bodyPr wrap="square" lIns="0" tIns="0" rIns="0" bIns="0" rtlCol="0" anchor="ctr"/>
+          <a:lstStyle/>
+          <a:p>
+            <a:pPr algn="ctr" indent="0" marL="0">
+              <a:buNone/>
+            </a:pPr>
+            <a:r>
+              <a:rPr lang="en-US" sz="1050" dirty="0">
+                <a:solidFill>
+                  <a:srgbClr val="97A1AC"/>
+                </a:solidFill>
+                <a:latin typeface="Calibri" pitchFamily="34" charset="0"/>
+                <a:ea typeface="Calibri" pitchFamily="34" charset="-122"/>
+                <a:cs typeface="Calibri" pitchFamily="34" charset="-120"/>
+              </a:rPr>
+              <a:t>2 · Фильтр</a:t>
+            </a:r>
+            <a:endParaRPr lang="en-US" sz="1050" dirty="0"/>
+          </a:p>
+        </p:txBody>
+      </p:sp>
+      <p:sp>
+        <p:nvSpPr>
+          <p:cNvPr id="10" name="Text 8"/>
+          <p:cNvSpPr txBox="1"/>
+          <p:nvPr/>
+        </p:nvSpPr>
+        <p:spPr>
+          <a:xfrm>
+            <a:off x="4535424" y="987552"/>
+            <a:ext cx="146304" cy="292608"/>
+          </a:xfrm>
+          <a:prstGeom prst="rect">
+            <a:avLst/>
+          </a:prstGeom>
+          <a:noFill/>
+          <a:ln/>
+        </p:spPr>
+        <p:txBody>
+          <a:bodyPr wrap="square" lIns="0" tIns="0" rIns="0" bIns="0" rtlCol="0" anchor="ctr"/>
+          <a:lstStyle/>
+          <a:p>
+            <a:pPr algn="ctr" indent="0" marL="0">
+              <a:buNone/>
+            </a:pPr>
+            <a:r>
+              <a:rPr lang="en-US" sz="1200" dirty="0">
+                <a:solidFill>
+                  <a:srgbClr val="B6BEC7"/>
+                </a:solidFill>
+                <a:latin typeface="Calibri" pitchFamily="34" charset="0"/>
+                <a:ea typeface="Calibri" pitchFamily="34" charset="-122"/>
+                <a:cs typeface="Calibri" pitchFamily="34" charset="-120"/>
+              </a:rPr>
+              <a:t>›</a:t>
+            </a:r>
+            <a:endParaRPr lang="en-US" sz="1200" dirty="0"/>
+          </a:p>
+        </p:txBody>
+      </p:sp>
+      <p:sp>
+        <p:nvSpPr>
+          <p:cNvPr id="11" name="Shape 9"/>
+          <p:cNvSpPr/>
+          <p:nvPr/>
+        </p:nvSpPr>
+        <p:spPr>
+          <a:xfrm>
+            <a:off x="4681728" y="987552"/>
+            <a:ext cx="1600200" cy="292608"/>
+          </a:xfrm>
+          <a:prstGeom prst="roundRect">
+            <a:avLst>
+              <a:gd name="adj" fmla="val 31250"/>
+            </a:avLst>
+          </a:prstGeom>
+          <a:solidFill>
+            <a:srgbClr val="F4F6F8"/>
+          </a:solidFill>
+          <a:ln/>
+        </p:spPr>
+      </p:sp>
+      <p:sp>
+        <p:nvSpPr>
+          <p:cNvPr id="12" name="Text 10"/>
+          <p:cNvSpPr txBox="1"/>
+          <p:nvPr/>
+        </p:nvSpPr>
+        <p:spPr>
+          <a:xfrm>
+            <a:off x="4681728" y="987552"/>
+            <a:ext cx="1600200" cy="292608"/>
+          </a:xfrm>
+          <a:prstGeom prst="rect">
+            <a:avLst/>
+          </a:prstGeom>
+          <a:noFill/>
+          <a:ln/>
+        </p:spPr>
+        <p:txBody>
+          <a:bodyPr wrap="square" lIns="0" tIns="0" rIns="0" bIns="0" rtlCol="0" anchor="ctr"/>
+          <a:lstStyle/>
+          <a:p>
+            <a:pPr algn="ctr" indent="0" marL="0">
+              <a:buNone/>
+            </a:pPr>
+            <a:r>
+              <a:rPr lang="en-US" sz="1050" dirty="0">
+                <a:solidFill>
+                  <a:srgbClr val="97A1AC"/>
+                </a:solidFill>
+                <a:latin typeface="Calibri" pitchFamily="34" charset="0"/>
+                <a:ea typeface="Calibri" pitchFamily="34" charset="-122"/>
+                <a:cs typeface="Calibri" pitchFamily="34" charset="-120"/>
+              </a:rPr>
+              <a:t>3 · Пуш</a:t>
+            </a:r>
+            <a:endParaRPr lang="en-US" sz="1050" dirty="0"/>
+          </a:p>
+        </p:txBody>
+      </p:sp>
+      <p:sp>
+        <p:nvSpPr>
+          <p:cNvPr id="13" name="Text 11"/>
+          <p:cNvSpPr txBox="1"/>
+          <p:nvPr/>
+        </p:nvSpPr>
+        <p:spPr>
+          <a:xfrm>
+            <a:off x="6281928" y="987552"/>
+            <a:ext cx="146304" cy="292608"/>
+          </a:xfrm>
+          <a:prstGeom prst="rect">
+            <a:avLst/>
+          </a:prstGeom>
+          <a:noFill/>
+          <a:ln/>
+        </p:spPr>
+        <p:txBody>
+          <a:bodyPr wrap="square" lIns="0" tIns="0" rIns="0" bIns="0" rtlCol="0" anchor="ctr"/>
+          <a:lstStyle/>
+          <a:p>
+            <a:pPr algn="ctr" indent="0" marL="0">
+              <a:buNone/>
+            </a:pPr>
+            <a:r>
+              <a:rPr lang="en-US" sz="1200" dirty="0">
+                <a:solidFill>
+                  <a:srgbClr val="B6BEC7"/>
+                </a:solidFill>
+                <a:latin typeface="Calibri" pitchFamily="34" charset="0"/>
+                <a:ea typeface="Calibri" pitchFamily="34" charset="-122"/>
+                <a:cs typeface="Calibri" pitchFamily="34" charset="-120"/>
+              </a:rPr>
+              <a:t>›</a:t>
+            </a:r>
+            <a:endParaRPr lang="en-US" sz="1200" dirty="0"/>
+          </a:p>
+        </p:txBody>
+      </p:sp>
+      <p:sp>
+        <p:nvSpPr>
+          <p:cNvPr id="14" name="Shape 12"/>
+          <p:cNvSpPr/>
+          <p:nvPr/>
+        </p:nvSpPr>
+        <p:spPr>
+          <a:xfrm>
+            <a:off x="6428232" y="987552"/>
+            <a:ext cx="1600200" cy="292608"/>
+          </a:xfrm>
+          <a:prstGeom prst="roundRect">
+            <a:avLst>
+              <a:gd name="adj" fmla="val 31250"/>
+            </a:avLst>
+          </a:prstGeom>
+          <a:solidFill>
+            <a:srgbClr val="F4F6F8"/>
+          </a:solidFill>
+          <a:ln/>
+        </p:spPr>
+      </p:sp>
+      <p:sp>
+        <p:nvSpPr>
+          <p:cNvPr id="15" name="Text 13"/>
+          <p:cNvSpPr txBox="1"/>
+          <p:nvPr/>
+        </p:nvSpPr>
+        <p:spPr>
+          <a:xfrm>
+            <a:off x="6428232" y="987552"/>
+            <a:ext cx="1600200" cy="292608"/>
+          </a:xfrm>
+          <a:prstGeom prst="rect">
+            <a:avLst/>
+          </a:prstGeom>
+          <a:noFill/>
+          <a:ln/>
+        </p:spPr>
+        <p:txBody>
+          <a:bodyPr wrap="square" lIns="0" tIns="0" rIns="0" bIns="0" rtlCol="0" anchor="ctr"/>
+          <a:lstStyle/>
+          <a:p>
+            <a:pPr algn="ctr" indent="0" marL="0">
+              <a:buNone/>
+            </a:pPr>
+            <a:r>
+              <a:rPr lang="en-US" sz="1050" dirty="0">
+                <a:solidFill>
+                  <a:srgbClr val="97A1AC"/>
+                </a:solidFill>
+                <a:latin typeface="Calibri" pitchFamily="34" charset="0"/>
+                <a:ea typeface="Calibri" pitchFamily="34" charset="-122"/>
+                <a:cs typeface="Calibri" pitchFamily="34" charset="-120"/>
+              </a:rPr>
+              <a:t>4 · Экран перевода</a:t>
+            </a:r>
+            <a:endParaRPr lang="en-US" sz="1050" dirty="0"/>
+          </a:p>
+        </p:txBody>
+      </p:sp>
+      <p:sp>
+        <p:nvSpPr>
+          <p:cNvPr id="16" name="Text 14"/>
+          <p:cNvSpPr txBox="1"/>
+          <p:nvPr/>
+        </p:nvSpPr>
+        <p:spPr>
+          <a:xfrm>
+            <a:off x="8028432" y="987552"/>
+            <a:ext cx="146304" cy="292608"/>
+          </a:xfrm>
+          <a:prstGeom prst="rect">
+            <a:avLst/>
+          </a:prstGeom>
+          <a:noFill/>
+          <a:ln/>
+        </p:spPr>
+        <p:txBody>
+          <a:bodyPr wrap="square" lIns="0" tIns="0" rIns="0" bIns="0" rtlCol="0" anchor="ctr"/>
+          <a:lstStyle/>
+          <a:p>
+            <a:pPr algn="ctr" indent="0" marL="0">
+              <a:buNone/>
+            </a:pPr>
+            <a:r>
+              <a:rPr lang="en-US" sz="1200" dirty="0">
+                <a:solidFill>
+                  <a:srgbClr val="B6BEC7"/>
+                </a:solidFill>
+                <a:latin typeface="Calibri" pitchFamily="34" charset="0"/>
+                <a:ea typeface="Calibri" pitchFamily="34" charset="-122"/>
+                <a:cs typeface="Calibri" pitchFamily="34" charset="-120"/>
+              </a:rPr>
+              <a:t>›</a:t>
+            </a:r>
+            <a:endParaRPr lang="en-US" sz="1200" dirty="0"/>
+          </a:p>
+        </p:txBody>
+      </p:sp>
+      <p:sp>
+        <p:nvSpPr>
+          <p:cNvPr id="17" name="Shape 15"/>
+          <p:cNvSpPr/>
+          <p:nvPr/>
+        </p:nvSpPr>
+        <p:spPr>
+          <a:xfrm>
+            <a:off x="8174736" y="987552"/>
+            <a:ext cx="1600200" cy="292608"/>
+          </a:xfrm>
+          <a:prstGeom prst="roundRect">
+            <a:avLst>
+              <a:gd name="adj" fmla="val 31250"/>
+            </a:avLst>
+          </a:prstGeom>
+          <a:solidFill>
+            <a:srgbClr val="F4F6F8"/>
+          </a:solidFill>
+          <a:ln/>
+        </p:spPr>
+      </p:sp>
+      <p:sp>
+        <p:nvSpPr>
+          <p:cNvPr id="18" name="Text 16"/>
+          <p:cNvSpPr txBox="1"/>
+          <p:nvPr/>
+        </p:nvSpPr>
+        <p:spPr>
+          <a:xfrm>
+            <a:off x="8174736" y="987552"/>
+            <a:ext cx="1600200" cy="292608"/>
+          </a:xfrm>
+          <a:prstGeom prst="rect">
+            <a:avLst/>
+          </a:prstGeom>
+          <a:noFill/>
+          <a:ln/>
+        </p:spPr>
+        <p:txBody>
+          <a:bodyPr wrap="square" lIns="0" tIns="0" rIns="0" bIns="0" rtlCol="0" anchor="ctr"/>
+          <a:lstStyle/>
+          <a:p>
+            <a:pPr algn="ctr" indent="0" marL="0">
+              <a:buNone/>
+            </a:pPr>
+            <a:r>
+              <a:rPr lang="en-US" sz="1050" dirty="0">
+                <a:solidFill>
+                  <a:srgbClr val="97A1AC"/>
+                </a:solidFill>
+                <a:latin typeface="Calibri" pitchFamily="34" charset="0"/>
+                <a:ea typeface="Calibri" pitchFamily="34" charset="-122"/>
+                <a:cs typeface="Calibri" pitchFamily="34" charset="-120"/>
+              </a:rPr>
+              <a:t>5 · Решение</a:t>
+            </a:r>
+            <a:endParaRPr lang="en-US" sz="1050" dirty="0"/>
+          </a:p>
+        </p:txBody>
+      </p:sp>
+      <p:sp>
+        <p:nvSpPr>
+          <p:cNvPr id="19" name="Text 17"/>
+          <p:cNvSpPr txBox="1"/>
+          <p:nvPr/>
+        </p:nvSpPr>
+        <p:spPr>
+          <a:xfrm>
+            <a:off x="9774936" y="987552"/>
+            <a:ext cx="146304" cy="292608"/>
+          </a:xfrm>
+          <a:prstGeom prst="rect">
+            <a:avLst/>
+          </a:prstGeom>
+          <a:noFill/>
+          <a:ln/>
+        </p:spPr>
+        <p:txBody>
+          <a:bodyPr wrap="square" lIns="0" tIns="0" rIns="0" bIns="0" rtlCol="0" anchor="ctr"/>
+          <a:lstStyle/>
+          <a:p>
+            <a:pPr algn="ctr" indent="0" marL="0">
+              <a:buNone/>
+            </a:pPr>
+            <a:r>
+              <a:rPr lang="en-US" sz="1200" dirty="0">
+                <a:solidFill>
+                  <a:srgbClr val="B6BEC7"/>
+                </a:solidFill>
+                <a:latin typeface="Calibri" pitchFamily="34" charset="0"/>
+                <a:ea typeface="Calibri" pitchFamily="34" charset="-122"/>
+                <a:cs typeface="Calibri" pitchFamily="34" charset="-120"/>
+              </a:rPr>
+              <a:t>›</a:t>
+            </a:r>
+            <a:endParaRPr lang="en-US" sz="1200" dirty="0"/>
+          </a:p>
+        </p:txBody>
+      </p:sp>
+      <p:sp>
+        <p:nvSpPr>
+          <p:cNvPr id="20" name="Shape 18"/>
+          <p:cNvSpPr/>
+          <p:nvPr/>
+        </p:nvSpPr>
+        <p:spPr>
+          <a:xfrm>
+            <a:off x="9921240" y="987552"/>
+            <a:ext cx="1600200" cy="292608"/>
+          </a:xfrm>
+          <a:prstGeom prst="roundRect">
+            <a:avLst>
+              <a:gd name="adj" fmla="val 31250"/>
+            </a:avLst>
+          </a:prstGeom>
+          <a:solidFill>
+            <a:srgbClr val="F4F6F8"/>
+          </a:solidFill>
+          <a:ln/>
+        </p:spPr>
+      </p:sp>
+      <p:sp>
+        <p:nvSpPr>
+          <p:cNvPr id="21" name="Text 19"/>
+          <p:cNvSpPr txBox="1"/>
+          <p:nvPr/>
+        </p:nvSpPr>
+        <p:spPr>
+          <a:xfrm>
+            <a:off x="9921240" y="987552"/>
+            <a:ext cx="1600200" cy="292608"/>
+          </a:xfrm>
+          <a:prstGeom prst="rect">
+            <a:avLst/>
+          </a:prstGeom>
+          <a:noFill/>
+          <a:ln/>
+        </p:spPr>
+        <p:txBody>
+          <a:bodyPr wrap="square" lIns="0" tIns="0" rIns="0" bIns="0" rtlCol="0" anchor="ctr"/>
+          <a:lstStyle/>
+          <a:p>
+            <a:pPr algn="ctr" indent="0" marL="0">
+              <a:buNone/>
+            </a:pPr>
+            <a:r>
+              <a:rPr lang="en-US" sz="1050" dirty="0">
+                <a:solidFill>
+                  <a:srgbClr val="97A1AC"/>
+                </a:solidFill>
+                <a:latin typeface="Calibri" pitchFamily="34" charset="0"/>
+                <a:ea typeface="Calibri" pitchFamily="34" charset="-122"/>
+                <a:cs typeface="Calibri" pitchFamily="34" charset="-120"/>
+              </a:rPr>
+              <a:t>6 · Удержание</a:t>
+            </a:r>
+            <a:endParaRPr lang="en-US" sz="1050" dirty="0"/>
+          </a:p>
+        </p:txBody>
+      </p:sp>
+      <p:sp>
+        <p:nvSpPr>
+          <p:cNvPr id="22" name="Text 20"/>
+          <p:cNvSpPr txBox="1"/>
+          <p:nvPr/>
+        </p:nvSpPr>
+        <p:spPr>
+          <a:xfrm>
+            <a:off x="640080" y="1481328"/>
             <a:ext cx="10881360" cy="457200"/>
           </a:xfrm>
           <a:prstGeom prst="rect">
@@ -13835,7 +14257,7 @@
                 <a:ea typeface="Calibri" pitchFamily="34" charset="-122"/>
                 <a:cs typeface="Calibri" pitchFamily="34" charset="-120"/>
               </a:rPr>
-              <a:t>Первые два шага клиент не видит. Курс ЦБ публикуется после 15:30 МСК и действует со следующего дня – раньше повода написать не существует физически.</a:t>
+              <a:t>Первые два шага клиент не видит. Окно сделок ЦБ закрывается в 15:30 МСК, курс публикуется обычно до 18:00 и действует со следующего дня – раньше повода написать не существует физически.</a:t>
             </a:r>
             <a:endParaRPr lang="en-US" sz="1350" dirty="0"/>
           </a:p>
@@ -13843,13 +14265,13 @@
       </p:sp>
       <p:sp>
         <p:nvSpPr>
-          <p:cNvPr id="7" name="Shape 5"/>
+          <p:cNvPr id="23" name="Shape 21"/>
           <p:cNvSpPr/>
           <p:nvPr/>
         </p:nvSpPr>
         <p:spPr>
           <a:xfrm>
-            <a:off x="640080" y="1920240"/>
+            <a:off x="640080" y="2066544"/>
             <a:ext cx="3520440" cy="2011680"/>
           </a:xfrm>
           <a:prstGeom prst="roundRect">
@@ -13865,13 +14287,13 @@
       </p:sp>
       <p:sp>
         <p:nvSpPr>
-          <p:cNvPr id="8" name="Text 6"/>
-          <p:cNvSpPr txBox="1"/>
-          <p:nvPr/>
-        </p:nvSpPr>
-        <p:spPr>
-          <a:xfrm>
-            <a:off x="896112" y="2103120"/>
+          <p:cNvPr id="24" name="Text 22"/>
+          <p:cNvSpPr txBox="1"/>
+          <p:nvPr/>
+        </p:nvSpPr>
+        <p:spPr>
+          <a:xfrm>
+            <a:off x="896112" y="2249424"/>
             <a:ext cx="3008376" cy="475488"/>
           </a:xfrm>
           <a:prstGeom prst="rect">
@@ -13904,13 +14326,13 @@
       </p:sp>
       <p:sp>
         <p:nvSpPr>
-          <p:cNvPr id="9" name="Text 7"/>
-          <p:cNvSpPr txBox="1"/>
-          <p:nvPr/>
-        </p:nvSpPr>
-        <p:spPr>
-          <a:xfrm>
-            <a:off x="896112" y="2633472"/>
+          <p:cNvPr id="25" name="Text 23"/>
+          <p:cNvSpPr txBox="1"/>
+          <p:nvPr/>
+        </p:nvSpPr>
+        <p:spPr>
+          <a:xfrm>
+            <a:off x="896112" y="2779776"/>
             <a:ext cx="3008376" cy="1115568"/>
           </a:xfrm>
           <a:prstGeom prst="rect">
@@ -13946,13 +14368,13 @@
       </p:sp>
       <p:sp>
         <p:nvSpPr>
-          <p:cNvPr id="10" name="Shape 8"/>
+          <p:cNvPr id="26" name="Shape 24"/>
           <p:cNvSpPr/>
           <p:nvPr/>
         </p:nvSpPr>
         <p:spPr>
           <a:xfrm>
-            <a:off x="4325112" y="1920240"/>
+            <a:off x="4325112" y="2066544"/>
             <a:ext cx="3520440" cy="2011680"/>
           </a:xfrm>
           <a:prstGeom prst="roundRect">
@@ -13968,13 +14390,13 @@
       </p:sp>
       <p:sp>
         <p:nvSpPr>
-          <p:cNvPr id="11" name="Text 9"/>
-          <p:cNvSpPr txBox="1"/>
-          <p:nvPr/>
-        </p:nvSpPr>
-        <p:spPr>
-          <a:xfrm>
-            <a:off x="4581144" y="2103120"/>
+          <p:cNvPr id="27" name="Text 25"/>
+          <p:cNvSpPr txBox="1"/>
+          <p:nvPr/>
+        </p:nvSpPr>
+        <p:spPr>
+          <a:xfrm>
+            <a:off x="4581144" y="2249424"/>
             <a:ext cx="3008376" cy="475488"/>
           </a:xfrm>
           <a:prstGeom prst="rect">
@@ -14007,13 +14429,13 @@
       </p:sp>
       <p:sp>
         <p:nvSpPr>
-          <p:cNvPr id="12" name="Text 10"/>
-          <p:cNvSpPr txBox="1"/>
-          <p:nvPr/>
-        </p:nvSpPr>
-        <p:spPr>
-          <a:xfrm>
-            <a:off x="4581144" y="2633472"/>
+          <p:cNvPr id="28" name="Text 26"/>
+          <p:cNvSpPr txBox="1"/>
+          <p:nvPr/>
+        </p:nvSpPr>
+        <p:spPr>
+          <a:xfrm>
+            <a:off x="4581144" y="2779776"/>
             <a:ext cx="3008376" cy="1115568"/>
           </a:xfrm>
           <a:prstGeom prst="rect">
@@ -14049,13 +14471,13 @@
       </p:sp>
       <p:sp>
         <p:nvSpPr>
-          <p:cNvPr id="13" name="Shape 11"/>
+          <p:cNvPr id="29" name="Shape 27"/>
           <p:cNvSpPr/>
           <p:nvPr/>
         </p:nvSpPr>
         <p:spPr>
           <a:xfrm>
-            <a:off x="8001000" y="1920240"/>
+            <a:off x="8001000" y="2066544"/>
             <a:ext cx="3520440" cy="2011680"/>
           </a:xfrm>
           <a:prstGeom prst="roundRect">
@@ -14071,13 +14493,13 @@
       </p:sp>
       <p:sp>
         <p:nvSpPr>
-          <p:cNvPr id="14" name="Text 12"/>
-          <p:cNvSpPr txBox="1"/>
-          <p:nvPr/>
-        </p:nvSpPr>
-        <p:spPr>
-          <a:xfrm>
-            <a:off x="8257032" y="2103120"/>
+          <p:cNvPr id="30" name="Text 28"/>
+          <p:cNvSpPr txBox="1"/>
+          <p:nvPr/>
+        </p:nvSpPr>
+        <p:spPr>
+          <a:xfrm>
+            <a:off x="8257032" y="2249424"/>
             <a:ext cx="3008376" cy="475488"/>
           </a:xfrm>
           <a:prstGeom prst="rect">
@@ -14110,13 +14532,13 @@
       </p:sp>
       <p:sp>
         <p:nvSpPr>
-          <p:cNvPr id="15" name="Text 13"/>
-          <p:cNvSpPr txBox="1"/>
-          <p:nvPr/>
-        </p:nvSpPr>
-        <p:spPr>
-          <a:xfrm>
-            <a:off x="8257032" y="2633472"/>
+          <p:cNvPr id="31" name="Text 29"/>
+          <p:cNvSpPr txBox="1"/>
+          <p:nvPr/>
+        </p:nvSpPr>
+        <p:spPr>
+          <a:xfrm>
+            <a:off x="8257032" y="2779776"/>
             <a:ext cx="3008376" cy="1115568"/>
           </a:xfrm>
           <a:prstGeom prst="rect">
@@ -14152,13 +14574,13 @@
       </p:sp>
       <p:sp>
         <p:nvSpPr>
-          <p:cNvPr id="16" name="Shape 14"/>
+          <p:cNvPr id="32" name="Shape 30"/>
           <p:cNvSpPr/>
           <p:nvPr/>
         </p:nvSpPr>
         <p:spPr>
           <a:xfrm>
-            <a:off x="640080" y="4206240"/>
+            <a:off x="640080" y="4315968"/>
             <a:ext cx="10881360" cy="1371600"/>
           </a:xfrm>
           <a:prstGeom prst="roundRect">
@@ -14174,13 +14596,13 @@
       </p:sp>
       <p:sp>
         <p:nvSpPr>
-          <p:cNvPr id="17" name="Text 15"/>
-          <p:cNvSpPr txBox="1"/>
-          <p:nvPr/>
-        </p:nvSpPr>
-        <p:spPr>
-          <a:xfrm>
-            <a:off x="914400" y="4361688"/>
+          <p:cNvPr id="33" name="Text 31"/>
+          <p:cNvSpPr txBox="1"/>
+          <p:nvPr/>
+        </p:nvSpPr>
+        <p:spPr>
+          <a:xfrm>
+            <a:off x="914400" y="4471416"/>
             <a:ext cx="10332720" cy="329184"/>
           </a:xfrm>
           <a:prstGeom prst="rect">
@@ -14213,13 +14635,13 @@
       </p:sp>
       <p:sp>
         <p:nvSpPr>
-          <p:cNvPr id="18" name="Text 16"/>
-          <p:cNvSpPr txBox="1"/>
-          <p:nvPr/>
-        </p:nvSpPr>
-        <p:spPr>
-          <a:xfrm>
-            <a:off x="914400" y="4736592"/>
+          <p:cNvPr id="34" name="Text 32"/>
+          <p:cNvSpPr txBox="1"/>
+          <p:nvPr/>
+        </p:nvSpPr>
+        <p:spPr>
+          <a:xfrm>
+            <a:off x="914400" y="4846320"/>
             <a:ext cx="10332720" cy="676656"/>
           </a:xfrm>
           <a:prstGeom prst="rect">
@@ -14255,7 +14677,7 @@
       </p:sp>
       <p:sp>
         <p:nvSpPr>
-          <p:cNvPr id="19" name="Text 17"/>
+          <p:cNvPr id="35" name="Text 33"/>
           <p:cNvSpPr txBox="1"/>
           <p:nvPr/>
         </p:nvSpPr>
@@ -14424,14 +14846,36 @@
       </p:sp>
       <p:sp>
         <p:nvSpPr>
-          <p:cNvPr id="5" name="Text 3"/>
-          <p:cNvSpPr txBox="1"/>
-          <p:nvPr/>
-        </p:nvSpPr>
-        <p:spPr>
-          <a:xfrm>
-            <a:off x="1188720" y="969264"/>
-            <a:ext cx="10332720" cy="237744"/>
+          <p:cNvPr id="5" name="Shape 3"/>
+          <p:cNvSpPr/>
+          <p:nvPr/>
+        </p:nvSpPr>
+        <p:spPr>
+          <a:xfrm>
+            <a:off x="1188720" y="987552"/>
+            <a:ext cx="1600200" cy="292608"/>
+          </a:xfrm>
+          <a:prstGeom prst="roundRect">
+            <a:avLst>
+              <a:gd name="adj" fmla="val 31250"/>
+            </a:avLst>
+          </a:prstGeom>
+          <a:solidFill>
+            <a:srgbClr val="D8DEE4"/>
+          </a:solidFill>
+          <a:ln/>
+        </p:spPr>
+      </p:sp>
+      <p:sp>
+        <p:nvSpPr>
+          <p:cNvPr id="6" name="Text 4"/>
+          <p:cNvSpPr txBox="1"/>
+          <p:nvPr/>
+        </p:nvSpPr>
+        <p:spPr>
+          <a:xfrm>
+            <a:off x="1188720" y="987552"/>
+            <a:ext cx="1600200" cy="292608"/>
           </a:xfrm>
           <a:prstGeom prst="rect">
             <a:avLst/>
@@ -14443,19 +14887,19 @@
           <a:bodyPr wrap="square" lIns="0" tIns="0" rIns="0" bIns="0" rtlCol="0" anchor="ctr"/>
           <a:lstStyle/>
           <a:p>
-            <a:pPr indent="0" marL="0">
-              <a:buNone/>
-            </a:pPr>
-            <a:r>
-              <a:rPr lang="en-US" sz="1050" b="1" spc="140" kern="0" dirty="0">
-                <a:solidFill>
-                  <a:srgbClr val="6E7A88"/>
+            <a:pPr algn="ctr" indent="0" marL="0">
+              <a:buNone/>
+            </a:pPr>
+            <a:r>
+              <a:rPr lang="en-US" sz="1050" dirty="0">
+                <a:solidFill>
+                  <a:srgbClr val="5A6672"/>
                 </a:solidFill>
                 <a:latin typeface="Calibri" pitchFamily="34" charset="0"/>
                 <a:ea typeface="Calibri" pitchFamily="34" charset="-122"/>
                 <a:cs typeface="Calibri" pitchFamily="34" charset="-120"/>
               </a:rPr>
-              <a:t>ШАГ 2 ИЗ 6 · КЛИЕНТСКИЙ ПУТЬ</a:t>
+              <a:t>1 · Триггер</a:t>
             </a:r>
             <a:endParaRPr lang="en-US" sz="1050" dirty="0"/>
           </a:p>
@@ -14463,13 +14907,513 @@
       </p:sp>
       <p:sp>
         <p:nvSpPr>
-          <p:cNvPr id="6" name="Text 4"/>
-          <p:cNvSpPr txBox="1"/>
-          <p:nvPr/>
-        </p:nvSpPr>
-        <p:spPr>
-          <a:xfrm>
-            <a:off x="640080" y="1316736"/>
+          <p:cNvPr id="7" name="Text 5"/>
+          <p:cNvSpPr txBox="1"/>
+          <p:nvPr/>
+        </p:nvSpPr>
+        <p:spPr>
+          <a:xfrm>
+            <a:off x="2788920" y="987552"/>
+            <a:ext cx="146304" cy="292608"/>
+          </a:xfrm>
+          <a:prstGeom prst="rect">
+            <a:avLst/>
+          </a:prstGeom>
+          <a:noFill/>
+          <a:ln/>
+        </p:spPr>
+        <p:txBody>
+          <a:bodyPr wrap="square" lIns="0" tIns="0" rIns="0" bIns="0" rtlCol="0" anchor="ctr"/>
+          <a:lstStyle/>
+          <a:p>
+            <a:pPr algn="ctr" indent="0" marL="0">
+              <a:buNone/>
+            </a:pPr>
+            <a:r>
+              <a:rPr lang="en-US" sz="1200" dirty="0">
+                <a:solidFill>
+                  <a:srgbClr val="B6BEC7"/>
+                </a:solidFill>
+                <a:latin typeface="Calibri" pitchFamily="34" charset="0"/>
+                <a:ea typeface="Calibri" pitchFamily="34" charset="-122"/>
+                <a:cs typeface="Calibri" pitchFamily="34" charset="-120"/>
+              </a:rPr>
+              <a:t>›</a:t>
+            </a:r>
+            <a:endParaRPr lang="en-US" sz="1200" dirty="0"/>
+          </a:p>
+        </p:txBody>
+      </p:sp>
+      <p:sp>
+        <p:nvSpPr>
+          <p:cNvPr id="8" name="Shape 6"/>
+          <p:cNvSpPr/>
+          <p:nvPr/>
+        </p:nvSpPr>
+        <p:spPr>
+          <a:xfrm>
+            <a:off x="2935224" y="987552"/>
+            <a:ext cx="1600200" cy="292608"/>
+          </a:xfrm>
+          <a:prstGeom prst="roundRect">
+            <a:avLst>
+              <a:gd name="adj" fmla="val 31250"/>
+            </a:avLst>
+          </a:prstGeom>
+          <a:solidFill>
+            <a:srgbClr val="9C5B12"/>
+          </a:solidFill>
+          <a:ln/>
+        </p:spPr>
+      </p:sp>
+      <p:sp>
+        <p:nvSpPr>
+          <p:cNvPr id="9" name="Text 7"/>
+          <p:cNvSpPr txBox="1"/>
+          <p:nvPr/>
+        </p:nvSpPr>
+        <p:spPr>
+          <a:xfrm>
+            <a:off x="2935224" y="987552"/>
+            <a:ext cx="1600200" cy="292608"/>
+          </a:xfrm>
+          <a:prstGeom prst="rect">
+            <a:avLst/>
+          </a:prstGeom>
+          <a:noFill/>
+          <a:ln/>
+        </p:spPr>
+        <p:txBody>
+          <a:bodyPr wrap="square" lIns="0" tIns="0" rIns="0" bIns="0" rtlCol="0" anchor="ctr"/>
+          <a:lstStyle/>
+          <a:p>
+            <a:pPr algn="ctr" indent="0" marL="0">
+              <a:buNone/>
+            </a:pPr>
+            <a:r>
+              <a:rPr lang="en-US" sz="1050" b="1" dirty="0">
+                <a:solidFill>
+                  <a:srgbClr val="FFFFFF"/>
+                </a:solidFill>
+                <a:latin typeface="Calibri" pitchFamily="34" charset="0"/>
+                <a:ea typeface="Calibri" pitchFamily="34" charset="-122"/>
+                <a:cs typeface="Calibri" pitchFamily="34" charset="-120"/>
+              </a:rPr>
+              <a:t>2 · Фильтр</a:t>
+            </a:r>
+            <a:endParaRPr lang="en-US" sz="1050" dirty="0"/>
+          </a:p>
+        </p:txBody>
+      </p:sp>
+      <p:sp>
+        <p:nvSpPr>
+          <p:cNvPr id="10" name="Text 8"/>
+          <p:cNvSpPr txBox="1"/>
+          <p:nvPr/>
+        </p:nvSpPr>
+        <p:spPr>
+          <a:xfrm>
+            <a:off x="4535424" y="987552"/>
+            <a:ext cx="146304" cy="292608"/>
+          </a:xfrm>
+          <a:prstGeom prst="rect">
+            <a:avLst/>
+          </a:prstGeom>
+          <a:noFill/>
+          <a:ln/>
+        </p:spPr>
+        <p:txBody>
+          <a:bodyPr wrap="square" lIns="0" tIns="0" rIns="0" bIns="0" rtlCol="0" anchor="ctr"/>
+          <a:lstStyle/>
+          <a:p>
+            <a:pPr algn="ctr" indent="0" marL="0">
+              <a:buNone/>
+            </a:pPr>
+            <a:r>
+              <a:rPr lang="en-US" sz="1200" dirty="0">
+                <a:solidFill>
+                  <a:srgbClr val="B6BEC7"/>
+                </a:solidFill>
+                <a:latin typeface="Calibri" pitchFamily="34" charset="0"/>
+                <a:ea typeface="Calibri" pitchFamily="34" charset="-122"/>
+                <a:cs typeface="Calibri" pitchFamily="34" charset="-120"/>
+              </a:rPr>
+              <a:t>›</a:t>
+            </a:r>
+            <a:endParaRPr lang="en-US" sz="1200" dirty="0"/>
+          </a:p>
+        </p:txBody>
+      </p:sp>
+      <p:sp>
+        <p:nvSpPr>
+          <p:cNvPr id="11" name="Shape 9"/>
+          <p:cNvSpPr/>
+          <p:nvPr/>
+        </p:nvSpPr>
+        <p:spPr>
+          <a:xfrm>
+            <a:off x="4681728" y="987552"/>
+            <a:ext cx="1600200" cy="292608"/>
+          </a:xfrm>
+          <a:prstGeom prst="roundRect">
+            <a:avLst>
+              <a:gd name="adj" fmla="val 31250"/>
+            </a:avLst>
+          </a:prstGeom>
+          <a:solidFill>
+            <a:srgbClr val="F4F6F8"/>
+          </a:solidFill>
+          <a:ln/>
+        </p:spPr>
+      </p:sp>
+      <p:sp>
+        <p:nvSpPr>
+          <p:cNvPr id="12" name="Text 10"/>
+          <p:cNvSpPr txBox="1"/>
+          <p:nvPr/>
+        </p:nvSpPr>
+        <p:spPr>
+          <a:xfrm>
+            <a:off x="4681728" y="987552"/>
+            <a:ext cx="1600200" cy="292608"/>
+          </a:xfrm>
+          <a:prstGeom prst="rect">
+            <a:avLst/>
+          </a:prstGeom>
+          <a:noFill/>
+          <a:ln/>
+        </p:spPr>
+        <p:txBody>
+          <a:bodyPr wrap="square" lIns="0" tIns="0" rIns="0" bIns="0" rtlCol="0" anchor="ctr"/>
+          <a:lstStyle/>
+          <a:p>
+            <a:pPr algn="ctr" indent="0" marL="0">
+              <a:buNone/>
+            </a:pPr>
+            <a:r>
+              <a:rPr lang="en-US" sz="1050" dirty="0">
+                <a:solidFill>
+                  <a:srgbClr val="97A1AC"/>
+                </a:solidFill>
+                <a:latin typeface="Calibri" pitchFamily="34" charset="0"/>
+                <a:ea typeface="Calibri" pitchFamily="34" charset="-122"/>
+                <a:cs typeface="Calibri" pitchFamily="34" charset="-120"/>
+              </a:rPr>
+              <a:t>3 · Пуш</a:t>
+            </a:r>
+            <a:endParaRPr lang="en-US" sz="1050" dirty="0"/>
+          </a:p>
+        </p:txBody>
+      </p:sp>
+      <p:sp>
+        <p:nvSpPr>
+          <p:cNvPr id="13" name="Text 11"/>
+          <p:cNvSpPr txBox="1"/>
+          <p:nvPr/>
+        </p:nvSpPr>
+        <p:spPr>
+          <a:xfrm>
+            <a:off x="6281928" y="987552"/>
+            <a:ext cx="146304" cy="292608"/>
+          </a:xfrm>
+          <a:prstGeom prst="rect">
+            <a:avLst/>
+          </a:prstGeom>
+          <a:noFill/>
+          <a:ln/>
+        </p:spPr>
+        <p:txBody>
+          <a:bodyPr wrap="square" lIns="0" tIns="0" rIns="0" bIns="0" rtlCol="0" anchor="ctr"/>
+          <a:lstStyle/>
+          <a:p>
+            <a:pPr algn="ctr" indent="0" marL="0">
+              <a:buNone/>
+            </a:pPr>
+            <a:r>
+              <a:rPr lang="en-US" sz="1200" dirty="0">
+                <a:solidFill>
+                  <a:srgbClr val="B6BEC7"/>
+                </a:solidFill>
+                <a:latin typeface="Calibri" pitchFamily="34" charset="0"/>
+                <a:ea typeface="Calibri" pitchFamily="34" charset="-122"/>
+                <a:cs typeface="Calibri" pitchFamily="34" charset="-120"/>
+              </a:rPr>
+              <a:t>›</a:t>
+            </a:r>
+            <a:endParaRPr lang="en-US" sz="1200" dirty="0"/>
+          </a:p>
+        </p:txBody>
+      </p:sp>
+      <p:sp>
+        <p:nvSpPr>
+          <p:cNvPr id="14" name="Shape 12"/>
+          <p:cNvSpPr/>
+          <p:nvPr/>
+        </p:nvSpPr>
+        <p:spPr>
+          <a:xfrm>
+            <a:off x="6428232" y="987552"/>
+            <a:ext cx="1600200" cy="292608"/>
+          </a:xfrm>
+          <a:prstGeom prst="roundRect">
+            <a:avLst>
+              <a:gd name="adj" fmla="val 31250"/>
+            </a:avLst>
+          </a:prstGeom>
+          <a:solidFill>
+            <a:srgbClr val="F4F6F8"/>
+          </a:solidFill>
+          <a:ln/>
+        </p:spPr>
+      </p:sp>
+      <p:sp>
+        <p:nvSpPr>
+          <p:cNvPr id="15" name="Text 13"/>
+          <p:cNvSpPr txBox="1"/>
+          <p:nvPr/>
+        </p:nvSpPr>
+        <p:spPr>
+          <a:xfrm>
+            <a:off x="6428232" y="987552"/>
+            <a:ext cx="1600200" cy="292608"/>
+          </a:xfrm>
+          <a:prstGeom prst="rect">
+            <a:avLst/>
+          </a:prstGeom>
+          <a:noFill/>
+          <a:ln/>
+        </p:spPr>
+        <p:txBody>
+          <a:bodyPr wrap="square" lIns="0" tIns="0" rIns="0" bIns="0" rtlCol="0" anchor="ctr"/>
+          <a:lstStyle/>
+          <a:p>
+            <a:pPr algn="ctr" indent="0" marL="0">
+              <a:buNone/>
+            </a:pPr>
+            <a:r>
+              <a:rPr lang="en-US" sz="1050" dirty="0">
+                <a:solidFill>
+                  <a:srgbClr val="97A1AC"/>
+                </a:solidFill>
+                <a:latin typeface="Calibri" pitchFamily="34" charset="0"/>
+                <a:ea typeface="Calibri" pitchFamily="34" charset="-122"/>
+                <a:cs typeface="Calibri" pitchFamily="34" charset="-120"/>
+              </a:rPr>
+              <a:t>4 · Экран перевода</a:t>
+            </a:r>
+            <a:endParaRPr lang="en-US" sz="1050" dirty="0"/>
+          </a:p>
+        </p:txBody>
+      </p:sp>
+      <p:sp>
+        <p:nvSpPr>
+          <p:cNvPr id="16" name="Text 14"/>
+          <p:cNvSpPr txBox="1"/>
+          <p:nvPr/>
+        </p:nvSpPr>
+        <p:spPr>
+          <a:xfrm>
+            <a:off x="8028432" y="987552"/>
+            <a:ext cx="146304" cy="292608"/>
+          </a:xfrm>
+          <a:prstGeom prst="rect">
+            <a:avLst/>
+          </a:prstGeom>
+          <a:noFill/>
+          <a:ln/>
+        </p:spPr>
+        <p:txBody>
+          <a:bodyPr wrap="square" lIns="0" tIns="0" rIns="0" bIns="0" rtlCol="0" anchor="ctr"/>
+          <a:lstStyle/>
+          <a:p>
+            <a:pPr algn="ctr" indent="0" marL="0">
+              <a:buNone/>
+            </a:pPr>
+            <a:r>
+              <a:rPr lang="en-US" sz="1200" dirty="0">
+                <a:solidFill>
+                  <a:srgbClr val="B6BEC7"/>
+                </a:solidFill>
+                <a:latin typeface="Calibri" pitchFamily="34" charset="0"/>
+                <a:ea typeface="Calibri" pitchFamily="34" charset="-122"/>
+                <a:cs typeface="Calibri" pitchFamily="34" charset="-120"/>
+              </a:rPr>
+              <a:t>›</a:t>
+            </a:r>
+            <a:endParaRPr lang="en-US" sz="1200" dirty="0"/>
+          </a:p>
+        </p:txBody>
+      </p:sp>
+      <p:sp>
+        <p:nvSpPr>
+          <p:cNvPr id="17" name="Shape 15"/>
+          <p:cNvSpPr/>
+          <p:nvPr/>
+        </p:nvSpPr>
+        <p:spPr>
+          <a:xfrm>
+            <a:off x="8174736" y="987552"/>
+            <a:ext cx="1600200" cy="292608"/>
+          </a:xfrm>
+          <a:prstGeom prst="roundRect">
+            <a:avLst>
+              <a:gd name="adj" fmla="val 31250"/>
+            </a:avLst>
+          </a:prstGeom>
+          <a:solidFill>
+            <a:srgbClr val="F4F6F8"/>
+          </a:solidFill>
+          <a:ln/>
+        </p:spPr>
+      </p:sp>
+      <p:sp>
+        <p:nvSpPr>
+          <p:cNvPr id="18" name="Text 16"/>
+          <p:cNvSpPr txBox="1"/>
+          <p:nvPr/>
+        </p:nvSpPr>
+        <p:spPr>
+          <a:xfrm>
+            <a:off x="8174736" y="987552"/>
+            <a:ext cx="1600200" cy="292608"/>
+          </a:xfrm>
+          <a:prstGeom prst="rect">
+            <a:avLst/>
+          </a:prstGeom>
+          <a:noFill/>
+          <a:ln/>
+        </p:spPr>
+        <p:txBody>
+          <a:bodyPr wrap="square" lIns="0" tIns="0" rIns="0" bIns="0" rtlCol="0" anchor="ctr"/>
+          <a:lstStyle/>
+          <a:p>
+            <a:pPr algn="ctr" indent="0" marL="0">
+              <a:buNone/>
+            </a:pPr>
+            <a:r>
+              <a:rPr lang="en-US" sz="1050" dirty="0">
+                <a:solidFill>
+                  <a:srgbClr val="97A1AC"/>
+                </a:solidFill>
+                <a:latin typeface="Calibri" pitchFamily="34" charset="0"/>
+                <a:ea typeface="Calibri" pitchFamily="34" charset="-122"/>
+                <a:cs typeface="Calibri" pitchFamily="34" charset="-120"/>
+              </a:rPr>
+              <a:t>5 · Решение</a:t>
+            </a:r>
+            <a:endParaRPr lang="en-US" sz="1050" dirty="0"/>
+          </a:p>
+        </p:txBody>
+      </p:sp>
+      <p:sp>
+        <p:nvSpPr>
+          <p:cNvPr id="19" name="Text 17"/>
+          <p:cNvSpPr txBox="1"/>
+          <p:nvPr/>
+        </p:nvSpPr>
+        <p:spPr>
+          <a:xfrm>
+            <a:off x="9774936" y="987552"/>
+            <a:ext cx="146304" cy="292608"/>
+          </a:xfrm>
+          <a:prstGeom prst="rect">
+            <a:avLst/>
+          </a:prstGeom>
+          <a:noFill/>
+          <a:ln/>
+        </p:spPr>
+        <p:txBody>
+          <a:bodyPr wrap="square" lIns="0" tIns="0" rIns="0" bIns="0" rtlCol="0" anchor="ctr"/>
+          <a:lstStyle/>
+          <a:p>
+            <a:pPr algn="ctr" indent="0" marL="0">
+              <a:buNone/>
+            </a:pPr>
+            <a:r>
+              <a:rPr lang="en-US" sz="1200" dirty="0">
+                <a:solidFill>
+                  <a:srgbClr val="B6BEC7"/>
+                </a:solidFill>
+                <a:latin typeface="Calibri" pitchFamily="34" charset="0"/>
+                <a:ea typeface="Calibri" pitchFamily="34" charset="-122"/>
+                <a:cs typeface="Calibri" pitchFamily="34" charset="-120"/>
+              </a:rPr>
+              <a:t>›</a:t>
+            </a:r>
+            <a:endParaRPr lang="en-US" sz="1200" dirty="0"/>
+          </a:p>
+        </p:txBody>
+      </p:sp>
+      <p:sp>
+        <p:nvSpPr>
+          <p:cNvPr id="20" name="Shape 18"/>
+          <p:cNvSpPr/>
+          <p:nvPr/>
+        </p:nvSpPr>
+        <p:spPr>
+          <a:xfrm>
+            <a:off x="9921240" y="987552"/>
+            <a:ext cx="1600200" cy="292608"/>
+          </a:xfrm>
+          <a:prstGeom prst="roundRect">
+            <a:avLst>
+              <a:gd name="adj" fmla="val 31250"/>
+            </a:avLst>
+          </a:prstGeom>
+          <a:solidFill>
+            <a:srgbClr val="F4F6F8"/>
+          </a:solidFill>
+          <a:ln/>
+        </p:spPr>
+      </p:sp>
+      <p:sp>
+        <p:nvSpPr>
+          <p:cNvPr id="21" name="Text 19"/>
+          <p:cNvSpPr txBox="1"/>
+          <p:nvPr/>
+        </p:nvSpPr>
+        <p:spPr>
+          <a:xfrm>
+            <a:off x="9921240" y="987552"/>
+            <a:ext cx="1600200" cy="292608"/>
+          </a:xfrm>
+          <a:prstGeom prst="rect">
+            <a:avLst/>
+          </a:prstGeom>
+          <a:noFill/>
+          <a:ln/>
+        </p:spPr>
+        <p:txBody>
+          <a:bodyPr wrap="square" lIns="0" tIns="0" rIns="0" bIns="0" rtlCol="0" anchor="ctr"/>
+          <a:lstStyle/>
+          <a:p>
+            <a:pPr algn="ctr" indent="0" marL="0">
+              <a:buNone/>
+            </a:pPr>
+            <a:r>
+              <a:rPr lang="en-US" sz="1050" dirty="0">
+                <a:solidFill>
+                  <a:srgbClr val="97A1AC"/>
+                </a:solidFill>
+                <a:latin typeface="Calibri" pitchFamily="34" charset="0"/>
+                <a:ea typeface="Calibri" pitchFamily="34" charset="-122"/>
+                <a:cs typeface="Calibri" pitchFamily="34" charset="-120"/>
+              </a:rPr>
+              <a:t>6 · Удержание</a:t>
+            </a:r>
+            <a:endParaRPr lang="en-US" sz="1050" dirty="0"/>
+          </a:p>
+        </p:txBody>
+      </p:sp>
+      <p:sp>
+        <p:nvSpPr>
+          <p:cNvPr id="22" name="Text 20"/>
+          <p:cNvSpPr txBox="1"/>
+          <p:nvPr/>
+        </p:nvSpPr>
+        <p:spPr>
+          <a:xfrm>
+            <a:off x="640080" y="1481328"/>
             <a:ext cx="10881360" cy="457200"/>
           </a:xfrm>
           <a:prstGeom prst="rect">
@@ -14505,13 +15449,13 @@
       </p:sp>
       <p:sp>
         <p:nvSpPr>
-          <p:cNvPr id="7" name="Shape 5"/>
+          <p:cNvPr id="23" name="Shape 21"/>
           <p:cNvSpPr/>
           <p:nvPr/>
         </p:nvSpPr>
         <p:spPr>
           <a:xfrm>
-            <a:off x="640080" y="1920240"/>
+            <a:off x="640080" y="2048256"/>
             <a:ext cx="5367528" cy="1572768"/>
           </a:xfrm>
           <a:prstGeom prst="roundRect">
@@ -14527,13 +15471,13 @@
       </p:sp>
       <p:sp>
         <p:nvSpPr>
-          <p:cNvPr id="8" name="Text 6"/>
-          <p:cNvSpPr txBox="1"/>
-          <p:nvPr/>
-        </p:nvSpPr>
-        <p:spPr>
-          <a:xfrm>
-            <a:off x="896112" y="2103120"/>
+          <p:cNvPr id="24" name="Text 22"/>
+          <p:cNvSpPr txBox="1"/>
+          <p:nvPr/>
+        </p:nvSpPr>
+        <p:spPr>
+          <a:xfrm>
+            <a:off x="896112" y="2231136"/>
             <a:ext cx="4855464" cy="475488"/>
           </a:xfrm>
           <a:prstGeom prst="rect">
@@ -14566,13 +15510,13 @@
       </p:sp>
       <p:sp>
         <p:nvSpPr>
-          <p:cNvPr id="9" name="Text 7"/>
-          <p:cNvSpPr txBox="1"/>
-          <p:nvPr/>
-        </p:nvSpPr>
-        <p:spPr>
-          <a:xfrm>
-            <a:off x="896112" y="2633472"/>
+          <p:cNvPr id="25" name="Text 23"/>
+          <p:cNvSpPr txBox="1"/>
+          <p:nvPr/>
+        </p:nvSpPr>
+        <p:spPr>
+          <a:xfrm>
+            <a:off x="896112" y="2761488"/>
             <a:ext cx="4855464" cy="676656"/>
           </a:xfrm>
           <a:prstGeom prst="rect">
@@ -14608,13 +15552,13 @@
       </p:sp>
       <p:sp>
         <p:nvSpPr>
-          <p:cNvPr id="10" name="Shape 8"/>
+          <p:cNvPr id="26" name="Shape 24"/>
           <p:cNvSpPr/>
           <p:nvPr/>
         </p:nvSpPr>
         <p:spPr>
           <a:xfrm>
-            <a:off x="6153912" y="1920240"/>
+            <a:off x="6153912" y="2048256"/>
             <a:ext cx="5367528" cy="1572768"/>
           </a:xfrm>
           <a:prstGeom prst="roundRect">
@@ -14630,13 +15574,13 @@
       </p:sp>
       <p:sp>
         <p:nvSpPr>
-          <p:cNvPr id="11" name="Text 9"/>
-          <p:cNvSpPr txBox="1"/>
-          <p:nvPr/>
-        </p:nvSpPr>
-        <p:spPr>
-          <a:xfrm>
-            <a:off x="6409944" y="2103120"/>
+          <p:cNvPr id="27" name="Text 25"/>
+          <p:cNvSpPr txBox="1"/>
+          <p:nvPr/>
+        </p:nvSpPr>
+        <p:spPr>
+          <a:xfrm>
+            <a:off x="6409944" y="2231136"/>
             <a:ext cx="4855464" cy="475488"/>
           </a:xfrm>
           <a:prstGeom prst="rect">
@@ -14669,13 +15613,13 @@
       </p:sp>
       <p:sp>
         <p:nvSpPr>
-          <p:cNvPr id="12" name="Text 10"/>
-          <p:cNvSpPr txBox="1"/>
-          <p:nvPr/>
-        </p:nvSpPr>
-        <p:spPr>
-          <a:xfrm>
-            <a:off x="6409944" y="2633472"/>
+          <p:cNvPr id="28" name="Text 26"/>
+          <p:cNvSpPr txBox="1"/>
+          <p:nvPr/>
+        </p:nvSpPr>
+        <p:spPr>
+          <a:xfrm>
+            <a:off x="6409944" y="2761488"/>
             <a:ext cx="4855464" cy="676656"/>
           </a:xfrm>
           <a:prstGeom prst="rect">
@@ -14711,13 +15655,13 @@
       </p:sp>
       <p:sp>
         <p:nvSpPr>
-          <p:cNvPr id="13" name="Shape 11"/>
+          <p:cNvPr id="29" name="Shape 27"/>
           <p:cNvSpPr/>
           <p:nvPr/>
         </p:nvSpPr>
         <p:spPr>
           <a:xfrm>
-            <a:off x="640080" y="3621024"/>
+            <a:off x="640080" y="3730752"/>
             <a:ext cx="5367528" cy="1572768"/>
           </a:xfrm>
           <a:prstGeom prst="roundRect">
@@ -14733,13 +15677,13 @@
       </p:sp>
       <p:sp>
         <p:nvSpPr>
-          <p:cNvPr id="14" name="Text 12"/>
-          <p:cNvSpPr txBox="1"/>
-          <p:nvPr/>
-        </p:nvSpPr>
-        <p:spPr>
-          <a:xfrm>
-            <a:off x="896112" y="3803904"/>
+          <p:cNvPr id="30" name="Text 28"/>
+          <p:cNvSpPr txBox="1"/>
+          <p:nvPr/>
+        </p:nvSpPr>
+        <p:spPr>
+          <a:xfrm>
+            <a:off x="896112" y="3913632"/>
             <a:ext cx="4855464" cy="475488"/>
           </a:xfrm>
           <a:prstGeom prst="rect">
@@ -14772,13 +15716,13 @@
       </p:sp>
       <p:sp>
         <p:nvSpPr>
-          <p:cNvPr id="15" name="Text 13"/>
-          <p:cNvSpPr txBox="1"/>
-          <p:nvPr/>
-        </p:nvSpPr>
-        <p:spPr>
-          <a:xfrm>
-            <a:off x="896112" y="4334256"/>
+          <p:cNvPr id="31" name="Text 29"/>
+          <p:cNvSpPr txBox="1"/>
+          <p:nvPr/>
+        </p:nvSpPr>
+        <p:spPr>
+          <a:xfrm>
+            <a:off x="896112" y="4443984"/>
             <a:ext cx="4855464" cy="676656"/>
           </a:xfrm>
           <a:prstGeom prst="rect">
@@ -14814,13 +15758,13 @@
       </p:sp>
       <p:sp>
         <p:nvSpPr>
-          <p:cNvPr id="16" name="Shape 14"/>
+          <p:cNvPr id="32" name="Shape 30"/>
           <p:cNvSpPr/>
           <p:nvPr/>
         </p:nvSpPr>
         <p:spPr>
           <a:xfrm>
-            <a:off x="6153912" y="3621024"/>
+            <a:off x="6153912" y="3730752"/>
             <a:ext cx="5367528" cy="1572768"/>
           </a:xfrm>
           <a:prstGeom prst="roundRect">
@@ -14836,13 +15780,13 @@
       </p:sp>
       <p:sp>
         <p:nvSpPr>
-          <p:cNvPr id="17" name="Text 15"/>
-          <p:cNvSpPr txBox="1"/>
-          <p:nvPr/>
-        </p:nvSpPr>
-        <p:spPr>
-          <a:xfrm>
-            <a:off x="6409944" y="3803904"/>
+          <p:cNvPr id="33" name="Text 31"/>
+          <p:cNvSpPr txBox="1"/>
+          <p:nvPr/>
+        </p:nvSpPr>
+        <p:spPr>
+          <a:xfrm>
+            <a:off x="6409944" y="3913632"/>
             <a:ext cx="4855464" cy="475488"/>
           </a:xfrm>
           <a:prstGeom prst="rect">
@@ -14875,13 +15819,13 @@
       </p:sp>
       <p:sp>
         <p:nvSpPr>
-          <p:cNvPr id="18" name="Text 16"/>
-          <p:cNvSpPr txBox="1"/>
-          <p:nvPr/>
-        </p:nvSpPr>
-        <p:spPr>
-          <a:xfrm>
-            <a:off x="6409944" y="4334256"/>
+          <p:cNvPr id="34" name="Text 32"/>
+          <p:cNvSpPr txBox="1"/>
+          <p:nvPr/>
+        </p:nvSpPr>
+        <p:spPr>
+          <a:xfrm>
+            <a:off x="6409944" y="4443984"/>
             <a:ext cx="4855464" cy="676656"/>
           </a:xfrm>
           <a:prstGeom prst="rect">
@@ -14917,18 +15861,18 @@
       </p:sp>
       <p:sp>
         <p:nvSpPr>
-          <p:cNvPr id="19" name="Shape 17"/>
+          <p:cNvPr id="35" name="Shape 33"/>
           <p:cNvSpPr/>
           <p:nvPr/>
         </p:nvSpPr>
         <p:spPr>
           <a:xfrm>
-            <a:off x="640080" y="5029200"/>
-            <a:ext cx="10881360" cy="1207008"/>
+            <a:off x="640080" y="5358384"/>
+            <a:ext cx="10881360" cy="1133856"/>
           </a:xfrm>
           <a:prstGeom prst="roundRect">
             <a:avLst>
-              <a:gd name="adj" fmla="val 4545"/>
+              <a:gd name="adj" fmla="val 4839"/>
             </a:avLst>
           </a:prstGeom>
           <a:solidFill>
@@ -14939,13 +15883,13 @@
       </p:sp>
       <p:sp>
         <p:nvSpPr>
-          <p:cNvPr id="20" name="Text 18"/>
-          <p:cNvSpPr txBox="1"/>
-          <p:nvPr/>
-        </p:nvSpPr>
-        <p:spPr>
-          <a:xfrm>
-            <a:off x="914400" y="5184648"/>
+          <p:cNvPr id="36" name="Text 34"/>
+          <p:cNvSpPr txBox="1"/>
+          <p:nvPr/>
+        </p:nvSpPr>
+        <p:spPr>
+          <a:xfrm>
+            <a:off x="914400" y="5513832"/>
             <a:ext cx="10332720" cy="329184"/>
           </a:xfrm>
           <a:prstGeom prst="rect">
@@ -14978,14 +15922,14 @@
       </p:sp>
       <p:sp>
         <p:nvSpPr>
-          <p:cNvPr id="21" name="Text 19"/>
-          <p:cNvSpPr txBox="1"/>
-          <p:nvPr/>
-        </p:nvSpPr>
-        <p:spPr>
-          <a:xfrm>
-            <a:off x="914400" y="5559552"/>
-            <a:ext cx="10332720" cy="512064"/>
+          <p:cNvPr id="37" name="Text 35"/>
+          <p:cNvSpPr txBox="1"/>
+          <p:nvPr/>
+        </p:nvSpPr>
+        <p:spPr>
+          <a:xfrm>
+            <a:off x="914400" y="5888736"/>
+            <a:ext cx="10332720" cy="438912"/>
           </a:xfrm>
           <a:prstGeom prst="rect">
             <a:avLst/>
@@ -15012,7 +15956,7 @@
                 <a:ea typeface="Calibri" pitchFamily="34" charset="-122"/>
                 <a:cs typeface="Calibri" pitchFamily="34" charset="-120"/>
               </a:rPr>
-              <a:t>Cooldown и добор частоты до полосы 1–2 в неделю спроектированы, но в коде их нет. Сейчас реализовано только само условие сигнала. На пилот это влияет прямо: без cooldown серия из шести сообщений за неделю технически возможна.</a:t>
+              <a:t>Cooldown и добор частоты до полосы 1–2 спроектированы, но в коде их нет: реализовано только само условие сигнала. Без cooldown серия из шести сообщений за неделю технически возможна.</a:t>
             </a:r>
             <a:endParaRPr lang="en-US" sz="1250" dirty="0"/>
           </a:p>
@@ -15150,14 +16094,36 @@
       </p:sp>
       <p:sp>
         <p:nvSpPr>
-          <p:cNvPr id="5" name="Text 3"/>
-          <p:cNvSpPr txBox="1"/>
-          <p:nvPr/>
-        </p:nvSpPr>
-        <p:spPr>
-          <a:xfrm>
-            <a:off x="1188720" y="969264"/>
-            <a:ext cx="10332720" cy="237744"/>
+          <p:cNvPr id="5" name="Shape 3"/>
+          <p:cNvSpPr/>
+          <p:nvPr/>
+        </p:nvSpPr>
+        <p:spPr>
+          <a:xfrm>
+            <a:off x="1188720" y="987552"/>
+            <a:ext cx="1600200" cy="292608"/>
+          </a:xfrm>
+          <a:prstGeom prst="roundRect">
+            <a:avLst>
+              <a:gd name="adj" fmla="val 31250"/>
+            </a:avLst>
+          </a:prstGeom>
+          <a:solidFill>
+            <a:srgbClr val="D8DEE4"/>
+          </a:solidFill>
+          <a:ln/>
+        </p:spPr>
+      </p:sp>
+      <p:sp>
+        <p:nvSpPr>
+          <p:cNvPr id="6" name="Text 4"/>
+          <p:cNvSpPr txBox="1"/>
+          <p:nvPr/>
+        </p:nvSpPr>
+        <p:spPr>
+          <a:xfrm>
+            <a:off x="1188720" y="987552"/>
+            <a:ext cx="1600200" cy="292608"/>
           </a:xfrm>
           <a:prstGeom prst="rect">
             <a:avLst/>
@@ -15169,19 +16135,519 @@
           <a:bodyPr wrap="square" lIns="0" tIns="0" rIns="0" bIns="0" rtlCol="0" anchor="ctr"/>
           <a:lstStyle/>
           <a:p>
-            <a:pPr indent="0" marL="0">
-              <a:buNone/>
-            </a:pPr>
-            <a:r>
-              <a:rPr lang="en-US" sz="1050" b="1" spc="140" kern="0" dirty="0">
-                <a:solidFill>
-                  <a:srgbClr val="6E7A88"/>
+            <a:pPr algn="ctr" indent="0" marL="0">
+              <a:buNone/>
+            </a:pPr>
+            <a:r>
+              <a:rPr lang="en-US" sz="1050" dirty="0">
+                <a:solidFill>
+                  <a:srgbClr val="5A6672"/>
                 </a:solidFill>
                 <a:latin typeface="Calibri" pitchFamily="34" charset="0"/>
                 <a:ea typeface="Calibri" pitchFamily="34" charset="-122"/>
                 <a:cs typeface="Calibri" pitchFamily="34" charset="-120"/>
               </a:rPr>
-              <a:t>ШАГ 3 ИЗ 6 · КЛИЕНТСКИЙ ПУТЬ</a:t>
+              <a:t>1 · Триггер</a:t>
+            </a:r>
+            <a:endParaRPr lang="en-US" sz="1050" dirty="0"/>
+          </a:p>
+        </p:txBody>
+      </p:sp>
+      <p:sp>
+        <p:nvSpPr>
+          <p:cNvPr id="7" name="Text 5"/>
+          <p:cNvSpPr txBox="1"/>
+          <p:nvPr/>
+        </p:nvSpPr>
+        <p:spPr>
+          <a:xfrm>
+            <a:off x="2788920" y="987552"/>
+            <a:ext cx="146304" cy="292608"/>
+          </a:xfrm>
+          <a:prstGeom prst="rect">
+            <a:avLst/>
+          </a:prstGeom>
+          <a:noFill/>
+          <a:ln/>
+        </p:spPr>
+        <p:txBody>
+          <a:bodyPr wrap="square" lIns="0" tIns="0" rIns="0" bIns="0" rtlCol="0" anchor="ctr"/>
+          <a:lstStyle/>
+          <a:p>
+            <a:pPr algn="ctr" indent="0" marL="0">
+              <a:buNone/>
+            </a:pPr>
+            <a:r>
+              <a:rPr lang="en-US" sz="1200" dirty="0">
+                <a:solidFill>
+                  <a:srgbClr val="B6BEC7"/>
+                </a:solidFill>
+                <a:latin typeface="Calibri" pitchFamily="34" charset="0"/>
+                <a:ea typeface="Calibri" pitchFamily="34" charset="-122"/>
+                <a:cs typeface="Calibri" pitchFamily="34" charset="-120"/>
+              </a:rPr>
+              <a:t>›</a:t>
+            </a:r>
+            <a:endParaRPr lang="en-US" sz="1200" dirty="0"/>
+          </a:p>
+        </p:txBody>
+      </p:sp>
+      <p:sp>
+        <p:nvSpPr>
+          <p:cNvPr id="8" name="Shape 6"/>
+          <p:cNvSpPr/>
+          <p:nvPr/>
+        </p:nvSpPr>
+        <p:spPr>
+          <a:xfrm>
+            <a:off x="2935224" y="987552"/>
+            <a:ext cx="1600200" cy="292608"/>
+          </a:xfrm>
+          <a:prstGeom prst="roundRect">
+            <a:avLst>
+              <a:gd name="adj" fmla="val 31250"/>
+            </a:avLst>
+          </a:prstGeom>
+          <a:solidFill>
+            <a:srgbClr val="D8DEE4"/>
+          </a:solidFill>
+          <a:ln/>
+        </p:spPr>
+      </p:sp>
+      <p:sp>
+        <p:nvSpPr>
+          <p:cNvPr id="9" name="Text 7"/>
+          <p:cNvSpPr txBox="1"/>
+          <p:nvPr/>
+        </p:nvSpPr>
+        <p:spPr>
+          <a:xfrm>
+            <a:off x="2935224" y="987552"/>
+            <a:ext cx="1600200" cy="292608"/>
+          </a:xfrm>
+          <a:prstGeom prst="rect">
+            <a:avLst/>
+          </a:prstGeom>
+          <a:noFill/>
+          <a:ln/>
+        </p:spPr>
+        <p:txBody>
+          <a:bodyPr wrap="square" lIns="0" tIns="0" rIns="0" bIns="0" rtlCol="0" anchor="ctr"/>
+          <a:lstStyle/>
+          <a:p>
+            <a:pPr algn="ctr" indent="0" marL="0">
+              <a:buNone/>
+            </a:pPr>
+            <a:r>
+              <a:rPr lang="en-US" sz="1050" dirty="0">
+                <a:solidFill>
+                  <a:srgbClr val="5A6672"/>
+                </a:solidFill>
+                <a:latin typeface="Calibri" pitchFamily="34" charset="0"/>
+                <a:ea typeface="Calibri" pitchFamily="34" charset="-122"/>
+                <a:cs typeface="Calibri" pitchFamily="34" charset="-120"/>
+              </a:rPr>
+              <a:t>2 · Фильтр</a:t>
+            </a:r>
+            <a:endParaRPr lang="en-US" sz="1050" dirty="0"/>
+          </a:p>
+        </p:txBody>
+      </p:sp>
+      <p:sp>
+        <p:nvSpPr>
+          <p:cNvPr id="10" name="Text 8"/>
+          <p:cNvSpPr txBox="1"/>
+          <p:nvPr/>
+        </p:nvSpPr>
+        <p:spPr>
+          <a:xfrm>
+            <a:off x="4535424" y="987552"/>
+            <a:ext cx="146304" cy="292608"/>
+          </a:xfrm>
+          <a:prstGeom prst="rect">
+            <a:avLst/>
+          </a:prstGeom>
+          <a:noFill/>
+          <a:ln/>
+        </p:spPr>
+        <p:txBody>
+          <a:bodyPr wrap="square" lIns="0" tIns="0" rIns="0" bIns="0" rtlCol="0" anchor="ctr"/>
+          <a:lstStyle/>
+          <a:p>
+            <a:pPr algn="ctr" indent="0" marL="0">
+              <a:buNone/>
+            </a:pPr>
+            <a:r>
+              <a:rPr lang="en-US" sz="1200" dirty="0">
+                <a:solidFill>
+                  <a:srgbClr val="B6BEC7"/>
+                </a:solidFill>
+                <a:latin typeface="Calibri" pitchFamily="34" charset="0"/>
+                <a:ea typeface="Calibri" pitchFamily="34" charset="-122"/>
+                <a:cs typeface="Calibri" pitchFamily="34" charset="-120"/>
+              </a:rPr>
+              <a:t>›</a:t>
+            </a:r>
+            <a:endParaRPr lang="en-US" sz="1200" dirty="0"/>
+          </a:p>
+        </p:txBody>
+      </p:sp>
+      <p:sp>
+        <p:nvSpPr>
+          <p:cNvPr id="11" name="Shape 9"/>
+          <p:cNvSpPr/>
+          <p:nvPr/>
+        </p:nvSpPr>
+        <p:spPr>
+          <a:xfrm>
+            <a:off x="4681728" y="987552"/>
+            <a:ext cx="1600200" cy="292608"/>
+          </a:xfrm>
+          <a:prstGeom prst="roundRect">
+            <a:avLst>
+              <a:gd name="adj" fmla="val 31250"/>
+            </a:avLst>
+          </a:prstGeom>
+          <a:solidFill>
+            <a:srgbClr val="9C5B12"/>
+          </a:solidFill>
+          <a:ln/>
+        </p:spPr>
+      </p:sp>
+      <p:sp>
+        <p:nvSpPr>
+          <p:cNvPr id="12" name="Text 10"/>
+          <p:cNvSpPr txBox="1"/>
+          <p:nvPr/>
+        </p:nvSpPr>
+        <p:spPr>
+          <a:xfrm>
+            <a:off x="4681728" y="987552"/>
+            <a:ext cx="1600200" cy="292608"/>
+          </a:xfrm>
+          <a:prstGeom prst="rect">
+            <a:avLst/>
+          </a:prstGeom>
+          <a:noFill/>
+          <a:ln/>
+        </p:spPr>
+        <p:txBody>
+          <a:bodyPr wrap="square" lIns="0" tIns="0" rIns="0" bIns="0" rtlCol="0" anchor="ctr"/>
+          <a:lstStyle/>
+          <a:p>
+            <a:pPr algn="ctr" indent="0" marL="0">
+              <a:buNone/>
+            </a:pPr>
+            <a:r>
+              <a:rPr lang="en-US" sz="1050" b="1" dirty="0">
+                <a:solidFill>
+                  <a:srgbClr val="FFFFFF"/>
+                </a:solidFill>
+                <a:latin typeface="Calibri" pitchFamily="34" charset="0"/>
+                <a:ea typeface="Calibri" pitchFamily="34" charset="-122"/>
+                <a:cs typeface="Calibri" pitchFamily="34" charset="-120"/>
+              </a:rPr>
+              <a:t>3 · Пуш</a:t>
+            </a:r>
+            <a:endParaRPr lang="en-US" sz="1050" dirty="0"/>
+          </a:p>
+        </p:txBody>
+      </p:sp>
+      <p:sp>
+        <p:nvSpPr>
+          <p:cNvPr id="13" name="Text 11"/>
+          <p:cNvSpPr txBox="1"/>
+          <p:nvPr/>
+        </p:nvSpPr>
+        <p:spPr>
+          <a:xfrm>
+            <a:off x="6281928" y="987552"/>
+            <a:ext cx="146304" cy="292608"/>
+          </a:xfrm>
+          <a:prstGeom prst="rect">
+            <a:avLst/>
+          </a:prstGeom>
+          <a:noFill/>
+          <a:ln/>
+        </p:spPr>
+        <p:txBody>
+          <a:bodyPr wrap="square" lIns="0" tIns="0" rIns="0" bIns="0" rtlCol="0" anchor="ctr"/>
+          <a:lstStyle/>
+          <a:p>
+            <a:pPr algn="ctr" indent="0" marL="0">
+              <a:buNone/>
+            </a:pPr>
+            <a:r>
+              <a:rPr lang="en-US" sz="1200" dirty="0">
+                <a:solidFill>
+                  <a:srgbClr val="B6BEC7"/>
+                </a:solidFill>
+                <a:latin typeface="Calibri" pitchFamily="34" charset="0"/>
+                <a:ea typeface="Calibri" pitchFamily="34" charset="-122"/>
+                <a:cs typeface="Calibri" pitchFamily="34" charset="-120"/>
+              </a:rPr>
+              <a:t>›</a:t>
+            </a:r>
+            <a:endParaRPr lang="en-US" sz="1200" dirty="0"/>
+          </a:p>
+        </p:txBody>
+      </p:sp>
+      <p:sp>
+        <p:nvSpPr>
+          <p:cNvPr id="14" name="Shape 12"/>
+          <p:cNvSpPr/>
+          <p:nvPr/>
+        </p:nvSpPr>
+        <p:spPr>
+          <a:xfrm>
+            <a:off x="6428232" y="987552"/>
+            <a:ext cx="1600200" cy="292608"/>
+          </a:xfrm>
+          <a:prstGeom prst="roundRect">
+            <a:avLst>
+              <a:gd name="adj" fmla="val 31250"/>
+            </a:avLst>
+          </a:prstGeom>
+          <a:solidFill>
+            <a:srgbClr val="F4F6F8"/>
+          </a:solidFill>
+          <a:ln/>
+        </p:spPr>
+      </p:sp>
+      <p:sp>
+        <p:nvSpPr>
+          <p:cNvPr id="15" name="Text 13"/>
+          <p:cNvSpPr txBox="1"/>
+          <p:nvPr/>
+        </p:nvSpPr>
+        <p:spPr>
+          <a:xfrm>
+            <a:off x="6428232" y="987552"/>
+            <a:ext cx="1600200" cy="292608"/>
+          </a:xfrm>
+          <a:prstGeom prst="rect">
+            <a:avLst/>
+          </a:prstGeom>
+          <a:noFill/>
+          <a:ln/>
+        </p:spPr>
+        <p:txBody>
+          <a:bodyPr wrap="square" lIns="0" tIns="0" rIns="0" bIns="0" rtlCol="0" anchor="ctr"/>
+          <a:lstStyle/>
+          <a:p>
+            <a:pPr algn="ctr" indent="0" marL="0">
+              <a:buNone/>
+            </a:pPr>
+            <a:r>
+              <a:rPr lang="en-US" sz="1050" dirty="0">
+                <a:solidFill>
+                  <a:srgbClr val="97A1AC"/>
+                </a:solidFill>
+                <a:latin typeface="Calibri" pitchFamily="34" charset="0"/>
+                <a:ea typeface="Calibri" pitchFamily="34" charset="-122"/>
+                <a:cs typeface="Calibri" pitchFamily="34" charset="-120"/>
+              </a:rPr>
+              <a:t>4 · Экран перевода</a:t>
+            </a:r>
+            <a:endParaRPr lang="en-US" sz="1050" dirty="0"/>
+          </a:p>
+        </p:txBody>
+      </p:sp>
+      <p:sp>
+        <p:nvSpPr>
+          <p:cNvPr id="16" name="Text 14"/>
+          <p:cNvSpPr txBox="1"/>
+          <p:nvPr/>
+        </p:nvSpPr>
+        <p:spPr>
+          <a:xfrm>
+            <a:off x="8028432" y="987552"/>
+            <a:ext cx="146304" cy="292608"/>
+          </a:xfrm>
+          <a:prstGeom prst="rect">
+            <a:avLst/>
+          </a:prstGeom>
+          <a:noFill/>
+          <a:ln/>
+        </p:spPr>
+        <p:txBody>
+          <a:bodyPr wrap="square" lIns="0" tIns="0" rIns="0" bIns="0" rtlCol="0" anchor="ctr"/>
+          <a:lstStyle/>
+          <a:p>
+            <a:pPr algn="ctr" indent="0" marL="0">
+              <a:buNone/>
+            </a:pPr>
+            <a:r>
+              <a:rPr lang="en-US" sz="1200" dirty="0">
+                <a:solidFill>
+                  <a:srgbClr val="B6BEC7"/>
+                </a:solidFill>
+                <a:latin typeface="Calibri" pitchFamily="34" charset="0"/>
+                <a:ea typeface="Calibri" pitchFamily="34" charset="-122"/>
+                <a:cs typeface="Calibri" pitchFamily="34" charset="-120"/>
+              </a:rPr>
+              <a:t>›</a:t>
+            </a:r>
+            <a:endParaRPr lang="en-US" sz="1200" dirty="0"/>
+          </a:p>
+        </p:txBody>
+      </p:sp>
+      <p:sp>
+        <p:nvSpPr>
+          <p:cNvPr id="17" name="Shape 15"/>
+          <p:cNvSpPr/>
+          <p:nvPr/>
+        </p:nvSpPr>
+        <p:spPr>
+          <a:xfrm>
+            <a:off x="8174736" y="987552"/>
+            <a:ext cx="1600200" cy="292608"/>
+          </a:xfrm>
+          <a:prstGeom prst="roundRect">
+            <a:avLst>
+              <a:gd name="adj" fmla="val 31250"/>
+            </a:avLst>
+          </a:prstGeom>
+          <a:solidFill>
+            <a:srgbClr val="F4F6F8"/>
+          </a:solidFill>
+          <a:ln/>
+        </p:spPr>
+      </p:sp>
+      <p:sp>
+        <p:nvSpPr>
+          <p:cNvPr id="18" name="Text 16"/>
+          <p:cNvSpPr txBox="1"/>
+          <p:nvPr/>
+        </p:nvSpPr>
+        <p:spPr>
+          <a:xfrm>
+            <a:off x="8174736" y="987552"/>
+            <a:ext cx="1600200" cy="292608"/>
+          </a:xfrm>
+          <a:prstGeom prst="rect">
+            <a:avLst/>
+          </a:prstGeom>
+          <a:noFill/>
+          <a:ln/>
+        </p:spPr>
+        <p:txBody>
+          <a:bodyPr wrap="square" lIns="0" tIns="0" rIns="0" bIns="0" rtlCol="0" anchor="ctr"/>
+          <a:lstStyle/>
+          <a:p>
+            <a:pPr algn="ctr" indent="0" marL="0">
+              <a:buNone/>
+            </a:pPr>
+            <a:r>
+              <a:rPr lang="en-US" sz="1050" dirty="0">
+                <a:solidFill>
+                  <a:srgbClr val="97A1AC"/>
+                </a:solidFill>
+                <a:latin typeface="Calibri" pitchFamily="34" charset="0"/>
+                <a:ea typeface="Calibri" pitchFamily="34" charset="-122"/>
+                <a:cs typeface="Calibri" pitchFamily="34" charset="-120"/>
+              </a:rPr>
+              <a:t>5 · Решение</a:t>
+            </a:r>
+            <a:endParaRPr lang="en-US" sz="1050" dirty="0"/>
+          </a:p>
+        </p:txBody>
+      </p:sp>
+      <p:sp>
+        <p:nvSpPr>
+          <p:cNvPr id="19" name="Text 17"/>
+          <p:cNvSpPr txBox="1"/>
+          <p:nvPr/>
+        </p:nvSpPr>
+        <p:spPr>
+          <a:xfrm>
+            <a:off x="9774936" y="987552"/>
+            <a:ext cx="146304" cy="292608"/>
+          </a:xfrm>
+          <a:prstGeom prst="rect">
+            <a:avLst/>
+          </a:prstGeom>
+          <a:noFill/>
+          <a:ln/>
+        </p:spPr>
+        <p:txBody>
+          <a:bodyPr wrap="square" lIns="0" tIns="0" rIns="0" bIns="0" rtlCol="0" anchor="ctr"/>
+          <a:lstStyle/>
+          <a:p>
+            <a:pPr algn="ctr" indent="0" marL="0">
+              <a:buNone/>
+            </a:pPr>
+            <a:r>
+              <a:rPr lang="en-US" sz="1200" dirty="0">
+                <a:solidFill>
+                  <a:srgbClr val="B6BEC7"/>
+                </a:solidFill>
+                <a:latin typeface="Calibri" pitchFamily="34" charset="0"/>
+                <a:ea typeface="Calibri" pitchFamily="34" charset="-122"/>
+                <a:cs typeface="Calibri" pitchFamily="34" charset="-120"/>
+              </a:rPr>
+              <a:t>›</a:t>
+            </a:r>
+            <a:endParaRPr lang="en-US" sz="1200" dirty="0"/>
+          </a:p>
+        </p:txBody>
+      </p:sp>
+      <p:sp>
+        <p:nvSpPr>
+          <p:cNvPr id="20" name="Shape 18"/>
+          <p:cNvSpPr/>
+          <p:nvPr/>
+        </p:nvSpPr>
+        <p:spPr>
+          <a:xfrm>
+            <a:off x="9921240" y="987552"/>
+            <a:ext cx="1600200" cy="292608"/>
+          </a:xfrm>
+          <a:prstGeom prst="roundRect">
+            <a:avLst>
+              <a:gd name="adj" fmla="val 31250"/>
+            </a:avLst>
+          </a:prstGeom>
+          <a:solidFill>
+            <a:srgbClr val="F4F6F8"/>
+          </a:solidFill>
+          <a:ln/>
+        </p:spPr>
+      </p:sp>
+      <p:sp>
+        <p:nvSpPr>
+          <p:cNvPr id="21" name="Text 19"/>
+          <p:cNvSpPr txBox="1"/>
+          <p:nvPr/>
+        </p:nvSpPr>
+        <p:spPr>
+          <a:xfrm>
+            <a:off x="9921240" y="987552"/>
+            <a:ext cx="1600200" cy="292608"/>
+          </a:xfrm>
+          <a:prstGeom prst="rect">
+            <a:avLst/>
+          </a:prstGeom>
+          <a:noFill/>
+          <a:ln/>
+        </p:spPr>
+        <p:txBody>
+          <a:bodyPr wrap="square" lIns="0" tIns="0" rIns="0" bIns="0" rtlCol="0" anchor="ctr"/>
+          <a:lstStyle/>
+          <a:p>
+            <a:pPr algn="ctr" indent="0" marL="0">
+              <a:buNone/>
+            </a:pPr>
+            <a:r>
+              <a:rPr lang="en-US" sz="1050" dirty="0">
+                <a:solidFill>
+                  <a:srgbClr val="97A1AC"/>
+                </a:solidFill>
+                <a:latin typeface="Calibri" pitchFamily="34" charset="0"/>
+                <a:ea typeface="Calibri" pitchFamily="34" charset="-122"/>
+                <a:cs typeface="Calibri" pitchFamily="34" charset="-120"/>
+              </a:rPr>
+              <a:t>6 · Удержание</a:t>
             </a:r>
             <a:endParaRPr lang="en-US" sz="1050" dirty="0"/>
           </a:p>
@@ -15189,7 +16655,7 @@
       </p:sp>
       <p:pic>
         <p:nvPicPr>
-          <p:cNvPr id="6" name="Image 0" descr="submission/figures/ekran-02.png">    </p:cNvPr>
+          <p:cNvPr id="22" name="Image 0" descr="submission/figures/ekran-02.png">    </p:cNvPr>
           <p:cNvPicPr>
             <a:picLocks noChangeAspect="1"/>
           </p:cNvPicPr>
@@ -15203,8 +16669,8 @@
         </p:blipFill>
         <p:spPr>
           <a:xfrm>
-            <a:off x="640080" y="1371600"/>
-            <a:ext cx="3017520" cy="4091757"/>
+            <a:off x="640080" y="1627632"/>
+            <a:ext cx="2194560" cy="2975823"/>
           </a:xfrm>
           <a:prstGeom prst="rect">
             <a:avLst/>
@@ -15213,18 +16679,18 @@
       </p:pic>
       <p:sp>
         <p:nvSpPr>
-          <p:cNvPr id="7" name="Shape 4"/>
+          <p:cNvPr id="23" name="Shape 20"/>
           <p:cNvSpPr/>
           <p:nvPr/>
         </p:nvSpPr>
         <p:spPr>
           <a:xfrm>
-            <a:off x="3977640" y="1371600"/>
-            <a:ext cx="3703320" cy="1956816"/>
+            <a:off x="3154680" y="1627632"/>
+            <a:ext cx="4069080" cy="1975104"/>
           </a:xfrm>
           <a:prstGeom prst="roundRect">
             <a:avLst>
-              <a:gd name="adj" fmla="val 2804"/>
+              <a:gd name="adj" fmla="val 2778"/>
             </a:avLst>
           </a:prstGeom>
           <a:solidFill>
@@ -15235,14 +16701,14 @@
       </p:sp>
       <p:sp>
         <p:nvSpPr>
-          <p:cNvPr id="8" name="Text 5"/>
-          <p:cNvSpPr txBox="1"/>
-          <p:nvPr/>
-        </p:nvSpPr>
-        <p:spPr>
-          <a:xfrm>
-            <a:off x="4233672" y="1554480"/>
-            <a:ext cx="3191256" cy="475488"/>
+          <p:cNvPr id="24" name="Text 21"/>
+          <p:cNvSpPr txBox="1"/>
+          <p:nvPr/>
+        </p:nvSpPr>
+        <p:spPr>
+          <a:xfrm>
+            <a:off x="3410712" y="1810512"/>
+            <a:ext cx="3557016" cy="475488"/>
           </a:xfrm>
           <a:prstGeom prst="rect">
             <a:avLst/>
@@ -15274,14 +16740,14 @@
       </p:sp>
       <p:sp>
         <p:nvSpPr>
-          <p:cNvPr id="9" name="Text 6"/>
-          <p:cNvSpPr txBox="1"/>
-          <p:nvPr/>
-        </p:nvSpPr>
-        <p:spPr>
-          <a:xfrm>
-            <a:off x="4233672" y="2084832"/>
-            <a:ext cx="3191256" cy="1060704"/>
+          <p:cNvPr id="25" name="Text 22"/>
+          <p:cNvSpPr txBox="1"/>
+          <p:nvPr/>
+        </p:nvSpPr>
+        <p:spPr>
+          <a:xfrm>
+            <a:off x="3410712" y="2340864"/>
+            <a:ext cx="3557016" cy="1078992"/>
           </a:xfrm>
           <a:prstGeom prst="rect">
             <a:avLst/>
@@ -15316,18 +16782,18 @@
       </p:sp>
       <p:sp>
         <p:nvSpPr>
-          <p:cNvPr id="10" name="Shape 7"/>
+          <p:cNvPr id="26" name="Shape 23"/>
           <p:cNvSpPr/>
           <p:nvPr/>
         </p:nvSpPr>
         <p:spPr>
           <a:xfrm>
-            <a:off x="7818120" y="1371600"/>
-            <a:ext cx="3703320" cy="1956816"/>
+            <a:off x="7452360" y="1627632"/>
+            <a:ext cx="4069080" cy="1975104"/>
           </a:xfrm>
           <a:prstGeom prst="roundRect">
             <a:avLst>
-              <a:gd name="adj" fmla="val 2804"/>
+              <a:gd name="adj" fmla="val 2778"/>
             </a:avLst>
           </a:prstGeom>
           <a:solidFill>
@@ -15338,14 +16804,14 @@
       </p:sp>
       <p:sp>
         <p:nvSpPr>
-          <p:cNvPr id="11" name="Text 8"/>
-          <p:cNvSpPr txBox="1"/>
-          <p:nvPr/>
-        </p:nvSpPr>
-        <p:spPr>
-          <a:xfrm>
-            <a:off x="8074152" y="1554480"/>
-            <a:ext cx="3191256" cy="475488"/>
+          <p:cNvPr id="27" name="Text 24"/>
+          <p:cNvSpPr txBox="1"/>
+          <p:nvPr/>
+        </p:nvSpPr>
+        <p:spPr>
+          <a:xfrm>
+            <a:off x="7708392" y="1810512"/>
+            <a:ext cx="3557016" cy="475488"/>
           </a:xfrm>
           <a:prstGeom prst="rect">
             <a:avLst/>
@@ -15377,14 +16843,14 @@
       </p:sp>
       <p:sp>
         <p:nvSpPr>
-          <p:cNvPr id="12" name="Text 9"/>
-          <p:cNvSpPr txBox="1"/>
-          <p:nvPr/>
-        </p:nvSpPr>
-        <p:spPr>
-          <a:xfrm>
-            <a:off x="8074152" y="2084832"/>
-            <a:ext cx="3191256" cy="1060704"/>
+          <p:cNvPr id="28" name="Text 25"/>
+          <p:cNvSpPr txBox="1"/>
+          <p:nvPr/>
+        </p:nvSpPr>
+        <p:spPr>
+          <a:xfrm>
+            <a:off x="7708392" y="2340864"/>
+            <a:ext cx="3557016" cy="1078992"/>
           </a:xfrm>
           <a:prstGeom prst="rect">
             <a:avLst/>
@@ -15419,18 +16885,18 @@
       </p:sp>
       <p:sp>
         <p:nvSpPr>
-          <p:cNvPr id="13" name="Shape 10"/>
+          <p:cNvPr id="29" name="Shape 26"/>
           <p:cNvSpPr/>
           <p:nvPr/>
         </p:nvSpPr>
         <p:spPr>
           <a:xfrm>
-            <a:off x="3977640" y="3511296"/>
-            <a:ext cx="3703320" cy="1956816"/>
+            <a:off x="3154680" y="3749040"/>
+            <a:ext cx="4069080" cy="1975104"/>
           </a:xfrm>
           <a:prstGeom prst="roundRect">
             <a:avLst>
-              <a:gd name="adj" fmla="val 2804"/>
+              <a:gd name="adj" fmla="val 2778"/>
             </a:avLst>
           </a:prstGeom>
           <a:solidFill>
@@ -15441,14 +16907,14 @@
       </p:sp>
       <p:sp>
         <p:nvSpPr>
-          <p:cNvPr id="14" name="Text 11"/>
-          <p:cNvSpPr txBox="1"/>
-          <p:nvPr/>
-        </p:nvSpPr>
-        <p:spPr>
-          <a:xfrm>
-            <a:off x="4233672" y="3694176"/>
-            <a:ext cx="3191256" cy="475488"/>
+          <p:cNvPr id="30" name="Text 27"/>
+          <p:cNvSpPr txBox="1"/>
+          <p:nvPr/>
+        </p:nvSpPr>
+        <p:spPr>
+          <a:xfrm>
+            <a:off x="3410712" y="3931920"/>
+            <a:ext cx="3557016" cy="475488"/>
           </a:xfrm>
           <a:prstGeom prst="rect">
             <a:avLst/>
@@ -15480,14 +16946,14 @@
       </p:sp>
       <p:sp>
         <p:nvSpPr>
-          <p:cNvPr id="15" name="Text 12"/>
-          <p:cNvSpPr txBox="1"/>
-          <p:nvPr/>
-        </p:nvSpPr>
-        <p:spPr>
-          <a:xfrm>
-            <a:off x="4233672" y="4224528"/>
-            <a:ext cx="3191256" cy="1060704"/>
+          <p:cNvPr id="31" name="Text 28"/>
+          <p:cNvSpPr txBox="1"/>
+          <p:nvPr/>
+        </p:nvSpPr>
+        <p:spPr>
+          <a:xfrm>
+            <a:off x="3410712" y="4462272"/>
+            <a:ext cx="3557016" cy="1078992"/>
           </a:xfrm>
           <a:prstGeom prst="rect">
             <a:avLst/>
@@ -15522,18 +16988,18 @@
       </p:sp>
       <p:sp>
         <p:nvSpPr>
-          <p:cNvPr id="16" name="Shape 13"/>
+          <p:cNvPr id="32" name="Shape 29"/>
           <p:cNvSpPr/>
           <p:nvPr/>
         </p:nvSpPr>
         <p:spPr>
           <a:xfrm>
-            <a:off x="7818120" y="3511296"/>
-            <a:ext cx="3703320" cy="1956816"/>
+            <a:off x="7452360" y="3749040"/>
+            <a:ext cx="4069080" cy="1975104"/>
           </a:xfrm>
           <a:prstGeom prst="roundRect">
             <a:avLst>
-              <a:gd name="adj" fmla="val 2804"/>
+              <a:gd name="adj" fmla="val 2778"/>
             </a:avLst>
           </a:prstGeom>
           <a:solidFill>
@@ -15544,14 +17010,14 @@
       </p:sp>
       <p:sp>
         <p:nvSpPr>
-          <p:cNvPr id="17" name="Text 14"/>
-          <p:cNvSpPr txBox="1"/>
-          <p:nvPr/>
-        </p:nvSpPr>
-        <p:spPr>
-          <a:xfrm>
-            <a:off x="8074152" y="3694176"/>
-            <a:ext cx="3191256" cy="475488"/>
+          <p:cNvPr id="33" name="Text 30"/>
+          <p:cNvSpPr txBox="1"/>
+          <p:nvPr/>
+        </p:nvSpPr>
+        <p:spPr>
+          <a:xfrm>
+            <a:off x="7708392" y="3931920"/>
+            <a:ext cx="3557016" cy="475488"/>
           </a:xfrm>
           <a:prstGeom prst="rect">
             <a:avLst/>
@@ -15583,14 +17049,14 @@
       </p:sp>
       <p:sp>
         <p:nvSpPr>
-          <p:cNvPr id="18" name="Text 15"/>
-          <p:cNvSpPr txBox="1"/>
-          <p:nvPr/>
-        </p:nvSpPr>
-        <p:spPr>
-          <a:xfrm>
-            <a:off x="8074152" y="4224528"/>
-            <a:ext cx="3191256" cy="1060704"/>
+          <p:cNvPr id="34" name="Text 31"/>
+          <p:cNvSpPr txBox="1"/>
+          <p:nvPr/>
+        </p:nvSpPr>
+        <p:spPr>
+          <a:xfrm>
+            <a:off x="7708392" y="4462272"/>
+            <a:ext cx="3557016" cy="1078992"/>
           </a:xfrm>
           <a:prstGeom prst="rect">
             <a:avLst/>
@@ -15625,7 +17091,7 @@
       </p:sp>
       <p:sp>
         <p:nvSpPr>
-          <p:cNvPr id="19" name="Text 16"/>
+          <p:cNvPr id="35" name="Text 32"/>
           <p:cNvSpPr txBox="1"/>
           <p:nvPr/>
         </p:nvSpPr>
@@ -15794,14 +17260,36 @@
       </p:sp>
       <p:sp>
         <p:nvSpPr>
-          <p:cNvPr id="5" name="Text 3"/>
-          <p:cNvSpPr txBox="1"/>
-          <p:nvPr/>
-        </p:nvSpPr>
-        <p:spPr>
-          <a:xfrm>
-            <a:off x="1188720" y="969264"/>
-            <a:ext cx="10332720" cy="237744"/>
+          <p:cNvPr id="5" name="Shape 3"/>
+          <p:cNvSpPr/>
+          <p:nvPr/>
+        </p:nvSpPr>
+        <p:spPr>
+          <a:xfrm>
+            <a:off x="1188720" y="987552"/>
+            <a:ext cx="1600200" cy="292608"/>
+          </a:xfrm>
+          <a:prstGeom prst="roundRect">
+            <a:avLst>
+              <a:gd name="adj" fmla="val 31250"/>
+            </a:avLst>
+          </a:prstGeom>
+          <a:solidFill>
+            <a:srgbClr val="D8DEE4"/>
+          </a:solidFill>
+          <a:ln/>
+        </p:spPr>
+      </p:sp>
+      <p:sp>
+        <p:nvSpPr>
+          <p:cNvPr id="6" name="Text 4"/>
+          <p:cNvSpPr txBox="1"/>
+          <p:nvPr/>
+        </p:nvSpPr>
+        <p:spPr>
+          <a:xfrm>
+            <a:off x="1188720" y="987552"/>
+            <a:ext cx="1600200" cy="292608"/>
           </a:xfrm>
           <a:prstGeom prst="rect">
             <a:avLst/>
@@ -15813,19 +17301,519 @@
           <a:bodyPr wrap="square" lIns="0" tIns="0" rIns="0" bIns="0" rtlCol="0" anchor="ctr"/>
           <a:lstStyle/>
           <a:p>
-            <a:pPr indent="0" marL="0">
-              <a:buNone/>
-            </a:pPr>
-            <a:r>
-              <a:rPr lang="en-US" sz="1050" b="1" spc="140" kern="0" dirty="0">
-                <a:solidFill>
-                  <a:srgbClr val="6E7A88"/>
+            <a:pPr algn="ctr" indent="0" marL="0">
+              <a:buNone/>
+            </a:pPr>
+            <a:r>
+              <a:rPr lang="en-US" sz="1050" dirty="0">
+                <a:solidFill>
+                  <a:srgbClr val="5A6672"/>
                 </a:solidFill>
                 <a:latin typeface="Calibri" pitchFamily="34" charset="0"/>
                 <a:ea typeface="Calibri" pitchFamily="34" charset="-122"/>
                 <a:cs typeface="Calibri" pitchFamily="34" charset="-120"/>
               </a:rPr>
-              <a:t>ШАГ 4 ИЗ 6 · КЛИЕНТСКИЙ ПУТЬ</a:t>
+              <a:t>1 · Триггер</a:t>
+            </a:r>
+            <a:endParaRPr lang="en-US" sz="1050" dirty="0"/>
+          </a:p>
+        </p:txBody>
+      </p:sp>
+      <p:sp>
+        <p:nvSpPr>
+          <p:cNvPr id="7" name="Text 5"/>
+          <p:cNvSpPr txBox="1"/>
+          <p:nvPr/>
+        </p:nvSpPr>
+        <p:spPr>
+          <a:xfrm>
+            <a:off x="2788920" y="987552"/>
+            <a:ext cx="146304" cy="292608"/>
+          </a:xfrm>
+          <a:prstGeom prst="rect">
+            <a:avLst/>
+          </a:prstGeom>
+          <a:noFill/>
+          <a:ln/>
+        </p:spPr>
+        <p:txBody>
+          <a:bodyPr wrap="square" lIns="0" tIns="0" rIns="0" bIns="0" rtlCol="0" anchor="ctr"/>
+          <a:lstStyle/>
+          <a:p>
+            <a:pPr algn="ctr" indent="0" marL="0">
+              <a:buNone/>
+            </a:pPr>
+            <a:r>
+              <a:rPr lang="en-US" sz="1200" dirty="0">
+                <a:solidFill>
+                  <a:srgbClr val="B6BEC7"/>
+                </a:solidFill>
+                <a:latin typeface="Calibri" pitchFamily="34" charset="0"/>
+                <a:ea typeface="Calibri" pitchFamily="34" charset="-122"/>
+                <a:cs typeface="Calibri" pitchFamily="34" charset="-120"/>
+              </a:rPr>
+              <a:t>›</a:t>
+            </a:r>
+            <a:endParaRPr lang="en-US" sz="1200" dirty="0"/>
+          </a:p>
+        </p:txBody>
+      </p:sp>
+      <p:sp>
+        <p:nvSpPr>
+          <p:cNvPr id="8" name="Shape 6"/>
+          <p:cNvSpPr/>
+          <p:nvPr/>
+        </p:nvSpPr>
+        <p:spPr>
+          <a:xfrm>
+            <a:off x="2935224" y="987552"/>
+            <a:ext cx="1600200" cy="292608"/>
+          </a:xfrm>
+          <a:prstGeom prst="roundRect">
+            <a:avLst>
+              <a:gd name="adj" fmla="val 31250"/>
+            </a:avLst>
+          </a:prstGeom>
+          <a:solidFill>
+            <a:srgbClr val="D8DEE4"/>
+          </a:solidFill>
+          <a:ln/>
+        </p:spPr>
+      </p:sp>
+      <p:sp>
+        <p:nvSpPr>
+          <p:cNvPr id="9" name="Text 7"/>
+          <p:cNvSpPr txBox="1"/>
+          <p:nvPr/>
+        </p:nvSpPr>
+        <p:spPr>
+          <a:xfrm>
+            <a:off x="2935224" y="987552"/>
+            <a:ext cx="1600200" cy="292608"/>
+          </a:xfrm>
+          <a:prstGeom prst="rect">
+            <a:avLst/>
+          </a:prstGeom>
+          <a:noFill/>
+          <a:ln/>
+        </p:spPr>
+        <p:txBody>
+          <a:bodyPr wrap="square" lIns="0" tIns="0" rIns="0" bIns="0" rtlCol="0" anchor="ctr"/>
+          <a:lstStyle/>
+          <a:p>
+            <a:pPr algn="ctr" indent="0" marL="0">
+              <a:buNone/>
+            </a:pPr>
+            <a:r>
+              <a:rPr lang="en-US" sz="1050" dirty="0">
+                <a:solidFill>
+                  <a:srgbClr val="5A6672"/>
+                </a:solidFill>
+                <a:latin typeface="Calibri" pitchFamily="34" charset="0"/>
+                <a:ea typeface="Calibri" pitchFamily="34" charset="-122"/>
+                <a:cs typeface="Calibri" pitchFamily="34" charset="-120"/>
+              </a:rPr>
+              <a:t>2 · Фильтр</a:t>
+            </a:r>
+            <a:endParaRPr lang="en-US" sz="1050" dirty="0"/>
+          </a:p>
+        </p:txBody>
+      </p:sp>
+      <p:sp>
+        <p:nvSpPr>
+          <p:cNvPr id="10" name="Text 8"/>
+          <p:cNvSpPr txBox="1"/>
+          <p:nvPr/>
+        </p:nvSpPr>
+        <p:spPr>
+          <a:xfrm>
+            <a:off x="4535424" y="987552"/>
+            <a:ext cx="146304" cy="292608"/>
+          </a:xfrm>
+          <a:prstGeom prst="rect">
+            <a:avLst/>
+          </a:prstGeom>
+          <a:noFill/>
+          <a:ln/>
+        </p:spPr>
+        <p:txBody>
+          <a:bodyPr wrap="square" lIns="0" tIns="0" rIns="0" bIns="0" rtlCol="0" anchor="ctr"/>
+          <a:lstStyle/>
+          <a:p>
+            <a:pPr algn="ctr" indent="0" marL="0">
+              <a:buNone/>
+            </a:pPr>
+            <a:r>
+              <a:rPr lang="en-US" sz="1200" dirty="0">
+                <a:solidFill>
+                  <a:srgbClr val="B6BEC7"/>
+                </a:solidFill>
+                <a:latin typeface="Calibri" pitchFamily="34" charset="0"/>
+                <a:ea typeface="Calibri" pitchFamily="34" charset="-122"/>
+                <a:cs typeface="Calibri" pitchFamily="34" charset="-120"/>
+              </a:rPr>
+              <a:t>›</a:t>
+            </a:r>
+            <a:endParaRPr lang="en-US" sz="1200" dirty="0"/>
+          </a:p>
+        </p:txBody>
+      </p:sp>
+      <p:sp>
+        <p:nvSpPr>
+          <p:cNvPr id="11" name="Shape 9"/>
+          <p:cNvSpPr/>
+          <p:nvPr/>
+        </p:nvSpPr>
+        <p:spPr>
+          <a:xfrm>
+            <a:off x="4681728" y="987552"/>
+            <a:ext cx="1600200" cy="292608"/>
+          </a:xfrm>
+          <a:prstGeom prst="roundRect">
+            <a:avLst>
+              <a:gd name="adj" fmla="val 31250"/>
+            </a:avLst>
+          </a:prstGeom>
+          <a:solidFill>
+            <a:srgbClr val="D8DEE4"/>
+          </a:solidFill>
+          <a:ln/>
+        </p:spPr>
+      </p:sp>
+      <p:sp>
+        <p:nvSpPr>
+          <p:cNvPr id="12" name="Text 10"/>
+          <p:cNvSpPr txBox="1"/>
+          <p:nvPr/>
+        </p:nvSpPr>
+        <p:spPr>
+          <a:xfrm>
+            <a:off x="4681728" y="987552"/>
+            <a:ext cx="1600200" cy="292608"/>
+          </a:xfrm>
+          <a:prstGeom prst="rect">
+            <a:avLst/>
+          </a:prstGeom>
+          <a:noFill/>
+          <a:ln/>
+        </p:spPr>
+        <p:txBody>
+          <a:bodyPr wrap="square" lIns="0" tIns="0" rIns="0" bIns="0" rtlCol="0" anchor="ctr"/>
+          <a:lstStyle/>
+          <a:p>
+            <a:pPr algn="ctr" indent="0" marL="0">
+              <a:buNone/>
+            </a:pPr>
+            <a:r>
+              <a:rPr lang="en-US" sz="1050" dirty="0">
+                <a:solidFill>
+                  <a:srgbClr val="5A6672"/>
+                </a:solidFill>
+                <a:latin typeface="Calibri" pitchFamily="34" charset="0"/>
+                <a:ea typeface="Calibri" pitchFamily="34" charset="-122"/>
+                <a:cs typeface="Calibri" pitchFamily="34" charset="-120"/>
+              </a:rPr>
+              <a:t>3 · Пуш</a:t>
+            </a:r>
+            <a:endParaRPr lang="en-US" sz="1050" dirty="0"/>
+          </a:p>
+        </p:txBody>
+      </p:sp>
+      <p:sp>
+        <p:nvSpPr>
+          <p:cNvPr id="13" name="Text 11"/>
+          <p:cNvSpPr txBox="1"/>
+          <p:nvPr/>
+        </p:nvSpPr>
+        <p:spPr>
+          <a:xfrm>
+            <a:off x="6281928" y="987552"/>
+            <a:ext cx="146304" cy="292608"/>
+          </a:xfrm>
+          <a:prstGeom prst="rect">
+            <a:avLst/>
+          </a:prstGeom>
+          <a:noFill/>
+          <a:ln/>
+        </p:spPr>
+        <p:txBody>
+          <a:bodyPr wrap="square" lIns="0" tIns="0" rIns="0" bIns="0" rtlCol="0" anchor="ctr"/>
+          <a:lstStyle/>
+          <a:p>
+            <a:pPr algn="ctr" indent="0" marL="0">
+              <a:buNone/>
+            </a:pPr>
+            <a:r>
+              <a:rPr lang="en-US" sz="1200" dirty="0">
+                <a:solidFill>
+                  <a:srgbClr val="B6BEC7"/>
+                </a:solidFill>
+                <a:latin typeface="Calibri" pitchFamily="34" charset="0"/>
+                <a:ea typeface="Calibri" pitchFamily="34" charset="-122"/>
+                <a:cs typeface="Calibri" pitchFamily="34" charset="-120"/>
+              </a:rPr>
+              <a:t>›</a:t>
+            </a:r>
+            <a:endParaRPr lang="en-US" sz="1200" dirty="0"/>
+          </a:p>
+        </p:txBody>
+      </p:sp>
+      <p:sp>
+        <p:nvSpPr>
+          <p:cNvPr id="14" name="Shape 12"/>
+          <p:cNvSpPr/>
+          <p:nvPr/>
+        </p:nvSpPr>
+        <p:spPr>
+          <a:xfrm>
+            <a:off x="6428232" y="987552"/>
+            <a:ext cx="1600200" cy="292608"/>
+          </a:xfrm>
+          <a:prstGeom prst="roundRect">
+            <a:avLst>
+              <a:gd name="adj" fmla="val 31250"/>
+            </a:avLst>
+          </a:prstGeom>
+          <a:solidFill>
+            <a:srgbClr val="9C5B12"/>
+          </a:solidFill>
+          <a:ln/>
+        </p:spPr>
+      </p:sp>
+      <p:sp>
+        <p:nvSpPr>
+          <p:cNvPr id="15" name="Text 13"/>
+          <p:cNvSpPr txBox="1"/>
+          <p:nvPr/>
+        </p:nvSpPr>
+        <p:spPr>
+          <a:xfrm>
+            <a:off x="6428232" y="987552"/>
+            <a:ext cx="1600200" cy="292608"/>
+          </a:xfrm>
+          <a:prstGeom prst="rect">
+            <a:avLst/>
+          </a:prstGeom>
+          <a:noFill/>
+          <a:ln/>
+        </p:spPr>
+        <p:txBody>
+          <a:bodyPr wrap="square" lIns="0" tIns="0" rIns="0" bIns="0" rtlCol="0" anchor="ctr"/>
+          <a:lstStyle/>
+          <a:p>
+            <a:pPr algn="ctr" indent="0" marL="0">
+              <a:buNone/>
+            </a:pPr>
+            <a:r>
+              <a:rPr lang="en-US" sz="1050" b="1" dirty="0">
+                <a:solidFill>
+                  <a:srgbClr val="FFFFFF"/>
+                </a:solidFill>
+                <a:latin typeface="Calibri" pitchFamily="34" charset="0"/>
+                <a:ea typeface="Calibri" pitchFamily="34" charset="-122"/>
+                <a:cs typeface="Calibri" pitchFamily="34" charset="-120"/>
+              </a:rPr>
+              <a:t>4 · Экран перевода</a:t>
+            </a:r>
+            <a:endParaRPr lang="en-US" sz="1050" dirty="0"/>
+          </a:p>
+        </p:txBody>
+      </p:sp>
+      <p:sp>
+        <p:nvSpPr>
+          <p:cNvPr id="16" name="Text 14"/>
+          <p:cNvSpPr txBox="1"/>
+          <p:nvPr/>
+        </p:nvSpPr>
+        <p:spPr>
+          <a:xfrm>
+            <a:off x="8028432" y="987552"/>
+            <a:ext cx="146304" cy="292608"/>
+          </a:xfrm>
+          <a:prstGeom prst="rect">
+            <a:avLst/>
+          </a:prstGeom>
+          <a:noFill/>
+          <a:ln/>
+        </p:spPr>
+        <p:txBody>
+          <a:bodyPr wrap="square" lIns="0" tIns="0" rIns="0" bIns="0" rtlCol="0" anchor="ctr"/>
+          <a:lstStyle/>
+          <a:p>
+            <a:pPr algn="ctr" indent="0" marL="0">
+              <a:buNone/>
+            </a:pPr>
+            <a:r>
+              <a:rPr lang="en-US" sz="1200" dirty="0">
+                <a:solidFill>
+                  <a:srgbClr val="B6BEC7"/>
+                </a:solidFill>
+                <a:latin typeface="Calibri" pitchFamily="34" charset="0"/>
+                <a:ea typeface="Calibri" pitchFamily="34" charset="-122"/>
+                <a:cs typeface="Calibri" pitchFamily="34" charset="-120"/>
+              </a:rPr>
+              <a:t>›</a:t>
+            </a:r>
+            <a:endParaRPr lang="en-US" sz="1200" dirty="0"/>
+          </a:p>
+        </p:txBody>
+      </p:sp>
+      <p:sp>
+        <p:nvSpPr>
+          <p:cNvPr id="17" name="Shape 15"/>
+          <p:cNvSpPr/>
+          <p:nvPr/>
+        </p:nvSpPr>
+        <p:spPr>
+          <a:xfrm>
+            <a:off x="8174736" y="987552"/>
+            <a:ext cx="1600200" cy="292608"/>
+          </a:xfrm>
+          <a:prstGeom prst="roundRect">
+            <a:avLst>
+              <a:gd name="adj" fmla="val 31250"/>
+            </a:avLst>
+          </a:prstGeom>
+          <a:solidFill>
+            <a:srgbClr val="F4F6F8"/>
+          </a:solidFill>
+          <a:ln/>
+        </p:spPr>
+      </p:sp>
+      <p:sp>
+        <p:nvSpPr>
+          <p:cNvPr id="18" name="Text 16"/>
+          <p:cNvSpPr txBox="1"/>
+          <p:nvPr/>
+        </p:nvSpPr>
+        <p:spPr>
+          <a:xfrm>
+            <a:off x="8174736" y="987552"/>
+            <a:ext cx="1600200" cy="292608"/>
+          </a:xfrm>
+          <a:prstGeom prst="rect">
+            <a:avLst/>
+          </a:prstGeom>
+          <a:noFill/>
+          <a:ln/>
+        </p:spPr>
+        <p:txBody>
+          <a:bodyPr wrap="square" lIns="0" tIns="0" rIns="0" bIns="0" rtlCol="0" anchor="ctr"/>
+          <a:lstStyle/>
+          <a:p>
+            <a:pPr algn="ctr" indent="0" marL="0">
+              <a:buNone/>
+            </a:pPr>
+            <a:r>
+              <a:rPr lang="en-US" sz="1050" dirty="0">
+                <a:solidFill>
+                  <a:srgbClr val="97A1AC"/>
+                </a:solidFill>
+                <a:latin typeface="Calibri" pitchFamily="34" charset="0"/>
+                <a:ea typeface="Calibri" pitchFamily="34" charset="-122"/>
+                <a:cs typeface="Calibri" pitchFamily="34" charset="-120"/>
+              </a:rPr>
+              <a:t>5 · Решение</a:t>
+            </a:r>
+            <a:endParaRPr lang="en-US" sz="1050" dirty="0"/>
+          </a:p>
+        </p:txBody>
+      </p:sp>
+      <p:sp>
+        <p:nvSpPr>
+          <p:cNvPr id="19" name="Text 17"/>
+          <p:cNvSpPr txBox="1"/>
+          <p:nvPr/>
+        </p:nvSpPr>
+        <p:spPr>
+          <a:xfrm>
+            <a:off x="9774936" y="987552"/>
+            <a:ext cx="146304" cy="292608"/>
+          </a:xfrm>
+          <a:prstGeom prst="rect">
+            <a:avLst/>
+          </a:prstGeom>
+          <a:noFill/>
+          <a:ln/>
+        </p:spPr>
+        <p:txBody>
+          <a:bodyPr wrap="square" lIns="0" tIns="0" rIns="0" bIns="0" rtlCol="0" anchor="ctr"/>
+          <a:lstStyle/>
+          <a:p>
+            <a:pPr algn="ctr" indent="0" marL="0">
+              <a:buNone/>
+            </a:pPr>
+            <a:r>
+              <a:rPr lang="en-US" sz="1200" dirty="0">
+                <a:solidFill>
+                  <a:srgbClr val="B6BEC7"/>
+                </a:solidFill>
+                <a:latin typeface="Calibri" pitchFamily="34" charset="0"/>
+                <a:ea typeface="Calibri" pitchFamily="34" charset="-122"/>
+                <a:cs typeface="Calibri" pitchFamily="34" charset="-120"/>
+              </a:rPr>
+              <a:t>›</a:t>
+            </a:r>
+            <a:endParaRPr lang="en-US" sz="1200" dirty="0"/>
+          </a:p>
+        </p:txBody>
+      </p:sp>
+      <p:sp>
+        <p:nvSpPr>
+          <p:cNvPr id="20" name="Shape 18"/>
+          <p:cNvSpPr/>
+          <p:nvPr/>
+        </p:nvSpPr>
+        <p:spPr>
+          <a:xfrm>
+            <a:off x="9921240" y="987552"/>
+            <a:ext cx="1600200" cy="292608"/>
+          </a:xfrm>
+          <a:prstGeom prst="roundRect">
+            <a:avLst>
+              <a:gd name="adj" fmla="val 31250"/>
+            </a:avLst>
+          </a:prstGeom>
+          <a:solidFill>
+            <a:srgbClr val="F4F6F8"/>
+          </a:solidFill>
+          <a:ln/>
+        </p:spPr>
+      </p:sp>
+      <p:sp>
+        <p:nvSpPr>
+          <p:cNvPr id="21" name="Text 19"/>
+          <p:cNvSpPr txBox="1"/>
+          <p:nvPr/>
+        </p:nvSpPr>
+        <p:spPr>
+          <a:xfrm>
+            <a:off x="9921240" y="987552"/>
+            <a:ext cx="1600200" cy="292608"/>
+          </a:xfrm>
+          <a:prstGeom prst="rect">
+            <a:avLst/>
+          </a:prstGeom>
+          <a:noFill/>
+          <a:ln/>
+        </p:spPr>
+        <p:txBody>
+          <a:bodyPr wrap="square" lIns="0" tIns="0" rIns="0" bIns="0" rtlCol="0" anchor="ctr"/>
+          <a:lstStyle/>
+          <a:p>
+            <a:pPr algn="ctr" indent="0" marL="0">
+              <a:buNone/>
+            </a:pPr>
+            <a:r>
+              <a:rPr lang="en-US" sz="1050" dirty="0">
+                <a:solidFill>
+                  <a:srgbClr val="97A1AC"/>
+                </a:solidFill>
+                <a:latin typeface="Calibri" pitchFamily="34" charset="0"/>
+                <a:ea typeface="Calibri" pitchFamily="34" charset="-122"/>
+                <a:cs typeface="Calibri" pitchFamily="34" charset="-120"/>
+              </a:rPr>
+              <a:t>6 · Удержание</a:t>
             </a:r>
             <a:endParaRPr lang="en-US" sz="1050" dirty="0"/>
           </a:p>
@@ -15833,7 +17821,7 @@
       </p:sp>
       <p:pic>
         <p:nvPicPr>
-          <p:cNvPr id="6" name="Image 0" descr="submission/figures/ekran-04.png">    </p:cNvPr>
+          <p:cNvPr id="22" name="Image 0" descr="submission/figures/ekran-04.png">    </p:cNvPr>
           <p:cNvPicPr>
             <a:picLocks noChangeAspect="1"/>
           </p:cNvPicPr>
@@ -15847,8 +17835,8 @@
         </p:blipFill>
         <p:spPr>
           <a:xfrm>
-            <a:off x="640080" y="1371600"/>
-            <a:ext cx="2560320" cy="4762195"/>
+            <a:off x="640080" y="1627632"/>
+            <a:ext cx="2194560" cy="4081882"/>
           </a:xfrm>
           <a:prstGeom prst="rect">
             <a:avLst/>
@@ -15857,14 +17845,14 @@
       </p:pic>
       <p:sp>
         <p:nvSpPr>
-          <p:cNvPr id="7" name="Shape 4"/>
+          <p:cNvPr id="23" name="Shape 20"/>
           <p:cNvSpPr/>
           <p:nvPr/>
         </p:nvSpPr>
         <p:spPr>
           <a:xfrm>
-            <a:off x="3474720" y="1371600"/>
-            <a:ext cx="8046720" cy="1426464"/>
+            <a:off x="3154680" y="1627632"/>
+            <a:ext cx="8366760" cy="1426464"/>
           </a:xfrm>
           <a:prstGeom prst="roundRect">
             <a:avLst>
@@ -15879,14 +17867,14 @@
       </p:sp>
       <p:sp>
         <p:nvSpPr>
-          <p:cNvPr id="8" name="Text 5"/>
-          <p:cNvSpPr txBox="1"/>
-          <p:nvPr/>
-        </p:nvSpPr>
-        <p:spPr>
-          <a:xfrm>
-            <a:off x="3730752" y="1554480"/>
-            <a:ext cx="7534656" cy="475488"/>
+          <p:cNvPr id="24" name="Text 21"/>
+          <p:cNvSpPr txBox="1"/>
+          <p:nvPr/>
+        </p:nvSpPr>
+        <p:spPr>
+          <a:xfrm>
+            <a:off x="3410712" y="1810512"/>
+            <a:ext cx="7854696" cy="475488"/>
           </a:xfrm>
           <a:prstGeom prst="rect">
             <a:avLst/>
@@ -15918,14 +17906,14 @@
       </p:sp>
       <p:sp>
         <p:nvSpPr>
-          <p:cNvPr id="9" name="Text 6"/>
-          <p:cNvSpPr txBox="1"/>
-          <p:nvPr/>
-        </p:nvSpPr>
-        <p:spPr>
-          <a:xfrm>
-            <a:off x="3730752" y="2084832"/>
-            <a:ext cx="7534656" cy="530352"/>
+          <p:cNvPr id="25" name="Text 22"/>
+          <p:cNvSpPr txBox="1"/>
+          <p:nvPr/>
+        </p:nvSpPr>
+        <p:spPr>
+          <a:xfrm>
+            <a:off x="3410712" y="2340864"/>
+            <a:ext cx="7854696" cy="530352"/>
           </a:xfrm>
           <a:prstGeom prst="rect">
             <a:avLst/>
@@ -15960,18 +17948,18 @@
       </p:sp>
       <p:sp>
         <p:nvSpPr>
-          <p:cNvPr id="10" name="Shape 7"/>
+          <p:cNvPr id="26" name="Shape 23"/>
           <p:cNvSpPr/>
           <p:nvPr/>
         </p:nvSpPr>
         <p:spPr>
           <a:xfrm>
-            <a:off x="3474720" y="2962656"/>
-            <a:ext cx="8046720" cy="1627632"/>
+            <a:off x="3154680" y="3200400"/>
+            <a:ext cx="8366760" cy="1481328"/>
           </a:xfrm>
           <a:prstGeom prst="roundRect">
             <a:avLst>
-              <a:gd name="adj" fmla="val 3371"/>
+              <a:gd name="adj" fmla="val 3704"/>
             </a:avLst>
           </a:prstGeom>
           <a:solidFill>
@@ -15982,14 +17970,14 @@
       </p:sp>
       <p:sp>
         <p:nvSpPr>
-          <p:cNvPr id="11" name="Text 8"/>
-          <p:cNvSpPr txBox="1"/>
-          <p:nvPr/>
-        </p:nvSpPr>
-        <p:spPr>
-          <a:xfrm>
-            <a:off x="3730752" y="3145536"/>
-            <a:ext cx="7534656" cy="475488"/>
+          <p:cNvPr id="27" name="Text 24"/>
+          <p:cNvSpPr txBox="1"/>
+          <p:nvPr/>
+        </p:nvSpPr>
+        <p:spPr>
+          <a:xfrm>
+            <a:off x="3410712" y="3383280"/>
+            <a:ext cx="7854696" cy="475488"/>
           </a:xfrm>
           <a:prstGeom prst="rect">
             <a:avLst/>
@@ -16021,14 +18009,14 @@
       </p:sp>
       <p:sp>
         <p:nvSpPr>
-          <p:cNvPr id="12" name="Text 9"/>
-          <p:cNvSpPr txBox="1"/>
-          <p:nvPr/>
-        </p:nvSpPr>
-        <p:spPr>
-          <a:xfrm>
-            <a:off x="3730752" y="3675888"/>
-            <a:ext cx="7534656" cy="731520"/>
+          <p:cNvPr id="28" name="Text 25"/>
+          <p:cNvSpPr txBox="1"/>
+          <p:nvPr/>
+        </p:nvSpPr>
+        <p:spPr>
+          <a:xfrm>
+            <a:off x="3410712" y="3913632"/>
+            <a:ext cx="7854696" cy="585216"/>
           </a:xfrm>
           <a:prstGeom prst="rect">
             <a:avLst/>
@@ -16063,14 +18051,14 @@
       </p:sp>
       <p:sp>
         <p:nvSpPr>
-          <p:cNvPr id="13" name="Shape 10"/>
+          <p:cNvPr id="29" name="Shape 26"/>
           <p:cNvSpPr/>
           <p:nvPr/>
         </p:nvSpPr>
         <p:spPr>
           <a:xfrm>
-            <a:off x="3474720" y="4754880"/>
-            <a:ext cx="8046720" cy="1426464"/>
+            <a:off x="3154680" y="4828032"/>
+            <a:ext cx="8366760" cy="1426464"/>
           </a:xfrm>
           <a:prstGeom prst="roundRect">
             <a:avLst>
@@ -16085,14 +18073,14 @@
       </p:sp>
       <p:sp>
         <p:nvSpPr>
-          <p:cNvPr id="14" name="Text 11"/>
-          <p:cNvSpPr txBox="1"/>
-          <p:nvPr/>
-        </p:nvSpPr>
-        <p:spPr>
-          <a:xfrm>
-            <a:off x="3730752" y="4937760"/>
-            <a:ext cx="7534656" cy="475488"/>
+          <p:cNvPr id="30" name="Text 27"/>
+          <p:cNvSpPr txBox="1"/>
+          <p:nvPr/>
+        </p:nvSpPr>
+        <p:spPr>
+          <a:xfrm>
+            <a:off x="3410712" y="5010912"/>
+            <a:ext cx="7854696" cy="475488"/>
           </a:xfrm>
           <a:prstGeom prst="rect">
             <a:avLst/>
@@ -16124,14 +18112,14 @@
       </p:sp>
       <p:sp>
         <p:nvSpPr>
-          <p:cNvPr id="15" name="Text 12"/>
-          <p:cNvSpPr txBox="1"/>
-          <p:nvPr/>
-        </p:nvSpPr>
-        <p:spPr>
-          <a:xfrm>
-            <a:off x="3730752" y="5468112"/>
-            <a:ext cx="7534656" cy="530352"/>
+          <p:cNvPr id="31" name="Text 28"/>
+          <p:cNvSpPr txBox="1"/>
+          <p:nvPr/>
+        </p:nvSpPr>
+        <p:spPr>
+          <a:xfrm>
+            <a:off x="3410712" y="5541264"/>
+            <a:ext cx="7854696" cy="530352"/>
           </a:xfrm>
           <a:prstGeom prst="rect">
             <a:avLst/>
@@ -16296,14 +18284,36 @@
       </p:sp>
       <p:sp>
         <p:nvSpPr>
-          <p:cNvPr id="5" name="Text 3"/>
-          <p:cNvSpPr txBox="1"/>
-          <p:nvPr/>
-        </p:nvSpPr>
-        <p:spPr>
-          <a:xfrm>
-            <a:off x="1188720" y="969264"/>
-            <a:ext cx="10332720" cy="237744"/>
+          <p:cNvPr id="5" name="Shape 3"/>
+          <p:cNvSpPr/>
+          <p:nvPr/>
+        </p:nvSpPr>
+        <p:spPr>
+          <a:xfrm>
+            <a:off x="1188720" y="987552"/>
+            <a:ext cx="1600200" cy="292608"/>
+          </a:xfrm>
+          <a:prstGeom prst="roundRect">
+            <a:avLst>
+              <a:gd name="adj" fmla="val 31250"/>
+            </a:avLst>
+          </a:prstGeom>
+          <a:solidFill>
+            <a:srgbClr val="D8DEE4"/>
+          </a:solidFill>
+          <a:ln/>
+        </p:spPr>
+      </p:sp>
+      <p:sp>
+        <p:nvSpPr>
+          <p:cNvPr id="6" name="Text 4"/>
+          <p:cNvSpPr txBox="1"/>
+          <p:nvPr/>
+        </p:nvSpPr>
+        <p:spPr>
+          <a:xfrm>
+            <a:off x="1188720" y="987552"/>
+            <a:ext cx="1600200" cy="292608"/>
           </a:xfrm>
           <a:prstGeom prst="rect">
             <a:avLst/>
@@ -16315,19 +18325,519 @@
           <a:bodyPr wrap="square" lIns="0" tIns="0" rIns="0" bIns="0" rtlCol="0" anchor="ctr"/>
           <a:lstStyle/>
           <a:p>
-            <a:pPr indent="0" marL="0">
-              <a:buNone/>
-            </a:pPr>
-            <a:r>
-              <a:rPr lang="en-US" sz="1050" b="1" spc="140" kern="0" dirty="0">
-                <a:solidFill>
-                  <a:srgbClr val="6E7A88"/>
+            <a:pPr algn="ctr" indent="0" marL="0">
+              <a:buNone/>
+            </a:pPr>
+            <a:r>
+              <a:rPr lang="en-US" sz="1050" dirty="0">
+                <a:solidFill>
+                  <a:srgbClr val="5A6672"/>
                 </a:solidFill>
                 <a:latin typeface="Calibri" pitchFamily="34" charset="0"/>
                 <a:ea typeface="Calibri" pitchFamily="34" charset="-122"/>
                 <a:cs typeface="Calibri" pitchFamily="34" charset="-120"/>
               </a:rPr>
-              <a:t>ШАГ 5 ИЗ 6 · КЛИЕНТСКИЙ ПУТЬ</a:t>
+              <a:t>1 · Триггер</a:t>
+            </a:r>
+            <a:endParaRPr lang="en-US" sz="1050" dirty="0"/>
+          </a:p>
+        </p:txBody>
+      </p:sp>
+      <p:sp>
+        <p:nvSpPr>
+          <p:cNvPr id="7" name="Text 5"/>
+          <p:cNvSpPr txBox="1"/>
+          <p:nvPr/>
+        </p:nvSpPr>
+        <p:spPr>
+          <a:xfrm>
+            <a:off x="2788920" y="987552"/>
+            <a:ext cx="146304" cy="292608"/>
+          </a:xfrm>
+          <a:prstGeom prst="rect">
+            <a:avLst/>
+          </a:prstGeom>
+          <a:noFill/>
+          <a:ln/>
+        </p:spPr>
+        <p:txBody>
+          <a:bodyPr wrap="square" lIns="0" tIns="0" rIns="0" bIns="0" rtlCol="0" anchor="ctr"/>
+          <a:lstStyle/>
+          <a:p>
+            <a:pPr algn="ctr" indent="0" marL="0">
+              <a:buNone/>
+            </a:pPr>
+            <a:r>
+              <a:rPr lang="en-US" sz="1200" dirty="0">
+                <a:solidFill>
+                  <a:srgbClr val="B6BEC7"/>
+                </a:solidFill>
+                <a:latin typeface="Calibri" pitchFamily="34" charset="0"/>
+                <a:ea typeface="Calibri" pitchFamily="34" charset="-122"/>
+                <a:cs typeface="Calibri" pitchFamily="34" charset="-120"/>
+              </a:rPr>
+              <a:t>›</a:t>
+            </a:r>
+            <a:endParaRPr lang="en-US" sz="1200" dirty="0"/>
+          </a:p>
+        </p:txBody>
+      </p:sp>
+      <p:sp>
+        <p:nvSpPr>
+          <p:cNvPr id="8" name="Shape 6"/>
+          <p:cNvSpPr/>
+          <p:nvPr/>
+        </p:nvSpPr>
+        <p:spPr>
+          <a:xfrm>
+            <a:off x="2935224" y="987552"/>
+            <a:ext cx="1600200" cy="292608"/>
+          </a:xfrm>
+          <a:prstGeom prst="roundRect">
+            <a:avLst>
+              <a:gd name="adj" fmla="val 31250"/>
+            </a:avLst>
+          </a:prstGeom>
+          <a:solidFill>
+            <a:srgbClr val="D8DEE4"/>
+          </a:solidFill>
+          <a:ln/>
+        </p:spPr>
+      </p:sp>
+      <p:sp>
+        <p:nvSpPr>
+          <p:cNvPr id="9" name="Text 7"/>
+          <p:cNvSpPr txBox="1"/>
+          <p:nvPr/>
+        </p:nvSpPr>
+        <p:spPr>
+          <a:xfrm>
+            <a:off x="2935224" y="987552"/>
+            <a:ext cx="1600200" cy="292608"/>
+          </a:xfrm>
+          <a:prstGeom prst="rect">
+            <a:avLst/>
+          </a:prstGeom>
+          <a:noFill/>
+          <a:ln/>
+        </p:spPr>
+        <p:txBody>
+          <a:bodyPr wrap="square" lIns="0" tIns="0" rIns="0" bIns="0" rtlCol="0" anchor="ctr"/>
+          <a:lstStyle/>
+          <a:p>
+            <a:pPr algn="ctr" indent="0" marL="0">
+              <a:buNone/>
+            </a:pPr>
+            <a:r>
+              <a:rPr lang="en-US" sz="1050" dirty="0">
+                <a:solidFill>
+                  <a:srgbClr val="5A6672"/>
+                </a:solidFill>
+                <a:latin typeface="Calibri" pitchFamily="34" charset="0"/>
+                <a:ea typeface="Calibri" pitchFamily="34" charset="-122"/>
+                <a:cs typeface="Calibri" pitchFamily="34" charset="-120"/>
+              </a:rPr>
+              <a:t>2 · Фильтр</a:t>
+            </a:r>
+            <a:endParaRPr lang="en-US" sz="1050" dirty="0"/>
+          </a:p>
+        </p:txBody>
+      </p:sp>
+      <p:sp>
+        <p:nvSpPr>
+          <p:cNvPr id="10" name="Text 8"/>
+          <p:cNvSpPr txBox="1"/>
+          <p:nvPr/>
+        </p:nvSpPr>
+        <p:spPr>
+          <a:xfrm>
+            <a:off x="4535424" y="987552"/>
+            <a:ext cx="146304" cy="292608"/>
+          </a:xfrm>
+          <a:prstGeom prst="rect">
+            <a:avLst/>
+          </a:prstGeom>
+          <a:noFill/>
+          <a:ln/>
+        </p:spPr>
+        <p:txBody>
+          <a:bodyPr wrap="square" lIns="0" tIns="0" rIns="0" bIns="0" rtlCol="0" anchor="ctr"/>
+          <a:lstStyle/>
+          <a:p>
+            <a:pPr algn="ctr" indent="0" marL="0">
+              <a:buNone/>
+            </a:pPr>
+            <a:r>
+              <a:rPr lang="en-US" sz="1200" dirty="0">
+                <a:solidFill>
+                  <a:srgbClr val="B6BEC7"/>
+                </a:solidFill>
+                <a:latin typeface="Calibri" pitchFamily="34" charset="0"/>
+                <a:ea typeface="Calibri" pitchFamily="34" charset="-122"/>
+                <a:cs typeface="Calibri" pitchFamily="34" charset="-120"/>
+              </a:rPr>
+              <a:t>›</a:t>
+            </a:r>
+            <a:endParaRPr lang="en-US" sz="1200" dirty="0"/>
+          </a:p>
+        </p:txBody>
+      </p:sp>
+      <p:sp>
+        <p:nvSpPr>
+          <p:cNvPr id="11" name="Shape 9"/>
+          <p:cNvSpPr/>
+          <p:nvPr/>
+        </p:nvSpPr>
+        <p:spPr>
+          <a:xfrm>
+            <a:off x="4681728" y="987552"/>
+            <a:ext cx="1600200" cy="292608"/>
+          </a:xfrm>
+          <a:prstGeom prst="roundRect">
+            <a:avLst>
+              <a:gd name="adj" fmla="val 31250"/>
+            </a:avLst>
+          </a:prstGeom>
+          <a:solidFill>
+            <a:srgbClr val="D8DEE4"/>
+          </a:solidFill>
+          <a:ln/>
+        </p:spPr>
+      </p:sp>
+      <p:sp>
+        <p:nvSpPr>
+          <p:cNvPr id="12" name="Text 10"/>
+          <p:cNvSpPr txBox="1"/>
+          <p:nvPr/>
+        </p:nvSpPr>
+        <p:spPr>
+          <a:xfrm>
+            <a:off x="4681728" y="987552"/>
+            <a:ext cx="1600200" cy="292608"/>
+          </a:xfrm>
+          <a:prstGeom prst="rect">
+            <a:avLst/>
+          </a:prstGeom>
+          <a:noFill/>
+          <a:ln/>
+        </p:spPr>
+        <p:txBody>
+          <a:bodyPr wrap="square" lIns="0" tIns="0" rIns="0" bIns="0" rtlCol="0" anchor="ctr"/>
+          <a:lstStyle/>
+          <a:p>
+            <a:pPr algn="ctr" indent="0" marL="0">
+              <a:buNone/>
+            </a:pPr>
+            <a:r>
+              <a:rPr lang="en-US" sz="1050" dirty="0">
+                <a:solidFill>
+                  <a:srgbClr val="5A6672"/>
+                </a:solidFill>
+                <a:latin typeface="Calibri" pitchFamily="34" charset="0"/>
+                <a:ea typeface="Calibri" pitchFamily="34" charset="-122"/>
+                <a:cs typeface="Calibri" pitchFamily="34" charset="-120"/>
+              </a:rPr>
+              <a:t>3 · Пуш</a:t>
+            </a:r>
+            <a:endParaRPr lang="en-US" sz="1050" dirty="0"/>
+          </a:p>
+        </p:txBody>
+      </p:sp>
+      <p:sp>
+        <p:nvSpPr>
+          <p:cNvPr id="13" name="Text 11"/>
+          <p:cNvSpPr txBox="1"/>
+          <p:nvPr/>
+        </p:nvSpPr>
+        <p:spPr>
+          <a:xfrm>
+            <a:off x="6281928" y="987552"/>
+            <a:ext cx="146304" cy="292608"/>
+          </a:xfrm>
+          <a:prstGeom prst="rect">
+            <a:avLst/>
+          </a:prstGeom>
+          <a:noFill/>
+          <a:ln/>
+        </p:spPr>
+        <p:txBody>
+          <a:bodyPr wrap="square" lIns="0" tIns="0" rIns="0" bIns="0" rtlCol="0" anchor="ctr"/>
+          <a:lstStyle/>
+          <a:p>
+            <a:pPr algn="ctr" indent="0" marL="0">
+              <a:buNone/>
+            </a:pPr>
+            <a:r>
+              <a:rPr lang="en-US" sz="1200" dirty="0">
+                <a:solidFill>
+                  <a:srgbClr val="B6BEC7"/>
+                </a:solidFill>
+                <a:latin typeface="Calibri" pitchFamily="34" charset="0"/>
+                <a:ea typeface="Calibri" pitchFamily="34" charset="-122"/>
+                <a:cs typeface="Calibri" pitchFamily="34" charset="-120"/>
+              </a:rPr>
+              <a:t>›</a:t>
+            </a:r>
+            <a:endParaRPr lang="en-US" sz="1200" dirty="0"/>
+          </a:p>
+        </p:txBody>
+      </p:sp>
+      <p:sp>
+        <p:nvSpPr>
+          <p:cNvPr id="14" name="Shape 12"/>
+          <p:cNvSpPr/>
+          <p:nvPr/>
+        </p:nvSpPr>
+        <p:spPr>
+          <a:xfrm>
+            <a:off x="6428232" y="987552"/>
+            <a:ext cx="1600200" cy="292608"/>
+          </a:xfrm>
+          <a:prstGeom prst="roundRect">
+            <a:avLst>
+              <a:gd name="adj" fmla="val 31250"/>
+            </a:avLst>
+          </a:prstGeom>
+          <a:solidFill>
+            <a:srgbClr val="D8DEE4"/>
+          </a:solidFill>
+          <a:ln/>
+        </p:spPr>
+      </p:sp>
+      <p:sp>
+        <p:nvSpPr>
+          <p:cNvPr id="15" name="Text 13"/>
+          <p:cNvSpPr txBox="1"/>
+          <p:nvPr/>
+        </p:nvSpPr>
+        <p:spPr>
+          <a:xfrm>
+            <a:off x="6428232" y="987552"/>
+            <a:ext cx="1600200" cy="292608"/>
+          </a:xfrm>
+          <a:prstGeom prst="rect">
+            <a:avLst/>
+          </a:prstGeom>
+          <a:noFill/>
+          <a:ln/>
+        </p:spPr>
+        <p:txBody>
+          <a:bodyPr wrap="square" lIns="0" tIns="0" rIns="0" bIns="0" rtlCol="0" anchor="ctr"/>
+          <a:lstStyle/>
+          <a:p>
+            <a:pPr algn="ctr" indent="0" marL="0">
+              <a:buNone/>
+            </a:pPr>
+            <a:r>
+              <a:rPr lang="en-US" sz="1050" dirty="0">
+                <a:solidFill>
+                  <a:srgbClr val="5A6672"/>
+                </a:solidFill>
+                <a:latin typeface="Calibri" pitchFamily="34" charset="0"/>
+                <a:ea typeface="Calibri" pitchFamily="34" charset="-122"/>
+                <a:cs typeface="Calibri" pitchFamily="34" charset="-120"/>
+              </a:rPr>
+              <a:t>4 · Экран перевода</a:t>
+            </a:r>
+            <a:endParaRPr lang="en-US" sz="1050" dirty="0"/>
+          </a:p>
+        </p:txBody>
+      </p:sp>
+      <p:sp>
+        <p:nvSpPr>
+          <p:cNvPr id="16" name="Text 14"/>
+          <p:cNvSpPr txBox="1"/>
+          <p:nvPr/>
+        </p:nvSpPr>
+        <p:spPr>
+          <a:xfrm>
+            <a:off x="8028432" y="987552"/>
+            <a:ext cx="146304" cy="292608"/>
+          </a:xfrm>
+          <a:prstGeom prst="rect">
+            <a:avLst/>
+          </a:prstGeom>
+          <a:noFill/>
+          <a:ln/>
+        </p:spPr>
+        <p:txBody>
+          <a:bodyPr wrap="square" lIns="0" tIns="0" rIns="0" bIns="0" rtlCol="0" anchor="ctr"/>
+          <a:lstStyle/>
+          <a:p>
+            <a:pPr algn="ctr" indent="0" marL="0">
+              <a:buNone/>
+            </a:pPr>
+            <a:r>
+              <a:rPr lang="en-US" sz="1200" dirty="0">
+                <a:solidFill>
+                  <a:srgbClr val="B6BEC7"/>
+                </a:solidFill>
+                <a:latin typeface="Calibri" pitchFamily="34" charset="0"/>
+                <a:ea typeface="Calibri" pitchFamily="34" charset="-122"/>
+                <a:cs typeface="Calibri" pitchFamily="34" charset="-120"/>
+              </a:rPr>
+              <a:t>›</a:t>
+            </a:r>
+            <a:endParaRPr lang="en-US" sz="1200" dirty="0"/>
+          </a:p>
+        </p:txBody>
+      </p:sp>
+      <p:sp>
+        <p:nvSpPr>
+          <p:cNvPr id="17" name="Shape 15"/>
+          <p:cNvSpPr/>
+          <p:nvPr/>
+        </p:nvSpPr>
+        <p:spPr>
+          <a:xfrm>
+            <a:off x="8174736" y="987552"/>
+            <a:ext cx="1600200" cy="292608"/>
+          </a:xfrm>
+          <a:prstGeom prst="roundRect">
+            <a:avLst>
+              <a:gd name="adj" fmla="val 31250"/>
+            </a:avLst>
+          </a:prstGeom>
+          <a:solidFill>
+            <a:srgbClr val="9C5B12"/>
+          </a:solidFill>
+          <a:ln/>
+        </p:spPr>
+      </p:sp>
+      <p:sp>
+        <p:nvSpPr>
+          <p:cNvPr id="18" name="Text 16"/>
+          <p:cNvSpPr txBox="1"/>
+          <p:nvPr/>
+        </p:nvSpPr>
+        <p:spPr>
+          <a:xfrm>
+            <a:off x="8174736" y="987552"/>
+            <a:ext cx="1600200" cy="292608"/>
+          </a:xfrm>
+          <a:prstGeom prst="rect">
+            <a:avLst/>
+          </a:prstGeom>
+          <a:noFill/>
+          <a:ln/>
+        </p:spPr>
+        <p:txBody>
+          <a:bodyPr wrap="square" lIns="0" tIns="0" rIns="0" bIns="0" rtlCol="0" anchor="ctr"/>
+          <a:lstStyle/>
+          <a:p>
+            <a:pPr algn="ctr" indent="0" marL="0">
+              <a:buNone/>
+            </a:pPr>
+            <a:r>
+              <a:rPr lang="en-US" sz="1050" b="1" dirty="0">
+                <a:solidFill>
+                  <a:srgbClr val="FFFFFF"/>
+                </a:solidFill>
+                <a:latin typeface="Calibri" pitchFamily="34" charset="0"/>
+                <a:ea typeface="Calibri" pitchFamily="34" charset="-122"/>
+                <a:cs typeface="Calibri" pitchFamily="34" charset="-120"/>
+              </a:rPr>
+              <a:t>5 · Решение</a:t>
+            </a:r>
+            <a:endParaRPr lang="en-US" sz="1050" dirty="0"/>
+          </a:p>
+        </p:txBody>
+      </p:sp>
+      <p:sp>
+        <p:nvSpPr>
+          <p:cNvPr id="19" name="Text 17"/>
+          <p:cNvSpPr txBox="1"/>
+          <p:nvPr/>
+        </p:nvSpPr>
+        <p:spPr>
+          <a:xfrm>
+            <a:off x="9774936" y="987552"/>
+            <a:ext cx="146304" cy="292608"/>
+          </a:xfrm>
+          <a:prstGeom prst="rect">
+            <a:avLst/>
+          </a:prstGeom>
+          <a:noFill/>
+          <a:ln/>
+        </p:spPr>
+        <p:txBody>
+          <a:bodyPr wrap="square" lIns="0" tIns="0" rIns="0" bIns="0" rtlCol="0" anchor="ctr"/>
+          <a:lstStyle/>
+          <a:p>
+            <a:pPr algn="ctr" indent="0" marL="0">
+              <a:buNone/>
+            </a:pPr>
+            <a:r>
+              <a:rPr lang="en-US" sz="1200" dirty="0">
+                <a:solidFill>
+                  <a:srgbClr val="B6BEC7"/>
+                </a:solidFill>
+                <a:latin typeface="Calibri" pitchFamily="34" charset="0"/>
+                <a:ea typeface="Calibri" pitchFamily="34" charset="-122"/>
+                <a:cs typeface="Calibri" pitchFamily="34" charset="-120"/>
+              </a:rPr>
+              <a:t>›</a:t>
+            </a:r>
+            <a:endParaRPr lang="en-US" sz="1200" dirty="0"/>
+          </a:p>
+        </p:txBody>
+      </p:sp>
+      <p:sp>
+        <p:nvSpPr>
+          <p:cNvPr id="20" name="Shape 18"/>
+          <p:cNvSpPr/>
+          <p:nvPr/>
+        </p:nvSpPr>
+        <p:spPr>
+          <a:xfrm>
+            <a:off x="9921240" y="987552"/>
+            <a:ext cx="1600200" cy="292608"/>
+          </a:xfrm>
+          <a:prstGeom prst="roundRect">
+            <a:avLst>
+              <a:gd name="adj" fmla="val 31250"/>
+            </a:avLst>
+          </a:prstGeom>
+          <a:solidFill>
+            <a:srgbClr val="F4F6F8"/>
+          </a:solidFill>
+          <a:ln/>
+        </p:spPr>
+      </p:sp>
+      <p:sp>
+        <p:nvSpPr>
+          <p:cNvPr id="21" name="Text 19"/>
+          <p:cNvSpPr txBox="1"/>
+          <p:nvPr/>
+        </p:nvSpPr>
+        <p:spPr>
+          <a:xfrm>
+            <a:off x="9921240" y="987552"/>
+            <a:ext cx="1600200" cy="292608"/>
+          </a:xfrm>
+          <a:prstGeom prst="rect">
+            <a:avLst/>
+          </a:prstGeom>
+          <a:noFill/>
+          <a:ln/>
+        </p:spPr>
+        <p:txBody>
+          <a:bodyPr wrap="square" lIns="0" tIns="0" rIns="0" bIns="0" rtlCol="0" anchor="ctr"/>
+          <a:lstStyle/>
+          <a:p>
+            <a:pPr algn="ctr" indent="0" marL="0">
+              <a:buNone/>
+            </a:pPr>
+            <a:r>
+              <a:rPr lang="en-US" sz="1050" dirty="0">
+                <a:solidFill>
+                  <a:srgbClr val="97A1AC"/>
+                </a:solidFill>
+                <a:latin typeface="Calibri" pitchFamily="34" charset="0"/>
+                <a:ea typeface="Calibri" pitchFamily="34" charset="-122"/>
+                <a:cs typeface="Calibri" pitchFamily="34" charset="-120"/>
+              </a:rPr>
+              <a:t>6 · Удержание</a:t>
             </a:r>
             <a:endParaRPr lang="en-US" sz="1050" dirty="0"/>
           </a:p>
@@ -16335,7 +18845,7 @@
       </p:sp>
       <p:pic>
         <p:nvPicPr>
-          <p:cNvPr id="6" name="Image 0" descr="submission/figures/ekran-01.png">    </p:cNvPr>
+          <p:cNvPr id="22" name="Image 0" descr="submission/figures/ekran-01.png">    </p:cNvPr>
           <p:cNvPicPr>
             <a:picLocks noChangeAspect="1"/>
           </p:cNvPicPr>
@@ -16349,8 +18859,8 @@
         </p:blipFill>
         <p:spPr>
           <a:xfrm>
-            <a:off x="640080" y="1371600"/>
-            <a:ext cx="2148840" cy="4383634"/>
+            <a:off x="640080" y="1627632"/>
+            <a:ext cx="2194560" cy="4476902"/>
           </a:xfrm>
           <a:prstGeom prst="rect">
             <a:avLst/>
@@ -16359,14 +18869,14 @@
       </p:pic>
       <p:sp>
         <p:nvSpPr>
-          <p:cNvPr id="7" name="Text 4"/>
-          <p:cNvSpPr txBox="1"/>
-          <p:nvPr/>
-        </p:nvSpPr>
-        <p:spPr>
-          <a:xfrm>
-            <a:off x="3063240" y="1371600"/>
-            <a:ext cx="8458200" cy="402336"/>
+          <p:cNvPr id="23" name="Text 20"/>
+          <p:cNvSpPr txBox="1"/>
+          <p:nvPr/>
+        </p:nvSpPr>
+        <p:spPr>
+          <a:xfrm>
+            <a:off x="3154680" y="1627632"/>
+            <a:ext cx="8366760" cy="402336"/>
           </a:xfrm>
           <a:prstGeom prst="rect">
             <a:avLst/>
@@ -16401,14 +18911,14 @@
       </p:sp>
       <p:sp>
         <p:nvSpPr>
-          <p:cNvPr id="8" name="Shape 5"/>
+          <p:cNvPr id="24" name="Shape 21"/>
           <p:cNvSpPr/>
           <p:nvPr/>
         </p:nvSpPr>
         <p:spPr>
           <a:xfrm>
-            <a:off x="3063240" y="1847088"/>
-            <a:ext cx="2697480" cy="1755648"/>
+            <a:off x="3154680" y="2103120"/>
+            <a:ext cx="2651760" cy="1755648"/>
           </a:xfrm>
           <a:prstGeom prst="roundRect">
             <a:avLst>
@@ -16423,14 +18933,14 @@
       </p:sp>
       <p:sp>
         <p:nvSpPr>
-          <p:cNvPr id="9" name="Text 6"/>
-          <p:cNvSpPr txBox="1"/>
-          <p:nvPr/>
-        </p:nvSpPr>
-        <p:spPr>
-          <a:xfrm>
-            <a:off x="3319272" y="2029968"/>
-            <a:ext cx="2185416" cy="475488"/>
+          <p:cNvPr id="25" name="Text 22"/>
+          <p:cNvSpPr txBox="1"/>
+          <p:nvPr/>
+        </p:nvSpPr>
+        <p:spPr>
+          <a:xfrm>
+            <a:off x="3410712" y="2286000"/>
+            <a:ext cx="2139696" cy="475488"/>
           </a:xfrm>
           <a:prstGeom prst="rect">
             <a:avLst/>
@@ -16462,14 +18972,14 @@
       </p:sp>
       <p:sp>
         <p:nvSpPr>
-          <p:cNvPr id="10" name="Text 7"/>
-          <p:cNvSpPr txBox="1"/>
-          <p:nvPr/>
-        </p:nvSpPr>
-        <p:spPr>
-          <a:xfrm>
-            <a:off x="3319272" y="2560320"/>
-            <a:ext cx="2185416" cy="859536"/>
+          <p:cNvPr id="26" name="Text 23"/>
+          <p:cNvSpPr txBox="1"/>
+          <p:nvPr/>
+        </p:nvSpPr>
+        <p:spPr>
+          <a:xfrm>
+            <a:off x="3410712" y="2816352"/>
+            <a:ext cx="2139696" cy="859536"/>
           </a:xfrm>
           <a:prstGeom prst="rect">
             <a:avLst/>
@@ -16504,14 +19014,14 @@
       </p:sp>
       <p:sp>
         <p:nvSpPr>
-          <p:cNvPr id="11" name="Shape 8"/>
+          <p:cNvPr id="27" name="Shape 24"/>
           <p:cNvSpPr/>
           <p:nvPr/>
         </p:nvSpPr>
         <p:spPr>
           <a:xfrm>
-            <a:off x="5943600" y="1847088"/>
-            <a:ext cx="2697480" cy="1755648"/>
+            <a:off x="6016752" y="2103120"/>
+            <a:ext cx="2651760" cy="1755648"/>
           </a:xfrm>
           <a:prstGeom prst="roundRect">
             <a:avLst>
@@ -16526,14 +19036,14 @@
       </p:sp>
       <p:sp>
         <p:nvSpPr>
-          <p:cNvPr id="12" name="Text 9"/>
-          <p:cNvSpPr txBox="1"/>
-          <p:nvPr/>
-        </p:nvSpPr>
-        <p:spPr>
-          <a:xfrm>
-            <a:off x="6199632" y="2029968"/>
-            <a:ext cx="2185416" cy="475488"/>
+          <p:cNvPr id="28" name="Text 25"/>
+          <p:cNvSpPr txBox="1"/>
+          <p:nvPr/>
+        </p:nvSpPr>
+        <p:spPr>
+          <a:xfrm>
+            <a:off x="6272784" y="2286000"/>
+            <a:ext cx="2139696" cy="475488"/>
           </a:xfrm>
           <a:prstGeom prst="rect">
             <a:avLst/>
@@ -16565,14 +19075,14 @@
       </p:sp>
       <p:sp>
         <p:nvSpPr>
-          <p:cNvPr id="13" name="Text 10"/>
-          <p:cNvSpPr txBox="1"/>
-          <p:nvPr/>
-        </p:nvSpPr>
-        <p:spPr>
-          <a:xfrm>
-            <a:off x="6199632" y="2560320"/>
-            <a:ext cx="2185416" cy="859536"/>
+          <p:cNvPr id="29" name="Text 26"/>
+          <p:cNvSpPr txBox="1"/>
+          <p:nvPr/>
+        </p:nvSpPr>
+        <p:spPr>
+          <a:xfrm>
+            <a:off x="6272784" y="2816352"/>
+            <a:ext cx="2139696" cy="859536"/>
           </a:xfrm>
           <a:prstGeom prst="rect">
             <a:avLst/>
@@ -16607,14 +19117,14 @@
       </p:sp>
       <p:sp>
         <p:nvSpPr>
-          <p:cNvPr id="14" name="Shape 11"/>
+          <p:cNvPr id="30" name="Shape 27"/>
           <p:cNvSpPr/>
           <p:nvPr/>
         </p:nvSpPr>
         <p:spPr>
           <a:xfrm>
-            <a:off x="8823960" y="1847088"/>
-            <a:ext cx="2697480" cy="1755648"/>
+            <a:off x="8869680" y="2103120"/>
+            <a:ext cx="2651760" cy="1755648"/>
           </a:xfrm>
           <a:prstGeom prst="roundRect">
             <a:avLst>
@@ -16629,14 +19139,14 @@
       </p:sp>
       <p:sp>
         <p:nvSpPr>
-          <p:cNvPr id="15" name="Text 12"/>
-          <p:cNvSpPr txBox="1"/>
-          <p:nvPr/>
-        </p:nvSpPr>
-        <p:spPr>
-          <a:xfrm>
-            <a:off x="9079992" y="2029968"/>
-            <a:ext cx="2185416" cy="475488"/>
+          <p:cNvPr id="31" name="Text 28"/>
+          <p:cNvSpPr txBox="1"/>
+          <p:nvPr/>
+        </p:nvSpPr>
+        <p:spPr>
+          <a:xfrm>
+            <a:off x="9125712" y="2286000"/>
+            <a:ext cx="2139696" cy="475488"/>
           </a:xfrm>
           <a:prstGeom prst="rect">
             <a:avLst/>
@@ -16668,14 +19178,14 @@
       </p:sp>
       <p:sp>
         <p:nvSpPr>
-          <p:cNvPr id="16" name="Text 13"/>
-          <p:cNvSpPr txBox="1"/>
-          <p:nvPr/>
-        </p:nvSpPr>
-        <p:spPr>
-          <a:xfrm>
-            <a:off x="9079992" y="2560320"/>
-            <a:ext cx="2185416" cy="859536"/>
+          <p:cNvPr id="32" name="Text 29"/>
+          <p:cNvSpPr txBox="1"/>
+          <p:nvPr/>
+        </p:nvSpPr>
+        <p:spPr>
+          <a:xfrm>
+            <a:off x="9125712" y="2816352"/>
+            <a:ext cx="2139696" cy="859536"/>
           </a:xfrm>
           <a:prstGeom prst="rect">
             <a:avLst/>
@@ -16710,18 +19220,18 @@
       </p:sp>
       <p:sp>
         <p:nvSpPr>
-          <p:cNvPr id="17" name="Shape 14"/>
+          <p:cNvPr id="33" name="Shape 30"/>
           <p:cNvSpPr/>
           <p:nvPr/>
         </p:nvSpPr>
         <p:spPr>
           <a:xfrm>
-            <a:off x="3063240" y="3749040"/>
-            <a:ext cx="8458200" cy="2011680"/>
+            <a:off x="3154680" y="4005072"/>
+            <a:ext cx="8366760" cy="2084832"/>
           </a:xfrm>
           <a:prstGeom prst="roundRect">
             <a:avLst>
-              <a:gd name="adj" fmla="val 2727"/>
+              <a:gd name="adj" fmla="val 2632"/>
             </a:avLst>
           </a:prstGeom>
           <a:solidFill>
@@ -16732,14 +19242,14 @@
       </p:sp>
       <p:sp>
         <p:nvSpPr>
-          <p:cNvPr id="18" name="Text 15"/>
-          <p:cNvSpPr txBox="1"/>
-          <p:nvPr/>
-        </p:nvSpPr>
-        <p:spPr>
-          <a:xfrm>
-            <a:off x="3337560" y="3904488"/>
-            <a:ext cx="7909560" cy="329184"/>
+          <p:cNvPr id="34" name="Text 31"/>
+          <p:cNvSpPr txBox="1"/>
+          <p:nvPr/>
+        </p:nvSpPr>
+        <p:spPr>
+          <a:xfrm>
+            <a:off x="3429000" y="4160520"/>
+            <a:ext cx="7818120" cy="329184"/>
           </a:xfrm>
           <a:prstGeom prst="rect">
             <a:avLst/>
@@ -16771,14 +19281,14 @@
       </p:sp>
       <p:sp>
         <p:nvSpPr>
-          <p:cNvPr id="19" name="Text 16"/>
-          <p:cNvSpPr txBox="1"/>
-          <p:nvPr/>
-        </p:nvSpPr>
-        <p:spPr>
-          <a:xfrm>
-            <a:off x="3337560" y="4279392"/>
-            <a:ext cx="7909560" cy="1316736"/>
+          <p:cNvPr id="35" name="Text 32"/>
+          <p:cNvSpPr txBox="1"/>
+          <p:nvPr/>
+        </p:nvSpPr>
+        <p:spPr>
+          <a:xfrm>
+            <a:off x="3429000" y="4535424"/>
+            <a:ext cx="7818120" cy="1389888"/>
           </a:xfrm>
           <a:prstGeom prst="rect">
             <a:avLst/>
@@ -16972,14 +19482,36 @@
       </p:sp>
       <p:sp>
         <p:nvSpPr>
-          <p:cNvPr id="5" name="Text 3"/>
-          <p:cNvSpPr txBox="1"/>
-          <p:nvPr/>
-        </p:nvSpPr>
-        <p:spPr>
-          <a:xfrm>
-            <a:off x="1188720" y="969264"/>
-            <a:ext cx="10332720" cy="237744"/>
+          <p:cNvPr id="5" name="Shape 3"/>
+          <p:cNvSpPr/>
+          <p:nvPr/>
+        </p:nvSpPr>
+        <p:spPr>
+          <a:xfrm>
+            <a:off x="1188720" y="987552"/>
+            <a:ext cx="1600200" cy="292608"/>
+          </a:xfrm>
+          <a:prstGeom prst="roundRect">
+            <a:avLst>
+              <a:gd name="adj" fmla="val 31250"/>
+            </a:avLst>
+          </a:prstGeom>
+          <a:solidFill>
+            <a:srgbClr val="D8DEE4"/>
+          </a:solidFill>
+          <a:ln/>
+        </p:spPr>
+      </p:sp>
+      <p:sp>
+        <p:nvSpPr>
+          <p:cNvPr id="6" name="Text 4"/>
+          <p:cNvSpPr txBox="1"/>
+          <p:nvPr/>
+        </p:nvSpPr>
+        <p:spPr>
+          <a:xfrm>
+            <a:off x="1188720" y="987552"/>
+            <a:ext cx="1600200" cy="292608"/>
           </a:xfrm>
           <a:prstGeom prst="rect">
             <a:avLst/>
@@ -16991,19 +19523,519 @@
           <a:bodyPr wrap="square" lIns="0" tIns="0" rIns="0" bIns="0" rtlCol="0" anchor="ctr"/>
           <a:lstStyle/>
           <a:p>
-            <a:pPr indent="0" marL="0">
-              <a:buNone/>
-            </a:pPr>
-            <a:r>
-              <a:rPr lang="en-US" sz="1050" b="1" spc="140" kern="0" dirty="0">
-                <a:solidFill>
-                  <a:srgbClr val="6E7A88"/>
+            <a:pPr algn="ctr" indent="0" marL="0">
+              <a:buNone/>
+            </a:pPr>
+            <a:r>
+              <a:rPr lang="en-US" sz="1050" dirty="0">
+                <a:solidFill>
+                  <a:srgbClr val="5A6672"/>
                 </a:solidFill>
                 <a:latin typeface="Calibri" pitchFamily="34" charset="0"/>
                 <a:ea typeface="Calibri" pitchFamily="34" charset="-122"/>
                 <a:cs typeface="Calibri" pitchFamily="34" charset="-120"/>
               </a:rPr>
-              <a:t>ШАГ 6 ИЗ 6 · КЛИЕНТСКИЙ ПУТЬ</a:t>
+              <a:t>1 · Триггер</a:t>
+            </a:r>
+            <a:endParaRPr lang="en-US" sz="1050" dirty="0"/>
+          </a:p>
+        </p:txBody>
+      </p:sp>
+      <p:sp>
+        <p:nvSpPr>
+          <p:cNvPr id="7" name="Text 5"/>
+          <p:cNvSpPr txBox="1"/>
+          <p:nvPr/>
+        </p:nvSpPr>
+        <p:spPr>
+          <a:xfrm>
+            <a:off x="2788920" y="987552"/>
+            <a:ext cx="146304" cy="292608"/>
+          </a:xfrm>
+          <a:prstGeom prst="rect">
+            <a:avLst/>
+          </a:prstGeom>
+          <a:noFill/>
+          <a:ln/>
+        </p:spPr>
+        <p:txBody>
+          <a:bodyPr wrap="square" lIns="0" tIns="0" rIns="0" bIns="0" rtlCol="0" anchor="ctr"/>
+          <a:lstStyle/>
+          <a:p>
+            <a:pPr algn="ctr" indent="0" marL="0">
+              <a:buNone/>
+            </a:pPr>
+            <a:r>
+              <a:rPr lang="en-US" sz="1200" dirty="0">
+                <a:solidFill>
+                  <a:srgbClr val="B6BEC7"/>
+                </a:solidFill>
+                <a:latin typeface="Calibri" pitchFamily="34" charset="0"/>
+                <a:ea typeface="Calibri" pitchFamily="34" charset="-122"/>
+                <a:cs typeface="Calibri" pitchFamily="34" charset="-120"/>
+              </a:rPr>
+              <a:t>›</a:t>
+            </a:r>
+            <a:endParaRPr lang="en-US" sz="1200" dirty="0"/>
+          </a:p>
+        </p:txBody>
+      </p:sp>
+      <p:sp>
+        <p:nvSpPr>
+          <p:cNvPr id="8" name="Shape 6"/>
+          <p:cNvSpPr/>
+          <p:nvPr/>
+        </p:nvSpPr>
+        <p:spPr>
+          <a:xfrm>
+            <a:off x="2935224" y="987552"/>
+            <a:ext cx="1600200" cy="292608"/>
+          </a:xfrm>
+          <a:prstGeom prst="roundRect">
+            <a:avLst>
+              <a:gd name="adj" fmla="val 31250"/>
+            </a:avLst>
+          </a:prstGeom>
+          <a:solidFill>
+            <a:srgbClr val="D8DEE4"/>
+          </a:solidFill>
+          <a:ln/>
+        </p:spPr>
+      </p:sp>
+      <p:sp>
+        <p:nvSpPr>
+          <p:cNvPr id="9" name="Text 7"/>
+          <p:cNvSpPr txBox="1"/>
+          <p:nvPr/>
+        </p:nvSpPr>
+        <p:spPr>
+          <a:xfrm>
+            <a:off x="2935224" y="987552"/>
+            <a:ext cx="1600200" cy="292608"/>
+          </a:xfrm>
+          <a:prstGeom prst="rect">
+            <a:avLst/>
+          </a:prstGeom>
+          <a:noFill/>
+          <a:ln/>
+        </p:spPr>
+        <p:txBody>
+          <a:bodyPr wrap="square" lIns="0" tIns="0" rIns="0" bIns="0" rtlCol="0" anchor="ctr"/>
+          <a:lstStyle/>
+          <a:p>
+            <a:pPr algn="ctr" indent="0" marL="0">
+              <a:buNone/>
+            </a:pPr>
+            <a:r>
+              <a:rPr lang="en-US" sz="1050" dirty="0">
+                <a:solidFill>
+                  <a:srgbClr val="5A6672"/>
+                </a:solidFill>
+                <a:latin typeface="Calibri" pitchFamily="34" charset="0"/>
+                <a:ea typeface="Calibri" pitchFamily="34" charset="-122"/>
+                <a:cs typeface="Calibri" pitchFamily="34" charset="-120"/>
+              </a:rPr>
+              <a:t>2 · Фильтр</a:t>
+            </a:r>
+            <a:endParaRPr lang="en-US" sz="1050" dirty="0"/>
+          </a:p>
+        </p:txBody>
+      </p:sp>
+      <p:sp>
+        <p:nvSpPr>
+          <p:cNvPr id="10" name="Text 8"/>
+          <p:cNvSpPr txBox="1"/>
+          <p:nvPr/>
+        </p:nvSpPr>
+        <p:spPr>
+          <a:xfrm>
+            <a:off x="4535424" y="987552"/>
+            <a:ext cx="146304" cy="292608"/>
+          </a:xfrm>
+          <a:prstGeom prst="rect">
+            <a:avLst/>
+          </a:prstGeom>
+          <a:noFill/>
+          <a:ln/>
+        </p:spPr>
+        <p:txBody>
+          <a:bodyPr wrap="square" lIns="0" tIns="0" rIns="0" bIns="0" rtlCol="0" anchor="ctr"/>
+          <a:lstStyle/>
+          <a:p>
+            <a:pPr algn="ctr" indent="0" marL="0">
+              <a:buNone/>
+            </a:pPr>
+            <a:r>
+              <a:rPr lang="en-US" sz="1200" dirty="0">
+                <a:solidFill>
+                  <a:srgbClr val="B6BEC7"/>
+                </a:solidFill>
+                <a:latin typeface="Calibri" pitchFamily="34" charset="0"/>
+                <a:ea typeface="Calibri" pitchFamily="34" charset="-122"/>
+                <a:cs typeface="Calibri" pitchFamily="34" charset="-120"/>
+              </a:rPr>
+              <a:t>›</a:t>
+            </a:r>
+            <a:endParaRPr lang="en-US" sz="1200" dirty="0"/>
+          </a:p>
+        </p:txBody>
+      </p:sp>
+      <p:sp>
+        <p:nvSpPr>
+          <p:cNvPr id="11" name="Shape 9"/>
+          <p:cNvSpPr/>
+          <p:nvPr/>
+        </p:nvSpPr>
+        <p:spPr>
+          <a:xfrm>
+            <a:off x="4681728" y="987552"/>
+            <a:ext cx="1600200" cy="292608"/>
+          </a:xfrm>
+          <a:prstGeom prst="roundRect">
+            <a:avLst>
+              <a:gd name="adj" fmla="val 31250"/>
+            </a:avLst>
+          </a:prstGeom>
+          <a:solidFill>
+            <a:srgbClr val="D8DEE4"/>
+          </a:solidFill>
+          <a:ln/>
+        </p:spPr>
+      </p:sp>
+      <p:sp>
+        <p:nvSpPr>
+          <p:cNvPr id="12" name="Text 10"/>
+          <p:cNvSpPr txBox="1"/>
+          <p:nvPr/>
+        </p:nvSpPr>
+        <p:spPr>
+          <a:xfrm>
+            <a:off x="4681728" y="987552"/>
+            <a:ext cx="1600200" cy="292608"/>
+          </a:xfrm>
+          <a:prstGeom prst="rect">
+            <a:avLst/>
+          </a:prstGeom>
+          <a:noFill/>
+          <a:ln/>
+        </p:spPr>
+        <p:txBody>
+          <a:bodyPr wrap="square" lIns="0" tIns="0" rIns="0" bIns="0" rtlCol="0" anchor="ctr"/>
+          <a:lstStyle/>
+          <a:p>
+            <a:pPr algn="ctr" indent="0" marL="0">
+              <a:buNone/>
+            </a:pPr>
+            <a:r>
+              <a:rPr lang="en-US" sz="1050" dirty="0">
+                <a:solidFill>
+                  <a:srgbClr val="5A6672"/>
+                </a:solidFill>
+                <a:latin typeface="Calibri" pitchFamily="34" charset="0"/>
+                <a:ea typeface="Calibri" pitchFamily="34" charset="-122"/>
+                <a:cs typeface="Calibri" pitchFamily="34" charset="-120"/>
+              </a:rPr>
+              <a:t>3 · Пуш</a:t>
+            </a:r>
+            <a:endParaRPr lang="en-US" sz="1050" dirty="0"/>
+          </a:p>
+        </p:txBody>
+      </p:sp>
+      <p:sp>
+        <p:nvSpPr>
+          <p:cNvPr id="13" name="Text 11"/>
+          <p:cNvSpPr txBox="1"/>
+          <p:nvPr/>
+        </p:nvSpPr>
+        <p:spPr>
+          <a:xfrm>
+            <a:off x="6281928" y="987552"/>
+            <a:ext cx="146304" cy="292608"/>
+          </a:xfrm>
+          <a:prstGeom prst="rect">
+            <a:avLst/>
+          </a:prstGeom>
+          <a:noFill/>
+          <a:ln/>
+        </p:spPr>
+        <p:txBody>
+          <a:bodyPr wrap="square" lIns="0" tIns="0" rIns="0" bIns="0" rtlCol="0" anchor="ctr"/>
+          <a:lstStyle/>
+          <a:p>
+            <a:pPr algn="ctr" indent="0" marL="0">
+              <a:buNone/>
+            </a:pPr>
+            <a:r>
+              <a:rPr lang="en-US" sz="1200" dirty="0">
+                <a:solidFill>
+                  <a:srgbClr val="B6BEC7"/>
+                </a:solidFill>
+                <a:latin typeface="Calibri" pitchFamily="34" charset="0"/>
+                <a:ea typeface="Calibri" pitchFamily="34" charset="-122"/>
+                <a:cs typeface="Calibri" pitchFamily="34" charset="-120"/>
+              </a:rPr>
+              <a:t>›</a:t>
+            </a:r>
+            <a:endParaRPr lang="en-US" sz="1200" dirty="0"/>
+          </a:p>
+        </p:txBody>
+      </p:sp>
+      <p:sp>
+        <p:nvSpPr>
+          <p:cNvPr id="14" name="Shape 12"/>
+          <p:cNvSpPr/>
+          <p:nvPr/>
+        </p:nvSpPr>
+        <p:spPr>
+          <a:xfrm>
+            <a:off x="6428232" y="987552"/>
+            <a:ext cx="1600200" cy="292608"/>
+          </a:xfrm>
+          <a:prstGeom prst="roundRect">
+            <a:avLst>
+              <a:gd name="adj" fmla="val 31250"/>
+            </a:avLst>
+          </a:prstGeom>
+          <a:solidFill>
+            <a:srgbClr val="D8DEE4"/>
+          </a:solidFill>
+          <a:ln/>
+        </p:spPr>
+      </p:sp>
+      <p:sp>
+        <p:nvSpPr>
+          <p:cNvPr id="15" name="Text 13"/>
+          <p:cNvSpPr txBox="1"/>
+          <p:nvPr/>
+        </p:nvSpPr>
+        <p:spPr>
+          <a:xfrm>
+            <a:off x="6428232" y="987552"/>
+            <a:ext cx="1600200" cy="292608"/>
+          </a:xfrm>
+          <a:prstGeom prst="rect">
+            <a:avLst/>
+          </a:prstGeom>
+          <a:noFill/>
+          <a:ln/>
+        </p:spPr>
+        <p:txBody>
+          <a:bodyPr wrap="square" lIns="0" tIns="0" rIns="0" bIns="0" rtlCol="0" anchor="ctr"/>
+          <a:lstStyle/>
+          <a:p>
+            <a:pPr algn="ctr" indent="0" marL="0">
+              <a:buNone/>
+            </a:pPr>
+            <a:r>
+              <a:rPr lang="en-US" sz="1050" dirty="0">
+                <a:solidFill>
+                  <a:srgbClr val="5A6672"/>
+                </a:solidFill>
+                <a:latin typeface="Calibri" pitchFamily="34" charset="0"/>
+                <a:ea typeface="Calibri" pitchFamily="34" charset="-122"/>
+                <a:cs typeface="Calibri" pitchFamily="34" charset="-120"/>
+              </a:rPr>
+              <a:t>4 · Экран перевода</a:t>
+            </a:r>
+            <a:endParaRPr lang="en-US" sz="1050" dirty="0"/>
+          </a:p>
+        </p:txBody>
+      </p:sp>
+      <p:sp>
+        <p:nvSpPr>
+          <p:cNvPr id="16" name="Text 14"/>
+          <p:cNvSpPr txBox="1"/>
+          <p:nvPr/>
+        </p:nvSpPr>
+        <p:spPr>
+          <a:xfrm>
+            <a:off x="8028432" y="987552"/>
+            <a:ext cx="146304" cy="292608"/>
+          </a:xfrm>
+          <a:prstGeom prst="rect">
+            <a:avLst/>
+          </a:prstGeom>
+          <a:noFill/>
+          <a:ln/>
+        </p:spPr>
+        <p:txBody>
+          <a:bodyPr wrap="square" lIns="0" tIns="0" rIns="0" bIns="0" rtlCol="0" anchor="ctr"/>
+          <a:lstStyle/>
+          <a:p>
+            <a:pPr algn="ctr" indent="0" marL="0">
+              <a:buNone/>
+            </a:pPr>
+            <a:r>
+              <a:rPr lang="en-US" sz="1200" dirty="0">
+                <a:solidFill>
+                  <a:srgbClr val="B6BEC7"/>
+                </a:solidFill>
+                <a:latin typeface="Calibri" pitchFamily="34" charset="0"/>
+                <a:ea typeface="Calibri" pitchFamily="34" charset="-122"/>
+                <a:cs typeface="Calibri" pitchFamily="34" charset="-120"/>
+              </a:rPr>
+              <a:t>›</a:t>
+            </a:r>
+            <a:endParaRPr lang="en-US" sz="1200" dirty="0"/>
+          </a:p>
+        </p:txBody>
+      </p:sp>
+      <p:sp>
+        <p:nvSpPr>
+          <p:cNvPr id="17" name="Shape 15"/>
+          <p:cNvSpPr/>
+          <p:nvPr/>
+        </p:nvSpPr>
+        <p:spPr>
+          <a:xfrm>
+            <a:off x="8174736" y="987552"/>
+            <a:ext cx="1600200" cy="292608"/>
+          </a:xfrm>
+          <a:prstGeom prst="roundRect">
+            <a:avLst>
+              <a:gd name="adj" fmla="val 31250"/>
+            </a:avLst>
+          </a:prstGeom>
+          <a:solidFill>
+            <a:srgbClr val="D8DEE4"/>
+          </a:solidFill>
+          <a:ln/>
+        </p:spPr>
+      </p:sp>
+      <p:sp>
+        <p:nvSpPr>
+          <p:cNvPr id="18" name="Text 16"/>
+          <p:cNvSpPr txBox="1"/>
+          <p:nvPr/>
+        </p:nvSpPr>
+        <p:spPr>
+          <a:xfrm>
+            <a:off x="8174736" y="987552"/>
+            <a:ext cx="1600200" cy="292608"/>
+          </a:xfrm>
+          <a:prstGeom prst="rect">
+            <a:avLst/>
+          </a:prstGeom>
+          <a:noFill/>
+          <a:ln/>
+        </p:spPr>
+        <p:txBody>
+          <a:bodyPr wrap="square" lIns="0" tIns="0" rIns="0" bIns="0" rtlCol="0" anchor="ctr"/>
+          <a:lstStyle/>
+          <a:p>
+            <a:pPr algn="ctr" indent="0" marL="0">
+              <a:buNone/>
+            </a:pPr>
+            <a:r>
+              <a:rPr lang="en-US" sz="1050" dirty="0">
+                <a:solidFill>
+                  <a:srgbClr val="5A6672"/>
+                </a:solidFill>
+                <a:latin typeface="Calibri" pitchFamily="34" charset="0"/>
+                <a:ea typeface="Calibri" pitchFamily="34" charset="-122"/>
+                <a:cs typeface="Calibri" pitchFamily="34" charset="-120"/>
+              </a:rPr>
+              <a:t>5 · Решение</a:t>
+            </a:r>
+            <a:endParaRPr lang="en-US" sz="1050" dirty="0"/>
+          </a:p>
+        </p:txBody>
+      </p:sp>
+      <p:sp>
+        <p:nvSpPr>
+          <p:cNvPr id="19" name="Text 17"/>
+          <p:cNvSpPr txBox="1"/>
+          <p:nvPr/>
+        </p:nvSpPr>
+        <p:spPr>
+          <a:xfrm>
+            <a:off x="9774936" y="987552"/>
+            <a:ext cx="146304" cy="292608"/>
+          </a:xfrm>
+          <a:prstGeom prst="rect">
+            <a:avLst/>
+          </a:prstGeom>
+          <a:noFill/>
+          <a:ln/>
+        </p:spPr>
+        <p:txBody>
+          <a:bodyPr wrap="square" lIns="0" tIns="0" rIns="0" bIns="0" rtlCol="0" anchor="ctr"/>
+          <a:lstStyle/>
+          <a:p>
+            <a:pPr algn="ctr" indent="0" marL="0">
+              <a:buNone/>
+            </a:pPr>
+            <a:r>
+              <a:rPr lang="en-US" sz="1200" dirty="0">
+                <a:solidFill>
+                  <a:srgbClr val="B6BEC7"/>
+                </a:solidFill>
+                <a:latin typeface="Calibri" pitchFamily="34" charset="0"/>
+                <a:ea typeface="Calibri" pitchFamily="34" charset="-122"/>
+                <a:cs typeface="Calibri" pitchFamily="34" charset="-120"/>
+              </a:rPr>
+              <a:t>›</a:t>
+            </a:r>
+            <a:endParaRPr lang="en-US" sz="1200" dirty="0"/>
+          </a:p>
+        </p:txBody>
+      </p:sp>
+      <p:sp>
+        <p:nvSpPr>
+          <p:cNvPr id="20" name="Shape 18"/>
+          <p:cNvSpPr/>
+          <p:nvPr/>
+        </p:nvSpPr>
+        <p:spPr>
+          <a:xfrm>
+            <a:off x="9921240" y="987552"/>
+            <a:ext cx="1600200" cy="292608"/>
+          </a:xfrm>
+          <a:prstGeom prst="roundRect">
+            <a:avLst>
+              <a:gd name="adj" fmla="val 31250"/>
+            </a:avLst>
+          </a:prstGeom>
+          <a:solidFill>
+            <a:srgbClr val="9C5B12"/>
+          </a:solidFill>
+          <a:ln/>
+        </p:spPr>
+      </p:sp>
+      <p:sp>
+        <p:nvSpPr>
+          <p:cNvPr id="21" name="Text 19"/>
+          <p:cNvSpPr txBox="1"/>
+          <p:nvPr/>
+        </p:nvSpPr>
+        <p:spPr>
+          <a:xfrm>
+            <a:off x="9921240" y="987552"/>
+            <a:ext cx="1600200" cy="292608"/>
+          </a:xfrm>
+          <a:prstGeom prst="rect">
+            <a:avLst/>
+          </a:prstGeom>
+          <a:noFill/>
+          <a:ln/>
+        </p:spPr>
+        <p:txBody>
+          <a:bodyPr wrap="square" lIns="0" tIns="0" rIns="0" bIns="0" rtlCol="0" anchor="ctr"/>
+          <a:lstStyle/>
+          <a:p>
+            <a:pPr algn="ctr" indent="0" marL="0">
+              <a:buNone/>
+            </a:pPr>
+            <a:r>
+              <a:rPr lang="en-US" sz="1050" b="1" dirty="0">
+                <a:solidFill>
+                  <a:srgbClr val="FFFFFF"/>
+                </a:solidFill>
+                <a:latin typeface="Calibri" pitchFamily="34" charset="0"/>
+                <a:ea typeface="Calibri" pitchFamily="34" charset="-122"/>
+                <a:cs typeface="Calibri" pitchFamily="34" charset="-120"/>
+              </a:rPr>
+              <a:t>6 · Удержание</a:t>
             </a:r>
             <a:endParaRPr lang="en-US" sz="1050" dirty="0"/>
           </a:p>
@@ -17011,7 +20043,7 @@
       </p:sp>
       <p:pic>
         <p:nvPicPr>
-          <p:cNvPr id="6" name="Image 0" descr="submission/figures/ekran-06.png">    </p:cNvPr>
+          <p:cNvPr id="22" name="Image 0" descr="submission/figures/ekran-06.png">    </p:cNvPr>
           <p:cNvPicPr>
             <a:picLocks noChangeAspect="1"/>
           </p:cNvPicPr>
@@ -17025,8 +20057,8 @@
         </p:blipFill>
         <p:spPr>
           <a:xfrm>
-            <a:off x="640080" y="1371600"/>
-            <a:ext cx="2148840" cy="3979652"/>
+            <a:off x="640080" y="1627632"/>
+            <a:ext cx="2194560" cy="4064325"/>
           </a:xfrm>
           <a:prstGeom prst="rect">
             <a:avLst/>
@@ -17035,14 +20067,14 @@
       </p:pic>
       <p:sp>
         <p:nvSpPr>
-          <p:cNvPr id="7" name="Shape 4"/>
+          <p:cNvPr id="23" name="Shape 20"/>
           <p:cNvSpPr/>
           <p:nvPr/>
         </p:nvSpPr>
         <p:spPr>
           <a:xfrm>
-            <a:off x="3063240" y="1371600"/>
-            <a:ext cx="4133088" cy="1609344"/>
+            <a:off x="3154680" y="1627632"/>
+            <a:ext cx="4069080" cy="1609344"/>
           </a:xfrm>
           <a:prstGeom prst="roundRect">
             <a:avLst>
@@ -17057,14 +20089,14 @@
       </p:sp>
       <p:sp>
         <p:nvSpPr>
-          <p:cNvPr id="8" name="Text 5"/>
-          <p:cNvSpPr txBox="1"/>
-          <p:nvPr/>
-        </p:nvSpPr>
-        <p:spPr>
-          <a:xfrm>
-            <a:off x="3319272" y="1554480"/>
-            <a:ext cx="3621024" cy="475488"/>
+          <p:cNvPr id="24" name="Text 21"/>
+          <p:cNvSpPr txBox="1"/>
+          <p:nvPr/>
+        </p:nvSpPr>
+        <p:spPr>
+          <a:xfrm>
+            <a:off x="3410712" y="1810512"/>
+            <a:ext cx="3557016" cy="475488"/>
           </a:xfrm>
           <a:prstGeom prst="rect">
             <a:avLst/>
@@ -17096,14 +20128,14 @@
       </p:sp>
       <p:sp>
         <p:nvSpPr>
-          <p:cNvPr id="9" name="Text 6"/>
-          <p:cNvSpPr txBox="1"/>
-          <p:nvPr/>
-        </p:nvSpPr>
-        <p:spPr>
-          <a:xfrm>
-            <a:off x="3319272" y="2084832"/>
-            <a:ext cx="3621024" cy="713232"/>
+          <p:cNvPr id="25" name="Text 22"/>
+          <p:cNvSpPr txBox="1"/>
+          <p:nvPr/>
+        </p:nvSpPr>
+        <p:spPr>
+          <a:xfrm>
+            <a:off x="3410712" y="2340864"/>
+            <a:ext cx="3557016" cy="713232"/>
           </a:xfrm>
           <a:prstGeom prst="rect">
             <a:avLst/>
@@ -17138,14 +20170,14 @@
       </p:sp>
       <p:sp>
         <p:nvSpPr>
-          <p:cNvPr id="10" name="Shape 7"/>
+          <p:cNvPr id="26" name="Shape 23"/>
           <p:cNvSpPr/>
           <p:nvPr/>
         </p:nvSpPr>
         <p:spPr>
           <a:xfrm>
-            <a:off x="7388352" y="1371600"/>
-            <a:ext cx="4133088" cy="1609344"/>
+            <a:off x="7452360" y="1627632"/>
+            <a:ext cx="4069080" cy="1609344"/>
           </a:xfrm>
           <a:prstGeom prst="roundRect">
             <a:avLst>
@@ -17160,14 +20192,14 @@
       </p:sp>
       <p:sp>
         <p:nvSpPr>
-          <p:cNvPr id="11" name="Text 8"/>
-          <p:cNvSpPr txBox="1"/>
-          <p:nvPr/>
-        </p:nvSpPr>
-        <p:spPr>
-          <a:xfrm>
-            <a:off x="7644384" y="1554480"/>
-            <a:ext cx="3621024" cy="475488"/>
+          <p:cNvPr id="27" name="Text 24"/>
+          <p:cNvSpPr txBox="1"/>
+          <p:nvPr/>
+        </p:nvSpPr>
+        <p:spPr>
+          <a:xfrm>
+            <a:off x="7708392" y="1810512"/>
+            <a:ext cx="3557016" cy="475488"/>
           </a:xfrm>
           <a:prstGeom prst="rect">
             <a:avLst/>
@@ -17199,14 +20231,14 @@
       </p:sp>
       <p:sp>
         <p:nvSpPr>
-          <p:cNvPr id="12" name="Text 9"/>
-          <p:cNvSpPr txBox="1"/>
-          <p:nvPr/>
-        </p:nvSpPr>
-        <p:spPr>
-          <a:xfrm>
-            <a:off x="7644384" y="2084832"/>
-            <a:ext cx="3621024" cy="713232"/>
+          <p:cNvPr id="28" name="Text 25"/>
+          <p:cNvSpPr txBox="1"/>
+          <p:nvPr/>
+        </p:nvSpPr>
+        <p:spPr>
+          <a:xfrm>
+            <a:off x="7708392" y="2340864"/>
+            <a:ext cx="3557016" cy="713232"/>
           </a:xfrm>
           <a:prstGeom prst="rect">
             <a:avLst/>
@@ -17241,14 +20273,14 @@
       </p:sp>
       <p:sp>
         <p:nvSpPr>
-          <p:cNvPr id="13" name="Shape 10"/>
+          <p:cNvPr id="29" name="Shape 26"/>
           <p:cNvSpPr/>
           <p:nvPr/>
         </p:nvSpPr>
         <p:spPr>
           <a:xfrm>
-            <a:off x="3063240" y="3145536"/>
-            <a:ext cx="8458200" cy="2249424"/>
+            <a:off x="3154680" y="3401568"/>
+            <a:ext cx="8366760" cy="2249424"/>
           </a:xfrm>
           <a:prstGeom prst="roundRect">
             <a:avLst>
@@ -17263,14 +20295,14 @@
       </p:sp>
       <p:sp>
         <p:nvSpPr>
-          <p:cNvPr id="14" name="Text 11"/>
-          <p:cNvSpPr txBox="1"/>
-          <p:nvPr/>
-        </p:nvSpPr>
-        <p:spPr>
-          <a:xfrm>
-            <a:off x="3337560" y="3300984"/>
-            <a:ext cx="7909560" cy="329184"/>
+          <p:cNvPr id="30" name="Text 27"/>
+          <p:cNvSpPr txBox="1"/>
+          <p:nvPr/>
+        </p:nvSpPr>
+        <p:spPr>
+          <a:xfrm>
+            <a:off x="3429000" y="3557016"/>
+            <a:ext cx="7818120" cy="329184"/>
           </a:xfrm>
           <a:prstGeom prst="rect">
             <a:avLst/>
@@ -17302,14 +20334,14 @@
       </p:sp>
       <p:sp>
         <p:nvSpPr>
-          <p:cNvPr id="15" name="Text 12"/>
-          <p:cNvSpPr txBox="1"/>
-          <p:nvPr/>
-        </p:nvSpPr>
-        <p:spPr>
-          <a:xfrm>
-            <a:off x="3337560" y="3675888"/>
-            <a:ext cx="7909560" cy="1554480"/>
+          <p:cNvPr id="31" name="Text 28"/>
+          <p:cNvSpPr txBox="1"/>
+          <p:nvPr/>
+        </p:nvSpPr>
+        <p:spPr>
+          <a:xfrm>
+            <a:off x="3429000" y="3931920"/>
+            <a:ext cx="7818120" cy="1554480"/>
           </a:xfrm>
           <a:prstGeom prst="rect">
             <a:avLst/>
@@ -17627,7 +20659,7 @@
                 <a:ea typeface="Calibri" pitchFamily="34" charset="-122"/>
                 <a:cs typeface="Calibri" pitchFamily="34" charset="-120"/>
               </a:rPr>
-              <a:t>Это разница между курсом в день сигнала и средним курсом следующих пяти публикаций, в базисных пунктах. Проще: сколько клиент выигрывает, переведя сегодня, а не в случайный день следующей недели. «Достижимая» – потому что метрика кейса сравнивает день с окном ±5 публикаций и половину выгоды берёт из прошлого, которое клиент уже упустил и получить не может.</a:t>
+              <a:t>Это разница между курсом в день сигнала и средним курсом следующих пяти публикаций, в базисных пунктах. Пять публикаций – это пять рабочих дней, то есть примерно календарная неделя. Проще: сколько клиент выигрывает, переведя сегодня, а не в случайный день ближайшей недели. «Достижимая» – потому что метрика кейса сравнивает день с окном ±5 и половину выгоды берёт из прошлого, которое клиент уже упустил.</a:t>
             </a:r>
             <a:endParaRPr lang="en-US" sz="1250" dirty="0"/>
           </a:p>
